--- a/resources/AI时代，做会借力的家长-v1.pptx
+++ b/resources/AI时代，做会借力的家长-v1.pptx
@@ -12,10 +12,10 @@
     <p:sldId id="256" r:id="rId3"/>
     <p:sldId id="257" r:id="rId4"/>
     <p:sldId id="258" r:id="rId5"/>
-    <p:sldId id="266" r:id="rId6"/>
+    <p:sldId id="260" r:id="rId6"/>
     <p:sldId id="259" r:id="rId7"/>
-    <p:sldId id="260" r:id="rId8"/>
-    <p:sldId id="261" r:id="rId9"/>
+    <p:sldId id="261" r:id="rId8"/>
+    <p:sldId id="266" r:id="rId9"/>
     <p:sldId id="262" r:id="rId10"/>
     <p:sldId id="263" r:id="rId11"/>
     <p:sldId id="264" r:id="rId12"/>
@@ -1836,7 +1836,23 @@
                   <a:srgbClr val="000000"/>
                 </a:solidFill>
               </a:rPr>
-              <a:t>第三个，面对AI，堵不如疏。现在的孩子，是AI时代的原住民，你不让他在家里用，他也会在别的地方用。只有我们家校同频、目标一致，才能教孩子正确用好AI，让它成为孩子学习的帮手，而不是抄作业的工具。</a:t>
+              <a:t>第三个，面对AI，堵不如疏。现在的孩子，是AI时代的原住民，你不让他在家里用，他也会在别的地方用。我们</a:t>
+            </a:r>
+            <a:r>
+              <a:rPr lang="zh-CN" altLang="en-US" sz="1400" b="0" i="0" u="none" strike="noStrike" dirty="0">
+                <a:solidFill>
+                  <a:srgbClr val="000000"/>
+                </a:solidFill>
+              </a:rPr>
+              <a:t>得</a:t>
+            </a:r>
+            <a:r>
+              <a:rPr lang="en-US" sz="1400" b="0" i="0" u="none" strike="noStrike" dirty="0">
+                <a:solidFill>
+                  <a:srgbClr val="000000"/>
+                </a:solidFill>
+              </a:rPr>
+              <a:t>家校同频、目标一致，才能教孩子正确用好AI，让它成为孩子学习的帮手，而不是抄作业的工具。</a:t>
             </a:r>
           </a:p>
         </p:txBody>
@@ -1915,6 +1931,2044 @@
 </file>
 
 <file path=ppt/notesSlides/notesSlide4.xml><?xml version="1.0" encoding="utf-8"?>
+<p:notes xmlns:a="http://schemas.openxmlformats.org/drawingml/2006/main" xmlns:r="http://schemas.openxmlformats.org/officeDocument/2006/relationships" xmlns:p="http://schemas.openxmlformats.org/presentationml/2006/main">
+  <p:cSld>
+    <p:spTree>
+      <p:nvGrpSpPr>
+        <p:cNvPr id="1" name=""/>
+        <p:cNvGrpSpPr/>
+        <p:nvPr/>
+      </p:nvGrpSpPr>
+      <p:grpSpPr>
+        <a:xfrm>
+          <a:off x="0" y="0"/>
+          <a:ext cx="0" cy="0"/>
+          <a:chOff x="0" y="0"/>
+          <a:chExt cx="0" cy="0"/>
+        </a:xfrm>
+      </p:grpSpPr>
+      <p:sp>
+        <p:nvSpPr>
+          <p:cNvPr id="2" name="Header Placeholder 1"/>
+          <p:cNvSpPr>
+            <a:spLocks noGrp="1"/>
+          </p:cNvSpPr>
+          <p:nvPr>
+            <p:ph type="hdr" sz="quarter"/>
+          </p:nvPr>
+        </p:nvSpPr>
+        <p:spPr>
+          <a:xfrm>
+            <a:off x="0" y="0"/>
+            <a:ext cx="3962400" cy="342900"/>
+          </a:xfrm>
+          <a:prstGeom prst="rect">
+            <a:avLst/>
+          </a:prstGeom>
+        </p:spPr>
+        <p:txBody>
+          <a:bodyPr vert="horz" lIns="91440" tIns="45720" rIns="91440" bIns="45720" rtlCol="0"/>
+          <a:lstStyle>
+            <a:lvl1pPr algn="l">
+              <a:defRPr sz="1200"/>
+            </a:lvl1pPr>
+          </a:lstStyle>
+          <a:p>
+            <a:endParaRPr/>
+          </a:p>
+        </p:txBody>
+      </p:sp>
+      <p:sp>
+        <p:nvSpPr>
+          <p:cNvPr id="3" name="Date Placeholder 2"/>
+          <p:cNvSpPr>
+            <a:spLocks noGrp="1"/>
+          </p:cNvSpPr>
+          <p:nvPr>
+            <p:ph type="dt" idx="1"/>
+          </p:nvPr>
+        </p:nvSpPr>
+        <p:spPr>
+          <a:xfrm>
+            <a:off x="5180013" y="0"/>
+            <a:ext cx="3962400" cy="342900"/>
+          </a:xfrm>
+          <a:prstGeom prst="rect">
+            <a:avLst/>
+          </a:prstGeom>
+        </p:spPr>
+        <p:txBody>
+          <a:bodyPr vert="horz" lIns="91440" tIns="45720" rIns="91440" bIns="45720" rtlCol="0"/>
+          <a:lstStyle>
+            <a:lvl1pPr algn="r">
+              <a:defRPr sz="1200"/>
+            </a:lvl1pPr>
+          </a:lstStyle>
+          <a:p>
+            <a:r>
+              <a:rPr lang="cs-CZ"/>
+              <a:t>1.7.2013</a:t>
+            </a:r>
+          </a:p>
+        </p:txBody>
+      </p:sp>
+      <p:sp>
+        <p:nvSpPr>
+          <p:cNvPr id="4" name="Slide Image Placeholder 3"/>
+          <p:cNvSpPr>
+            <a:spLocks noGrp="1" noRot="1" noChangeAspect="1"/>
+          </p:cNvSpPr>
+          <p:nvPr>
+            <p:ph type="sldImg" idx="2"/>
+          </p:nvPr>
+        </p:nvSpPr>
+        <p:spPr>
+          <a:xfrm>
+            <a:off x="2290763" y="512763"/>
+            <a:ext cx="4562475" cy="2566987"/>
+          </a:xfrm>
+          <a:prstGeom prst="rect">
+            <a:avLst/>
+          </a:prstGeom>
+          <a:noFill/>
+          <a:ln w="12700">
+            <a:solidFill>
+              <a:prstClr val="black"/>
+            </a:solidFill>
+          </a:ln>
+        </p:spPr>
+        <p:txBody>
+          <a:bodyPr vert="horz" lIns="91440" tIns="45720" rIns="91440" bIns="45720" rtlCol="0" anchor="ctr"/>
+          <a:lstStyle/>
+          <a:p>
+            <a:endParaRPr/>
+          </a:p>
+        </p:txBody>
+      </p:sp>
+      <p:sp>
+        <p:nvSpPr>
+          <p:cNvPr id="5" name="Notes Placeholder 4"/>
+          <p:cNvSpPr>
+            <a:spLocks noGrp="1"/>
+          </p:cNvSpPr>
+          <p:nvPr>
+            <p:ph type="body" sz="quarter" idx="3"/>
+          </p:nvPr>
+        </p:nvSpPr>
+        <p:spPr>
+          <a:xfrm>
+            <a:off x="914400" y="3251200"/>
+            <a:ext cx="7315200" cy="3081338"/>
+          </a:xfrm>
+          <a:prstGeom prst="rect">
+            <a:avLst/>
+          </a:prstGeom>
+        </p:spPr>
+        <p:txBody>
+          <a:bodyPr vert="horz" lIns="91440" tIns="45720" rIns="91440" bIns="45720" rtlCol="0" anchor="ctr"/>
+          <a:lstStyle>
+            <a:lvl1pPr algn="l">
+              <a:defRPr sz="1400" b="0" i="0" u="none" strike="noStrike"/>
+            </a:lvl1pPr>
+          </a:lstStyle>
+          <a:p>
+            <a:pPr indent="0" algn="l">
+              <a:lnSpc>
+                <a:spcPct val="100000"/>
+              </a:lnSpc>
+            </a:pPr>
+            <a:r>
+              <a:rPr lang="en-US" sz="1400" b="0" i="0" u="none" strike="noStrike" dirty="0">
+                <a:solidFill>
+                  <a:srgbClr val="000000"/>
+                </a:solidFill>
+              </a:rPr>
+              <a:t>第1个故事，是关于错题的，我相信不管是各位老师，还是我们家长，都特别头疼这件事。我家</a:t>
+            </a:r>
+            <a:r>
+              <a:rPr lang="zh-CN" altLang="en-US" sz="1400" b="0" i="0" u="none" strike="noStrike" dirty="0">
+                <a:solidFill>
+                  <a:srgbClr val="000000"/>
+                </a:solidFill>
+              </a:rPr>
+              <a:t>平时是妈妈带娃，</a:t>
+            </a:r>
+            <a:r>
+              <a:rPr lang="en-US" sz="1400" b="0" i="0" u="none" strike="noStrike" dirty="0">
+                <a:solidFill>
+                  <a:srgbClr val="000000"/>
+                </a:solidFill>
+              </a:rPr>
+              <a:t>娃之前数学错题，改了又错，</a:t>
+            </a:r>
+            <a:r>
+              <a:rPr lang="zh-CN" altLang="en-US" sz="1400" b="0" i="0" u="none" strike="noStrike" dirty="0">
+                <a:solidFill>
+                  <a:srgbClr val="000000"/>
+                </a:solidFill>
+              </a:rPr>
+              <a:t>妈妈</a:t>
+            </a:r>
+            <a:r>
+              <a:rPr lang="en-US" sz="1400" b="0" i="0" u="none" strike="noStrike" dirty="0">
+                <a:solidFill>
+                  <a:srgbClr val="000000"/>
+                </a:solidFill>
+              </a:rPr>
+              <a:t>给他讲题，</a:t>
+            </a:r>
+            <a:r>
+              <a:rPr lang="zh-CN" altLang="en-US" sz="1400" b="0" i="0" u="none" strike="noStrike" dirty="0">
+                <a:solidFill>
+                  <a:srgbClr val="000000"/>
+                </a:solidFill>
+              </a:rPr>
+              <a:t>经常</a:t>
+            </a:r>
+            <a:r>
+              <a:rPr lang="en-US" sz="1400" b="0" i="0" u="none" strike="noStrike" dirty="0">
+                <a:solidFill>
+                  <a:srgbClr val="000000"/>
+                </a:solidFill>
+              </a:rPr>
+              <a:t>讲着讲着就急了，好好的讲题，最后变成了亲子大战</a:t>
+            </a:r>
+            <a:r>
+              <a:rPr lang="zh-CN" altLang="en-US" sz="1400" b="0" i="0" u="none" strike="noStrike" dirty="0">
+                <a:solidFill>
+                  <a:srgbClr val="000000"/>
+                </a:solidFill>
+              </a:rPr>
+              <a:t>，真人</a:t>
+            </a:r>
+            <a:r>
+              <a:rPr lang="en-US" altLang="zh-CN" sz="1400" b="0" i="0" u="none" strike="noStrike" dirty="0">
+                <a:solidFill>
+                  <a:srgbClr val="000000"/>
+                </a:solidFill>
+              </a:rPr>
+              <a:t>PK</a:t>
+            </a:r>
+            <a:r>
+              <a:rPr lang="zh-CN" altLang="en-US" sz="1400" b="0" i="0" u="none" strike="noStrike" dirty="0">
+                <a:solidFill>
+                  <a:srgbClr val="000000"/>
+                </a:solidFill>
+              </a:rPr>
+              <a:t>，最后找我当裁判</a:t>
+            </a:r>
+            <a:r>
+              <a:rPr lang="en-US" sz="1400" b="0" i="0" u="none" strike="noStrike" dirty="0">
+                <a:solidFill>
+                  <a:srgbClr val="000000"/>
+                </a:solidFill>
+              </a:rPr>
+              <a:t>。</a:t>
+            </a:r>
+          </a:p>
+          <a:p>
+            <a:pPr indent="0" algn="l">
+              <a:lnSpc>
+                <a:spcPct val="100000"/>
+              </a:lnSpc>
+            </a:pPr>
+            <a:endParaRPr lang="en-US" sz="1400" b="0" i="0" u="none" strike="noStrike" dirty="0">
+              <a:solidFill>
+                <a:srgbClr val="000000"/>
+              </a:solidFill>
+            </a:endParaRPr>
+          </a:p>
+          <a:p>
+            <a:pPr indent="0" algn="l">
+              <a:lnSpc>
+                <a:spcPct val="100000"/>
+              </a:lnSpc>
+            </a:pPr>
+            <a:r>
+              <a:rPr lang="en-US" sz="1400" b="0" i="0" u="none" strike="noStrike" dirty="0">
+                <a:solidFill>
+                  <a:srgbClr val="000000"/>
+                </a:solidFill>
+              </a:rPr>
+              <a:t>说实话，我们家长早就忘了小学的知识点体系，根本不知道</a:t>
+            </a:r>
+            <a:r>
+              <a:rPr lang="zh-CN" altLang="en-US" sz="1400" b="0" i="0" u="none" strike="noStrike" dirty="0">
+                <a:solidFill>
+                  <a:srgbClr val="000000"/>
+                </a:solidFill>
+              </a:rPr>
+              <a:t>一</a:t>
+            </a:r>
+            <a:r>
+              <a:rPr lang="en-US" sz="1400" b="0" i="0" u="none" strike="noStrike" dirty="0">
+                <a:solidFill>
+                  <a:srgbClr val="000000"/>
+                </a:solidFill>
+              </a:rPr>
+              <a:t>道错题，对应的是课本里的哪个单元、哪个知识点，也不知道该怎么给孩子做巩固练习。</a:t>
+            </a:r>
+            <a:r>
+              <a:rPr lang="zh-CN" altLang="en-US" sz="1400" b="0" i="0" u="none" strike="noStrike" dirty="0">
+                <a:solidFill>
+                  <a:srgbClr val="000000"/>
+                </a:solidFill>
+              </a:rPr>
+              <a:t>比如之前给小朋友讲鸡兔同笼问题，我一上来就介绍了一堆二元一次方程的知识，结果讲了一周，真的是整整一周，他都不理解是啥意思，方法也没掌握。后来发现他脑力还没发育到能理解那么抽象概念的地步，我当时真有点沮丧，没想到还有讲不懂的情况。</a:t>
+            </a:r>
+            <a:endParaRPr lang="en-US" altLang="zh-CN" sz="1400" b="0" i="0" u="none" strike="noStrike" dirty="0">
+              <a:solidFill>
+                <a:srgbClr val="000000"/>
+              </a:solidFill>
+            </a:endParaRPr>
+          </a:p>
+          <a:p>
+            <a:pPr indent="0" algn="l">
+              <a:lnSpc>
+                <a:spcPct val="100000"/>
+              </a:lnSpc>
+            </a:pPr>
+            <a:endParaRPr lang="en-US" altLang="zh-CN" sz="1400" b="0" i="0" u="none" strike="noStrike" dirty="0">
+              <a:solidFill>
+                <a:srgbClr val="000000"/>
+              </a:solidFill>
+            </a:endParaRPr>
+          </a:p>
+          <a:p>
+            <a:pPr indent="0" algn="l">
+              <a:lnSpc>
+                <a:spcPct val="100000"/>
+              </a:lnSpc>
+            </a:pPr>
+            <a:r>
+              <a:rPr lang="en-US" sz="1400" b="0" i="0" u="none" strike="noStrike" dirty="0">
+                <a:solidFill>
+                  <a:srgbClr val="000000"/>
+                </a:solidFill>
+              </a:rPr>
+              <a:t>后来我就</a:t>
+            </a:r>
+            <a:r>
+              <a:rPr lang="zh-CN" altLang="en-US" sz="1400" b="0" i="0" u="none" strike="noStrike" dirty="0">
+                <a:solidFill>
+                  <a:srgbClr val="000000"/>
+                </a:solidFill>
+              </a:rPr>
+              <a:t>把我的困惑跟我们字节的同事说了一下，他们就做</a:t>
+            </a:r>
+            <a:r>
+              <a:rPr lang="en-US" sz="1400" b="0" i="0" u="none" strike="noStrike" dirty="0">
+                <a:solidFill>
+                  <a:srgbClr val="000000"/>
+                </a:solidFill>
+              </a:rPr>
+              <a:t>了</a:t>
+            </a:r>
+            <a:r>
+              <a:rPr lang="zh-CN" altLang="en-US" sz="1400" b="0" i="0" u="none" strike="noStrike" dirty="0">
+                <a:solidFill>
+                  <a:srgbClr val="000000"/>
+                </a:solidFill>
+              </a:rPr>
+              <a:t>一款叫“</a:t>
+            </a:r>
+            <a:r>
+              <a:rPr lang="en-US" sz="1400" b="0" i="0" u="none" strike="noStrike" dirty="0">
+                <a:solidFill>
+                  <a:srgbClr val="000000"/>
+                </a:solidFill>
+              </a:rPr>
+              <a:t>豆包爱学</a:t>
+            </a:r>
+            <a:r>
+              <a:rPr lang="zh-CN" altLang="en-US" sz="1400" b="0" i="0" u="none" strike="noStrike" dirty="0">
+                <a:solidFill>
+                  <a:srgbClr val="000000"/>
+                </a:solidFill>
+              </a:rPr>
+              <a:t>”的</a:t>
+            </a:r>
+            <a:r>
+              <a:rPr lang="en-US" sz="1400" b="0" i="0" u="none" strike="noStrike" dirty="0">
+                <a:solidFill>
+                  <a:srgbClr val="000000"/>
+                </a:solidFill>
+              </a:rPr>
+              <a:t>APP，</a:t>
+            </a:r>
+            <a:r>
+              <a:rPr lang="zh-CN" altLang="en-US" sz="1400" b="0" i="0" u="none" strike="noStrike" dirty="0">
+                <a:solidFill>
+                  <a:srgbClr val="000000"/>
+                </a:solidFill>
+              </a:rPr>
+              <a:t>它是在豆包的基础上，强化了国内外的学习知识，它可以</a:t>
+            </a:r>
+            <a:r>
+              <a:rPr lang="en-US" sz="1400" b="0" i="0" u="none" strike="noStrike" dirty="0">
+                <a:solidFill>
+                  <a:srgbClr val="000000"/>
+                </a:solidFill>
+              </a:rPr>
+              <a:t>帮孩子做错题集，全程我只定规则，孩子自己操作，效果特别好。我们的流程特别简单：第一步，孩子必须先自己订正错题，</a:t>
+            </a:r>
+            <a:r>
+              <a:rPr lang="zh-CN" altLang="en-US" sz="1400" b="0" i="0" u="none" strike="noStrike" dirty="0">
+                <a:solidFill>
+                  <a:srgbClr val="000000"/>
+                </a:solidFill>
+              </a:rPr>
+              <a:t>订正</a:t>
+            </a:r>
+            <a:r>
+              <a:rPr lang="en-US" sz="1400" b="0" i="0" u="none" strike="noStrike" dirty="0">
+                <a:solidFill>
+                  <a:srgbClr val="000000"/>
+                </a:solidFill>
+              </a:rPr>
+              <a:t>不出来的，再拍照上传；第二步，AI会先告诉孩子，这道题对应的是课本里哪个单元的哪个知识点，再用小学孩子能听懂的大白话，一步步拆解解题步骤；</a:t>
+            </a:r>
+            <a:r>
+              <a:rPr lang="zh-CN" altLang="en-US" sz="1400" b="0" i="0" u="none" strike="noStrike" dirty="0">
+                <a:solidFill>
+                  <a:srgbClr val="000000"/>
+                </a:solidFill>
+              </a:rPr>
+              <a:t>比如鸡兔同笼，</a:t>
+            </a:r>
+            <a:r>
+              <a:rPr lang="en-US" altLang="zh-CN" sz="1400" b="0" i="0" u="none" strike="noStrike" dirty="0">
+                <a:solidFill>
+                  <a:srgbClr val="000000"/>
+                </a:solidFill>
+              </a:rPr>
+              <a:t>APP</a:t>
+            </a:r>
+            <a:r>
+              <a:rPr lang="zh-CN" altLang="en-US" sz="1400" b="0" i="0" u="none" strike="noStrike" dirty="0">
+                <a:solidFill>
+                  <a:srgbClr val="000000"/>
+                </a:solidFill>
+              </a:rPr>
+              <a:t>就会讲假设笼子里都是鸡，那么应该有多少条腿，那么现在多出来这么多腿，多出来的就是兔子的，那一只兔子多出两条腿，所以一共有多少兔子呢？这样小朋友就理解了，它还有动画，让小朋友更直观的理解；</a:t>
+            </a:r>
+            <a:r>
+              <a:rPr lang="en-US" sz="1400" b="0" i="0" u="none" strike="noStrike" dirty="0">
+                <a:solidFill>
+                  <a:srgbClr val="000000"/>
+                </a:solidFill>
+              </a:rPr>
+              <a:t>第三步，AI会帮孩子分析错因，是知识点没掌握，还是粗心看错了数，最后再给</a:t>
+            </a:r>
+            <a:r>
+              <a:rPr lang="zh-CN" altLang="en-US" sz="1400" b="0" i="0" u="none" strike="noStrike" dirty="0">
+                <a:solidFill>
+                  <a:srgbClr val="000000"/>
+                </a:solidFill>
+              </a:rPr>
+              <a:t>几</a:t>
+            </a:r>
+            <a:r>
+              <a:rPr lang="en-US" sz="1400" b="0" i="0" u="none" strike="noStrike" dirty="0">
+                <a:solidFill>
+                  <a:srgbClr val="000000"/>
+                </a:solidFill>
+              </a:rPr>
+              <a:t>道同类型的基础练习题</a:t>
+            </a:r>
+            <a:r>
+              <a:rPr lang="zh-CN" altLang="en-US" sz="1400" b="0" i="0" u="none" strike="noStrike" dirty="0">
+                <a:solidFill>
+                  <a:srgbClr val="000000"/>
+                </a:solidFill>
+              </a:rPr>
+              <a:t>和拔高题</a:t>
+            </a:r>
+            <a:r>
+              <a:rPr lang="en-US" sz="1400" b="0" i="0" u="none" strike="noStrike" dirty="0">
+                <a:solidFill>
+                  <a:srgbClr val="000000"/>
+                </a:solidFill>
+              </a:rPr>
+              <a:t>，帮孩子巩固。最让我惊喜的是，它的语音讲解特别亲切，像咱们老师上课的语气一样，完全没有机械感，孩子愿意反复听。</a:t>
+            </a:r>
+            <a:br>
+              <a:rPr lang="en-US" sz="1400" b="0" i="0" u="none" strike="noStrike" dirty="0">
+                <a:solidFill>
+                  <a:srgbClr val="000000"/>
+                </a:solidFill>
+              </a:rPr>
+            </a:br>
+            <a:br>
+              <a:rPr lang="en-US" sz="1400" b="0" i="0" u="none" strike="noStrike" dirty="0">
+                <a:solidFill>
+                  <a:srgbClr val="000000"/>
+                </a:solidFill>
+              </a:rPr>
+            </a:br>
+            <a:r>
+              <a:rPr lang="en-US" sz="1400" b="0" i="0" u="none" strike="noStrike" dirty="0">
+                <a:solidFill>
+                  <a:srgbClr val="000000"/>
+                </a:solidFill>
+              </a:rPr>
+              <a:t>用了这个方法之后，孩子的变化特别大。现在他遇到错题，不会直接扔给我，也不会偷偷抄答案，而是自己先订正，再用AI听讲解，自己整理错题本。错题对应的知识点，掌握的越来越牢，数学成绩也</a:t>
+            </a:r>
+            <a:r>
+              <a:rPr lang="zh-CN" altLang="en-US" sz="1400" b="0" i="0" u="none" strike="noStrike" dirty="0">
+                <a:solidFill>
+                  <a:srgbClr val="000000"/>
+                </a:solidFill>
+              </a:rPr>
+              <a:t>有了一些进步（最近连续得了三个</a:t>
+            </a:r>
+            <a:r>
+              <a:rPr lang="en-US" altLang="zh-CN" sz="1400" b="0" i="0" u="none" strike="noStrike" dirty="0">
+                <a:solidFill>
+                  <a:srgbClr val="000000"/>
+                </a:solidFill>
+              </a:rPr>
+              <a:t>A+</a:t>
+            </a:r>
+            <a:r>
+              <a:rPr lang="zh-CN" altLang="en-US" sz="1400" b="0" i="0" u="none" strike="noStrike" dirty="0">
+                <a:solidFill>
+                  <a:srgbClr val="000000"/>
+                </a:solidFill>
+              </a:rPr>
+              <a:t>）</a:t>
+            </a:r>
+            <a:r>
+              <a:rPr lang="en-US" sz="1400" b="0" i="0" u="none" strike="noStrike" dirty="0">
+                <a:solidFill>
+                  <a:srgbClr val="000000"/>
+                </a:solidFill>
+              </a:rPr>
+              <a:t>。最重要的是，他不再怕错题，不再怕学习里的困难，慢慢养成了自己解决问题的意识。</a:t>
+            </a:r>
+            <a:br>
+              <a:rPr lang="en-US" sz="1400" b="0" i="0" u="none" strike="noStrike" dirty="0">
+                <a:solidFill>
+                  <a:srgbClr val="000000"/>
+                </a:solidFill>
+              </a:rPr>
+            </a:br>
+            <a:br>
+              <a:rPr lang="en-US" sz="1400" b="0" i="0" u="none" strike="noStrike" dirty="0">
+                <a:solidFill>
+                  <a:srgbClr val="000000"/>
+                </a:solidFill>
+              </a:rPr>
+            </a:br>
+            <a:r>
+              <a:rPr lang="en-US" sz="1400" b="0" i="0" u="none" strike="noStrike" dirty="0">
+                <a:solidFill>
+                  <a:srgbClr val="000000"/>
+                </a:solidFill>
+              </a:rPr>
+              <a:t>其实这个故事，也给我自己带来了很大的启发。咱们</a:t>
+            </a:r>
+            <a:r>
+              <a:rPr lang="zh-CN" altLang="en-US" sz="1400" b="0" i="0" u="none" strike="noStrike" dirty="0">
+                <a:solidFill>
+                  <a:srgbClr val="000000"/>
+                </a:solidFill>
+              </a:rPr>
+              <a:t>每</a:t>
+            </a:r>
+            <a:r>
+              <a:rPr lang="en-US" sz="1400" b="0" i="0" u="none" strike="noStrike" dirty="0">
+                <a:solidFill>
+                  <a:srgbClr val="000000"/>
+                </a:solidFill>
+              </a:rPr>
+              <a:t>个班有几十个孩子，每个孩子的错题、薄弱点都不一样，各位老师很难给每个孩子，做一对一的错题讲解和巩固。而AI，完全可以成为咱们老师的“专属助教”，帮孩子做个性化的错题巩固，帮家长做日常的讲题辅导，和咱们学校的课堂教学形成完美的互补，真正实现差异化教学。</a:t>
+            </a:r>
+            <a:br>
+              <a:rPr lang="en-US" sz="1400" b="0" i="0" u="none" strike="noStrike" dirty="0">
+                <a:solidFill>
+                  <a:srgbClr val="000000"/>
+                </a:solidFill>
+              </a:rPr>
+            </a:br>
+            <a:br>
+              <a:rPr lang="en-US" sz="1400" b="0" i="0" u="none" strike="noStrike" dirty="0">
+                <a:solidFill>
+                  <a:srgbClr val="000000"/>
+                </a:solidFill>
+              </a:rPr>
+            </a:br>
+            <a:r>
+              <a:rPr lang="zh-CN" altLang="en-US" sz="1400" b="0" i="0" u="none" strike="noStrike" dirty="0">
+                <a:solidFill>
+                  <a:srgbClr val="000000"/>
+                </a:solidFill>
+              </a:rPr>
+              <a:t>启示我感觉咱们学校一直有整理错题集的传统，尤其是数学，我记得每学期的小练兵也好、大作战也好、期末的大礼包也好，其实都是总结了前几个年级同学错的多的部分，那么现在有个</a:t>
+            </a:r>
+            <a:r>
+              <a:rPr lang="en-US" altLang="zh-CN" sz="1400" b="0" i="0" u="none" strike="noStrike" dirty="0">
+                <a:solidFill>
+                  <a:srgbClr val="000000"/>
+                </a:solidFill>
+              </a:rPr>
+              <a:t>AI</a:t>
+            </a:r>
+            <a:r>
+              <a:rPr lang="zh-CN" altLang="en-US" sz="1400" b="0" i="0" u="none" strike="noStrike" dirty="0">
+                <a:solidFill>
+                  <a:srgbClr val="000000"/>
+                </a:solidFill>
+              </a:rPr>
+              <a:t>，可以针对每个人定制自己的大礼包，这种工作量放在以往是不敢想想的，但是现在有了</a:t>
+            </a:r>
+            <a:r>
+              <a:rPr lang="en-US" altLang="zh-CN" sz="1400" b="0" i="0" u="none" strike="noStrike" dirty="0">
+                <a:solidFill>
+                  <a:srgbClr val="000000"/>
+                </a:solidFill>
+              </a:rPr>
+              <a:t>AI</a:t>
+            </a:r>
+            <a:r>
+              <a:rPr lang="zh-CN" altLang="en-US" sz="1400" b="0" i="0" u="none" strike="noStrike" dirty="0">
+                <a:solidFill>
+                  <a:srgbClr val="000000"/>
+                </a:solidFill>
+              </a:rPr>
+              <a:t>，这种针对性以及质量和效率的提升，是跨越式的。</a:t>
+            </a:r>
+            <a:endParaRPr lang="en-US" sz="1400" b="0" i="0" u="none" strike="noStrike" dirty="0">
+              <a:solidFill>
+                <a:srgbClr val="000000"/>
+              </a:solidFill>
+            </a:endParaRPr>
+          </a:p>
+        </p:txBody>
+      </p:sp>
+      <p:sp>
+        <p:nvSpPr>
+          <p:cNvPr id="6" name="Footer Placeholder 5"/>
+          <p:cNvSpPr>
+            <a:spLocks noGrp="1"/>
+          </p:cNvSpPr>
+          <p:nvPr>
+            <p:ph type="ftr" sz="quarter" idx="4"/>
+          </p:nvPr>
+        </p:nvSpPr>
+        <p:spPr>
+          <a:xfrm>
+            <a:off x="0" y="6502400"/>
+            <a:ext cx="3962400" cy="341313"/>
+          </a:xfrm>
+          <a:prstGeom prst="rect">
+            <a:avLst/>
+          </a:prstGeom>
+        </p:spPr>
+        <p:txBody>
+          <a:bodyPr vert="horz" lIns="91440" tIns="45720" rIns="91440" bIns="45720" rtlCol="0" anchor="b"/>
+          <a:lstStyle>
+            <a:lvl1pPr algn="l">
+              <a:defRPr sz="1200"/>
+            </a:lvl1pPr>
+          </a:lstStyle>
+          <a:p>
+            <a:endParaRPr/>
+          </a:p>
+        </p:txBody>
+      </p:sp>
+      <p:sp>
+        <p:nvSpPr>
+          <p:cNvPr id="7" name="Slide Number Placeholder 6"/>
+          <p:cNvSpPr>
+            <a:spLocks noGrp="1"/>
+          </p:cNvSpPr>
+          <p:nvPr>
+            <p:ph type="sldNum" sz="quarter" idx="5"/>
+          </p:nvPr>
+        </p:nvSpPr>
+        <p:spPr>
+          <a:xfrm>
+            <a:off x="5180013" y="6502400"/>
+            <a:ext cx="3962400" cy="341313"/>
+          </a:xfrm>
+          <a:prstGeom prst="rect">
+            <a:avLst/>
+          </a:prstGeom>
+        </p:spPr>
+        <p:txBody>
+          <a:bodyPr vert="horz" lIns="91440" tIns="45720" rIns="91440" bIns="45720" rtlCol="0" anchor="b"/>
+          <a:lstStyle>
+            <a:lvl1pPr algn="r">
+              <a:defRPr sz="1200"/>
+            </a:lvl1pPr>
+          </a:lstStyle>
+          <a:p>
+            <a:r>
+              <a:rPr lang="cs-CZ"/>
+              <a:t>‹#›</a:t>
+            </a:r>
+          </a:p>
+        </p:txBody>
+      </p:sp>
+    </p:spTree>
+  </p:cSld>
+  <p:clrMapOvr>
+    <a:masterClrMapping/>
+  </p:clrMapOvr>
+</p:notes>
+</file>
+
+<file path=ppt/notesSlides/notesSlide5.xml><?xml version="1.0" encoding="utf-8"?>
+<p:notes xmlns:a="http://schemas.openxmlformats.org/drawingml/2006/main" xmlns:r="http://schemas.openxmlformats.org/officeDocument/2006/relationships" xmlns:p="http://schemas.openxmlformats.org/presentationml/2006/main">
+  <p:cSld>
+    <p:spTree>
+      <p:nvGrpSpPr>
+        <p:cNvPr id="1" name=""/>
+        <p:cNvGrpSpPr/>
+        <p:nvPr/>
+      </p:nvGrpSpPr>
+      <p:grpSpPr>
+        <a:xfrm>
+          <a:off x="0" y="0"/>
+          <a:ext cx="0" cy="0"/>
+          <a:chOff x="0" y="0"/>
+          <a:chExt cx="0" cy="0"/>
+        </a:xfrm>
+      </p:grpSpPr>
+      <p:sp>
+        <p:nvSpPr>
+          <p:cNvPr id="2" name="Header Placeholder 1"/>
+          <p:cNvSpPr>
+            <a:spLocks noGrp="1"/>
+          </p:cNvSpPr>
+          <p:nvPr>
+            <p:ph type="hdr" sz="quarter"/>
+          </p:nvPr>
+        </p:nvSpPr>
+        <p:spPr>
+          <a:xfrm>
+            <a:off x="0" y="0"/>
+            <a:ext cx="3962400" cy="342900"/>
+          </a:xfrm>
+          <a:prstGeom prst="rect">
+            <a:avLst/>
+          </a:prstGeom>
+        </p:spPr>
+        <p:txBody>
+          <a:bodyPr vert="horz" lIns="91440" tIns="45720" rIns="91440" bIns="45720" rtlCol="0"/>
+          <a:lstStyle>
+            <a:lvl1pPr algn="l">
+              <a:defRPr sz="1200"/>
+            </a:lvl1pPr>
+          </a:lstStyle>
+          <a:p>
+            <a:endParaRPr/>
+          </a:p>
+        </p:txBody>
+      </p:sp>
+      <p:sp>
+        <p:nvSpPr>
+          <p:cNvPr id="3" name="Date Placeholder 2"/>
+          <p:cNvSpPr>
+            <a:spLocks noGrp="1"/>
+          </p:cNvSpPr>
+          <p:nvPr>
+            <p:ph type="dt" idx="1"/>
+          </p:nvPr>
+        </p:nvSpPr>
+        <p:spPr>
+          <a:xfrm>
+            <a:off x="5180013" y="0"/>
+            <a:ext cx="3962400" cy="342900"/>
+          </a:xfrm>
+          <a:prstGeom prst="rect">
+            <a:avLst/>
+          </a:prstGeom>
+        </p:spPr>
+        <p:txBody>
+          <a:bodyPr vert="horz" lIns="91440" tIns="45720" rIns="91440" bIns="45720" rtlCol="0"/>
+          <a:lstStyle>
+            <a:lvl1pPr algn="r">
+              <a:defRPr sz="1200"/>
+            </a:lvl1pPr>
+          </a:lstStyle>
+          <a:p>
+            <a:r>
+              <a:rPr lang="cs-CZ"/>
+              <a:t>1.7.2013</a:t>
+            </a:r>
+          </a:p>
+        </p:txBody>
+      </p:sp>
+      <p:sp>
+        <p:nvSpPr>
+          <p:cNvPr id="4" name="Slide Image Placeholder 3"/>
+          <p:cNvSpPr>
+            <a:spLocks noGrp="1" noRot="1" noChangeAspect="1"/>
+          </p:cNvSpPr>
+          <p:nvPr>
+            <p:ph type="sldImg" idx="2"/>
+          </p:nvPr>
+        </p:nvSpPr>
+        <p:spPr>
+          <a:xfrm>
+            <a:off x="2290763" y="512763"/>
+            <a:ext cx="4562475" cy="2566987"/>
+          </a:xfrm>
+          <a:prstGeom prst="rect">
+            <a:avLst/>
+          </a:prstGeom>
+          <a:noFill/>
+          <a:ln w="12700">
+            <a:solidFill>
+              <a:prstClr val="black"/>
+            </a:solidFill>
+          </a:ln>
+        </p:spPr>
+        <p:txBody>
+          <a:bodyPr vert="horz" lIns="91440" tIns="45720" rIns="91440" bIns="45720" rtlCol="0" anchor="ctr"/>
+          <a:lstStyle/>
+          <a:p>
+            <a:endParaRPr/>
+          </a:p>
+        </p:txBody>
+      </p:sp>
+      <p:sp>
+        <p:nvSpPr>
+          <p:cNvPr id="5" name="Notes Placeholder 4"/>
+          <p:cNvSpPr>
+            <a:spLocks noGrp="1"/>
+          </p:cNvSpPr>
+          <p:nvPr>
+            <p:ph type="body" sz="quarter" idx="3"/>
+          </p:nvPr>
+        </p:nvSpPr>
+        <p:spPr>
+          <a:xfrm>
+            <a:off x="914400" y="3251200"/>
+            <a:ext cx="7315200" cy="3081338"/>
+          </a:xfrm>
+          <a:prstGeom prst="rect">
+            <a:avLst/>
+          </a:prstGeom>
+        </p:spPr>
+        <p:txBody>
+          <a:bodyPr vert="horz" lIns="91440" tIns="45720" rIns="91440" bIns="45720" rtlCol="0" anchor="ctr"/>
+          <a:lstStyle>
+            <a:lvl1pPr algn="l">
+              <a:defRPr sz="1400" b="0" i="0" u="none" strike="noStrike"/>
+            </a:lvl1pPr>
+          </a:lstStyle>
+          <a:p>
+            <a:pPr indent="0" algn="l">
+              <a:lnSpc>
+                <a:spcPct val="100000"/>
+              </a:lnSpc>
+            </a:pPr>
+            <a:r>
+              <a:rPr lang="en-US" sz="1400" b="0" i="0" u="none" strike="noStrike" dirty="0">
+                <a:solidFill>
+                  <a:srgbClr val="000000"/>
+                </a:solidFill>
+              </a:rPr>
+              <a:t>第2个故事，是关于怎么治好我家孩子的拖延症。我家娃一二年级的时候，写作业特别磨蹭，明明半小时就能写完的作业，能硬生生拖2个小时。你催一句，他动一下，你不催，他就能对着一块橡皮玩半小时。我们当时试过各种方法，做时间表、贴小红花、定奖惩规则，</a:t>
+            </a:r>
+            <a:r>
+              <a:rPr lang="zh-CN" altLang="en-US" sz="1400" b="0" i="0" u="none" strike="noStrike" dirty="0">
+                <a:solidFill>
+                  <a:srgbClr val="000000"/>
+                </a:solidFill>
+              </a:rPr>
+              <a:t>连推带拉，</a:t>
+            </a:r>
+            <a:r>
+              <a:rPr lang="en-US" sz="1400" b="0" i="0" u="none" strike="noStrike" dirty="0">
+                <a:solidFill>
+                  <a:srgbClr val="000000"/>
+                </a:solidFill>
+              </a:rPr>
+              <a:t>全都没用。因为孩子觉得，这个时间表是爸爸妈妈给他定的任务，是给我们完成的，他从心底里抵触。</a:t>
+            </a:r>
+          </a:p>
+          <a:p>
+            <a:pPr indent="0" algn="l">
+              <a:lnSpc>
+                <a:spcPct val="100000"/>
+              </a:lnSpc>
+            </a:pPr>
+            <a:r>
+              <a:rPr lang="en-US" sz="1400" b="0" i="0" u="none" strike="noStrike" dirty="0">
+                <a:solidFill>
+                  <a:srgbClr val="000000"/>
+                </a:solidFill>
+              </a:rPr>
+              <a:t>后来我就想，能不能把枯燥的时间管理，变成孩子喜欢的、能自己掌控的游戏？我本身是做产品的，所以我就把我的想法告诉了AI，让AI帮我做了一个网页版的「时间小火车」。这个小火车特别简单，每一节车厢，就代表30分钟的时间块，孩子可以自己拖拽，把写作业、休息、阅读、</a:t>
+            </a:r>
+            <a:r>
+              <a:rPr lang="zh-CN" altLang="en-US" sz="1400" b="0" i="0" u="none" strike="noStrike" dirty="0">
+                <a:solidFill>
+                  <a:srgbClr val="000000"/>
+                </a:solidFill>
+              </a:rPr>
+              <a:t>吃法</a:t>
+            </a:r>
+            <a:r>
+              <a:rPr lang="en-US" sz="1400" b="0" i="0" u="none" strike="noStrike" dirty="0">
+                <a:solidFill>
+                  <a:srgbClr val="000000"/>
+                </a:solidFill>
+              </a:rPr>
+              <a:t>这些事项，放到对应的车厢里，自己安排每天的</a:t>
+            </a:r>
+            <a:r>
+              <a:rPr lang="zh-CN" altLang="en-US" sz="1400" b="0" i="0" u="none" strike="noStrike" dirty="0">
+                <a:solidFill>
+                  <a:srgbClr val="000000"/>
+                </a:solidFill>
+              </a:rPr>
+              <a:t>空余</a:t>
+            </a:r>
+            <a:r>
+              <a:rPr lang="en-US" sz="1400" b="0" i="0" u="none" strike="noStrike" dirty="0">
+                <a:solidFill>
+                  <a:srgbClr val="000000"/>
+                </a:solidFill>
+              </a:rPr>
+              <a:t>时间。完成一项，就可以点亮一节车厢，全部完成，就能解锁小火车的动画奖励。</a:t>
+            </a:r>
+          </a:p>
+          <a:p>
+            <a:pPr indent="0" algn="l">
+              <a:lnSpc>
+                <a:spcPct val="100000"/>
+              </a:lnSpc>
+            </a:pPr>
+            <a:r>
+              <a:rPr lang="en-US" sz="1400" b="0" i="0" u="none" strike="noStrike" dirty="0">
+                <a:solidFill>
+                  <a:srgbClr val="000000"/>
+                </a:solidFill>
+              </a:rPr>
+              <a:t>全程我只做一件事，就是引导，绝对不替他做决定。我只会问他：“你觉得数学作业，需要几节车厢才能完成呀？”“写完作业之后，你想安排多久的休息时间？”</a:t>
+            </a:r>
+            <a:r>
+              <a:rPr lang="zh-CN" altLang="en-US" sz="1400" b="0" i="0" u="none" strike="noStrike" dirty="0">
+                <a:solidFill>
+                  <a:srgbClr val="000000"/>
+                </a:solidFill>
+              </a:rPr>
+              <a:t>“今天</a:t>
+            </a:r>
+            <a:r>
+              <a:rPr lang="en-US" altLang="zh-CN" sz="1400" b="0" i="0" u="none" strike="noStrike" dirty="0">
+                <a:solidFill>
+                  <a:srgbClr val="000000"/>
+                </a:solidFill>
+              </a:rPr>
+              <a:t>LC</a:t>
+            </a:r>
+            <a:r>
+              <a:rPr lang="zh-CN" altLang="en-US" sz="1400" b="0" i="0" u="none" strike="noStrike" dirty="0">
+                <a:solidFill>
+                  <a:srgbClr val="000000"/>
+                </a:solidFill>
+              </a:rPr>
+              <a:t>比较难，要不要先做</a:t>
+            </a:r>
+            <a:r>
+              <a:rPr lang="en-US" altLang="zh-CN" sz="1400" b="0" i="0" u="none" strike="noStrike" dirty="0">
+                <a:solidFill>
+                  <a:srgbClr val="000000"/>
+                </a:solidFill>
+              </a:rPr>
+              <a:t>LC</a:t>
+            </a:r>
+            <a:r>
+              <a:rPr lang="zh-CN" altLang="en-US" sz="1400" b="0" i="0" u="none" strike="noStrike" dirty="0">
+                <a:solidFill>
+                  <a:srgbClr val="000000"/>
+                </a:solidFill>
+              </a:rPr>
+              <a:t>？”</a:t>
+            </a:r>
+            <a:r>
+              <a:rPr lang="en-US" sz="1400" b="0" i="0" u="none" strike="noStrike" dirty="0">
+                <a:solidFill>
+                  <a:srgbClr val="000000"/>
+                </a:solidFill>
+              </a:rPr>
+              <a:t>就这么一个简单的小工具，效果出乎我的意料。用了这个小火车之后，孩子再也不觉得时间管理是家长给他的任务了，他觉得自己是这个小火车的列车长，所有的行程都是他自己安排的，他要为自己的行程负责。</a:t>
+            </a:r>
+          </a:p>
+          <a:p>
+            <a:pPr indent="0" algn="l">
+              <a:lnSpc>
+                <a:spcPct val="100000"/>
+              </a:lnSpc>
+            </a:pPr>
+            <a:r>
+              <a:rPr lang="en-US" sz="1400" b="0" i="0" u="none" strike="noStrike" dirty="0">
+                <a:solidFill>
+                  <a:srgbClr val="000000"/>
+                </a:solidFill>
+              </a:rPr>
+              <a:t>现在不用我们催，他自己就能按安排完成作业，拖延的毛病好</a:t>
+            </a:r>
+            <a:r>
+              <a:rPr lang="zh-CN" altLang="en-US" sz="1400" b="0" i="0" u="none" strike="noStrike" dirty="0">
+                <a:solidFill>
+                  <a:srgbClr val="000000"/>
+                </a:solidFill>
+              </a:rPr>
+              <a:t>很</a:t>
+            </a:r>
+            <a:r>
+              <a:rPr lang="en-US" sz="1400" b="0" i="0" u="none" strike="noStrike" dirty="0">
+                <a:solidFill>
+                  <a:srgbClr val="000000"/>
+                </a:solidFill>
+              </a:rPr>
+              <a:t>多，也慢慢养成了自主管理时间的习惯。其实给各位老师</a:t>
+            </a:r>
+            <a:r>
+              <a:rPr lang="zh-CN" altLang="en-US" sz="1400" b="0" i="0" u="none" strike="noStrike" dirty="0">
+                <a:solidFill>
+                  <a:srgbClr val="000000"/>
+                </a:solidFill>
+              </a:rPr>
+              <a:t>家长</a:t>
+            </a:r>
+            <a:r>
+              <a:rPr lang="en-US" sz="1400" b="0" i="0" u="none" strike="noStrike" dirty="0">
+                <a:solidFill>
+                  <a:srgbClr val="000000"/>
+                </a:solidFill>
+              </a:rPr>
+              <a:t>分享这个故事，也是想给大家一个小小的参考：很多时候孩子不是不想做好，而是枯燥的规则、大人的要求，让他有了抵触感。AI可以帮我们，把学校要求的习惯养成、知识点学习，变成孩子愿意主动参与的趣味形式，让孩子真正从“要我学”，变成“我要学”。</a:t>
+            </a:r>
+            <a:r>
+              <a:rPr lang="en-US" altLang="zh-CN" sz="1400" b="0" i="0" u="none" strike="noStrike" dirty="0">
+                <a:solidFill>
+                  <a:srgbClr val="000000"/>
+                </a:solidFill>
+              </a:rPr>
+              <a:t>——</a:t>
+            </a:r>
+            <a:r>
+              <a:rPr lang="zh-CN" altLang="en-US" sz="1400" b="0" i="0" u="none" strike="noStrike" dirty="0">
+                <a:solidFill>
+                  <a:srgbClr val="000000"/>
+                </a:solidFill>
+              </a:rPr>
+              <a:t>但是，这样一来，问题的焦点就变成了</a:t>
+            </a:r>
+            <a:r>
+              <a:rPr lang="en-US" altLang="zh-CN" sz="1400" b="0" i="0" u="none" strike="noStrike" dirty="0">
+                <a:solidFill>
+                  <a:srgbClr val="000000"/>
+                </a:solidFill>
+              </a:rPr>
+              <a:t>——</a:t>
+            </a:r>
+            <a:r>
+              <a:rPr lang="zh-CN" altLang="en-US" sz="1400" b="0" i="0" u="none" strike="noStrike" dirty="0">
+                <a:solidFill>
+                  <a:srgbClr val="000000"/>
+                </a:solidFill>
+              </a:rPr>
+              <a:t>怎样启发孩子，让他自发的意识到原来“我可以这么做”、“这个做下来这么有意思”。这正是</a:t>
+            </a:r>
+            <a:r>
+              <a:rPr lang="en-US" altLang="zh-CN" sz="1400" b="0" i="0" u="none" strike="noStrike" dirty="0">
+                <a:solidFill>
+                  <a:srgbClr val="000000"/>
+                </a:solidFill>
+              </a:rPr>
+              <a:t>AI</a:t>
+            </a:r>
+            <a:r>
+              <a:rPr lang="zh-CN" altLang="en-US" sz="1400" b="0" i="0" u="none" strike="noStrike" dirty="0">
+                <a:solidFill>
+                  <a:srgbClr val="000000"/>
+                </a:solidFill>
+              </a:rPr>
+              <a:t>的意义，它可以加速从创意到落地的过程，以前可能需要专业人士来配合做的事情，现在只要有好的构思，好的使用方法，每个班级、每个家庭都可以发挥创意，启发孩子。</a:t>
+            </a:r>
+            <a:endParaRPr lang="en-US" sz="1400" b="0" i="0" u="none" strike="noStrike" dirty="0">
+              <a:solidFill>
+                <a:srgbClr val="000000"/>
+              </a:solidFill>
+            </a:endParaRPr>
+          </a:p>
+        </p:txBody>
+      </p:sp>
+      <p:sp>
+        <p:nvSpPr>
+          <p:cNvPr id="6" name="Footer Placeholder 5"/>
+          <p:cNvSpPr>
+            <a:spLocks noGrp="1"/>
+          </p:cNvSpPr>
+          <p:nvPr>
+            <p:ph type="ftr" sz="quarter" idx="4"/>
+          </p:nvPr>
+        </p:nvSpPr>
+        <p:spPr>
+          <a:xfrm>
+            <a:off x="0" y="6502400"/>
+            <a:ext cx="3962400" cy="341313"/>
+          </a:xfrm>
+          <a:prstGeom prst="rect">
+            <a:avLst/>
+          </a:prstGeom>
+        </p:spPr>
+        <p:txBody>
+          <a:bodyPr vert="horz" lIns="91440" tIns="45720" rIns="91440" bIns="45720" rtlCol="0" anchor="b"/>
+          <a:lstStyle>
+            <a:lvl1pPr algn="l">
+              <a:defRPr sz="1200"/>
+            </a:lvl1pPr>
+          </a:lstStyle>
+          <a:p>
+            <a:endParaRPr/>
+          </a:p>
+        </p:txBody>
+      </p:sp>
+      <p:sp>
+        <p:nvSpPr>
+          <p:cNvPr id="7" name="Slide Number Placeholder 6"/>
+          <p:cNvSpPr>
+            <a:spLocks noGrp="1"/>
+          </p:cNvSpPr>
+          <p:nvPr>
+            <p:ph type="sldNum" sz="quarter" idx="5"/>
+          </p:nvPr>
+        </p:nvSpPr>
+        <p:spPr>
+          <a:xfrm>
+            <a:off x="5180013" y="6502400"/>
+            <a:ext cx="3962400" cy="341313"/>
+          </a:xfrm>
+          <a:prstGeom prst="rect">
+            <a:avLst/>
+          </a:prstGeom>
+        </p:spPr>
+        <p:txBody>
+          <a:bodyPr vert="horz" lIns="91440" tIns="45720" rIns="91440" bIns="45720" rtlCol="0" anchor="b"/>
+          <a:lstStyle>
+            <a:lvl1pPr algn="r">
+              <a:defRPr sz="1200"/>
+            </a:lvl1pPr>
+          </a:lstStyle>
+          <a:p>
+            <a:r>
+              <a:rPr lang="cs-CZ"/>
+              <a:t>‹#›</a:t>
+            </a:r>
+          </a:p>
+        </p:txBody>
+      </p:sp>
+    </p:spTree>
+  </p:cSld>
+  <p:clrMapOvr>
+    <a:masterClrMapping/>
+  </p:clrMapOvr>
+</p:notes>
+</file>
+
+<file path=ppt/notesSlides/notesSlide6.xml><?xml version="1.0" encoding="utf-8"?>
+<p:notes xmlns:a="http://schemas.openxmlformats.org/drawingml/2006/main" xmlns:r="http://schemas.openxmlformats.org/officeDocument/2006/relationships" xmlns:p="http://schemas.openxmlformats.org/presentationml/2006/main">
+  <p:cSld>
+    <p:spTree>
+      <p:nvGrpSpPr>
+        <p:cNvPr id="1" name=""/>
+        <p:cNvGrpSpPr/>
+        <p:nvPr/>
+      </p:nvGrpSpPr>
+      <p:grpSpPr>
+        <a:xfrm>
+          <a:off x="0" y="0"/>
+          <a:ext cx="0" cy="0"/>
+          <a:chOff x="0" y="0"/>
+          <a:chExt cx="0" cy="0"/>
+        </a:xfrm>
+      </p:grpSpPr>
+      <p:sp>
+        <p:nvSpPr>
+          <p:cNvPr id="2" name="Header Placeholder 1"/>
+          <p:cNvSpPr>
+            <a:spLocks noGrp="1"/>
+          </p:cNvSpPr>
+          <p:nvPr>
+            <p:ph type="hdr" sz="quarter"/>
+          </p:nvPr>
+        </p:nvSpPr>
+        <p:spPr>
+          <a:xfrm>
+            <a:off x="0" y="0"/>
+            <a:ext cx="3962400" cy="342900"/>
+          </a:xfrm>
+          <a:prstGeom prst="rect">
+            <a:avLst/>
+          </a:prstGeom>
+        </p:spPr>
+        <p:txBody>
+          <a:bodyPr vert="horz" lIns="91440" tIns="45720" rIns="91440" bIns="45720" rtlCol="0"/>
+          <a:lstStyle>
+            <a:lvl1pPr algn="l">
+              <a:defRPr sz="1200"/>
+            </a:lvl1pPr>
+          </a:lstStyle>
+          <a:p>
+            <a:endParaRPr/>
+          </a:p>
+        </p:txBody>
+      </p:sp>
+      <p:sp>
+        <p:nvSpPr>
+          <p:cNvPr id="3" name="Date Placeholder 2"/>
+          <p:cNvSpPr>
+            <a:spLocks noGrp="1"/>
+          </p:cNvSpPr>
+          <p:nvPr>
+            <p:ph type="dt" idx="1"/>
+          </p:nvPr>
+        </p:nvSpPr>
+        <p:spPr>
+          <a:xfrm>
+            <a:off x="5180013" y="0"/>
+            <a:ext cx="3962400" cy="342900"/>
+          </a:xfrm>
+          <a:prstGeom prst="rect">
+            <a:avLst/>
+          </a:prstGeom>
+        </p:spPr>
+        <p:txBody>
+          <a:bodyPr vert="horz" lIns="91440" tIns="45720" rIns="91440" bIns="45720" rtlCol="0"/>
+          <a:lstStyle>
+            <a:lvl1pPr algn="r">
+              <a:defRPr sz="1200"/>
+            </a:lvl1pPr>
+          </a:lstStyle>
+          <a:p>
+            <a:r>
+              <a:rPr lang="cs-CZ"/>
+              <a:t>1.7.2013</a:t>
+            </a:r>
+          </a:p>
+        </p:txBody>
+      </p:sp>
+      <p:sp>
+        <p:nvSpPr>
+          <p:cNvPr id="4" name="Slide Image Placeholder 3"/>
+          <p:cNvSpPr>
+            <a:spLocks noGrp="1" noRot="1" noChangeAspect="1"/>
+          </p:cNvSpPr>
+          <p:nvPr>
+            <p:ph type="sldImg" idx="2"/>
+          </p:nvPr>
+        </p:nvSpPr>
+        <p:spPr>
+          <a:xfrm>
+            <a:off x="2290763" y="512763"/>
+            <a:ext cx="4562475" cy="2566987"/>
+          </a:xfrm>
+          <a:prstGeom prst="rect">
+            <a:avLst/>
+          </a:prstGeom>
+          <a:noFill/>
+          <a:ln w="12700">
+            <a:solidFill>
+              <a:prstClr val="black"/>
+            </a:solidFill>
+          </a:ln>
+        </p:spPr>
+        <p:txBody>
+          <a:bodyPr vert="horz" lIns="91440" tIns="45720" rIns="91440" bIns="45720" rtlCol="0" anchor="ctr"/>
+          <a:lstStyle/>
+          <a:p>
+            <a:endParaRPr/>
+          </a:p>
+        </p:txBody>
+      </p:sp>
+      <p:sp>
+        <p:nvSpPr>
+          <p:cNvPr id="5" name="Notes Placeholder 4"/>
+          <p:cNvSpPr>
+            <a:spLocks noGrp="1"/>
+          </p:cNvSpPr>
+          <p:nvPr>
+            <p:ph type="body" sz="quarter" idx="3"/>
+          </p:nvPr>
+        </p:nvSpPr>
+        <p:spPr>
+          <a:xfrm>
+            <a:off x="914400" y="3251200"/>
+            <a:ext cx="7315200" cy="3081338"/>
+          </a:xfrm>
+          <a:prstGeom prst="rect">
+            <a:avLst/>
+          </a:prstGeom>
+        </p:spPr>
+        <p:txBody>
+          <a:bodyPr vert="horz" lIns="91440" tIns="45720" rIns="91440" bIns="45720" rtlCol="0" anchor="ctr"/>
+          <a:lstStyle>
+            <a:lvl1pPr algn="l">
+              <a:defRPr sz="1400" b="0" i="0" u="none" strike="noStrike"/>
+            </a:lvl1pPr>
+          </a:lstStyle>
+          <a:p>
+            <a:pPr indent="0" algn="l">
+              <a:lnSpc>
+                <a:spcPct val="100000"/>
+              </a:lnSpc>
+            </a:pPr>
+            <a:r>
+              <a:rPr lang="en-US" sz="1400" b="0" i="0" u="none" strike="noStrike" dirty="0">
+                <a:solidFill>
+                  <a:srgbClr val="000000"/>
+                </a:solidFill>
+              </a:rPr>
+              <a:t>第3个故事，是关于</a:t>
+            </a:r>
+            <a:r>
+              <a:rPr lang="zh-CN" altLang="en-US" sz="1400" b="0" i="0" u="none" strike="noStrike" dirty="0">
+                <a:solidFill>
+                  <a:srgbClr val="000000"/>
+                </a:solidFill>
+              </a:rPr>
+              <a:t>寓乐于教</a:t>
+            </a:r>
+            <a:r>
+              <a:rPr lang="en-US" sz="1400" b="0" i="0" u="none" strike="noStrike" dirty="0">
+                <a:solidFill>
+                  <a:srgbClr val="000000"/>
+                </a:solidFill>
+              </a:rPr>
+              <a:t>的，也是我自己觉得最有成就感的一个故事。2025年初的时候，我家娃和班里的同学，突然疯传起了所谓的“外国山海经”，天天嘴里念叨着一堆奇奇怪怪的词</a:t>
+            </a:r>
+            <a:r>
+              <a:rPr lang="zh-CN" altLang="en-US" sz="1400" b="0" i="0" u="none" strike="noStrike" dirty="0">
+                <a:solidFill>
+                  <a:srgbClr val="000000"/>
+                </a:solidFill>
+              </a:rPr>
+              <a:t>（什么</a:t>
+            </a:r>
+            <a:r>
+              <a:rPr lang="en-US" altLang="zh-CN" dirty="0"/>
+              <a:t>Tralalero Tralala</a:t>
+            </a:r>
+            <a:r>
+              <a:rPr lang="zh-CN" altLang="en-US" dirty="0"/>
+              <a:t>耐克鲨鱼，</a:t>
+            </a:r>
+            <a:r>
+              <a:rPr lang="en-US" altLang="zh-CN" dirty="0"/>
+              <a:t>Tung Tung Tung Sahur</a:t>
+            </a:r>
+            <a:r>
+              <a:rPr lang="zh-CN" altLang="en-US" dirty="0"/>
+              <a:t>木棍人</a:t>
+            </a:r>
+            <a:r>
+              <a:rPr lang="zh-CN" altLang="en-US" sz="1400" b="0" i="0" u="none" strike="noStrike" dirty="0">
+                <a:solidFill>
+                  <a:srgbClr val="000000"/>
+                </a:solidFill>
+              </a:rPr>
+              <a:t>，</a:t>
+            </a:r>
+            <a:r>
+              <a:rPr lang="en-US" altLang="zh-CN" dirty="0"/>
+              <a:t>Bombardiro Crocodilo</a:t>
+            </a:r>
+            <a:r>
+              <a:rPr lang="zh-CN" altLang="en-US" dirty="0"/>
+              <a:t>鳄鱼轰炸机</a:t>
+            </a:r>
+            <a:r>
+              <a:rPr lang="en-US" altLang="zh-CN" dirty="0"/>
+              <a:t>, Chimpanzini Bananini</a:t>
+            </a:r>
+            <a:r>
+              <a:rPr lang="zh-CN" altLang="en-US" dirty="0"/>
+              <a:t>香蕉猴，</a:t>
+            </a:r>
+            <a:r>
+              <a:rPr lang="en-US" altLang="zh-CN" dirty="0"/>
+              <a:t>Cappuccino Assasino</a:t>
+            </a:r>
+            <a:r>
+              <a:rPr lang="zh-CN" altLang="en-US" dirty="0"/>
+              <a:t>卡布奇诺忍者</a:t>
+            </a:r>
+            <a:r>
+              <a:rPr lang="zh-CN" altLang="en-US" sz="1400" b="0" i="0" u="none" strike="noStrike" dirty="0">
+                <a:solidFill>
+                  <a:srgbClr val="000000"/>
+                </a:solidFill>
+              </a:rPr>
+              <a:t>）</a:t>
+            </a:r>
+            <a:r>
+              <a:rPr lang="en-US" sz="1400" b="0" i="0" u="none" strike="noStrike" dirty="0">
+                <a:solidFill>
+                  <a:srgbClr val="000000"/>
+                </a:solidFill>
+              </a:rPr>
+              <a:t>。我一开始以为是什么乱七八糟的网络梗，后来仔细听了听，发现都是意大利语的谐音。孩子对这些词特别感兴趣，天天挂在嘴边，却对学校要求背的英语单词，提不起半点劲，</a:t>
+            </a:r>
+            <a:r>
+              <a:rPr lang="zh-CN" altLang="en-US" sz="1400" b="0" i="0" u="none" strike="noStrike" dirty="0">
+                <a:solidFill>
+                  <a:srgbClr val="000000"/>
+                </a:solidFill>
+              </a:rPr>
+              <a:t>经常</a:t>
+            </a:r>
+            <a:r>
+              <a:rPr lang="en-US" sz="1400" b="0" i="0" u="none" strike="noStrike" dirty="0">
+                <a:solidFill>
+                  <a:srgbClr val="000000"/>
+                </a:solidFill>
+              </a:rPr>
+              <a:t>背了就忘。</a:t>
+            </a:r>
+          </a:p>
+          <a:p>
+            <a:pPr indent="0" algn="l">
+              <a:lnSpc>
+                <a:spcPct val="100000"/>
+              </a:lnSpc>
+            </a:pPr>
+            <a:r>
+              <a:rPr lang="zh-CN" altLang="en-US" sz="1400" b="0" i="0" u="none" strike="noStrike" dirty="0">
+                <a:solidFill>
+                  <a:srgbClr val="000000"/>
+                </a:solidFill>
+              </a:rPr>
+              <a:t>当时网络上说这是“脑腐梗”，英文叫</a:t>
+            </a:r>
+            <a:r>
+              <a:rPr lang="en-US" altLang="zh-CN" sz="1400" b="0" i="0" u="none" strike="noStrike" dirty="0">
+                <a:solidFill>
+                  <a:srgbClr val="000000"/>
+                </a:solidFill>
+              </a:rPr>
+              <a:t>brain rot</a:t>
+            </a:r>
+            <a:r>
+              <a:rPr lang="zh-CN" altLang="en-US" sz="1400" b="0" i="0" u="none" strike="noStrike" dirty="0">
+                <a:solidFill>
+                  <a:srgbClr val="000000"/>
+                </a:solidFill>
+              </a:rPr>
+              <a:t>。但</a:t>
+            </a:r>
+            <a:r>
+              <a:rPr lang="en-US" sz="1400" b="0" i="0" u="none" strike="noStrike" dirty="0">
+                <a:solidFill>
+                  <a:srgbClr val="000000"/>
+                </a:solidFill>
+              </a:rPr>
+              <a:t>我当时没有禁止孩子念叨这些词，反而想，能不能从他感兴趣的点入手，把这个没意义的谐音梗，变成一场有意思的语言启蒙？我自己完全不懂意大利语，所以全程都是靠AI，帮我完成了整个启蒙设计。</a:t>
+            </a:r>
+          </a:p>
+          <a:p>
+            <a:pPr indent="0" algn="l">
+              <a:lnSpc>
+                <a:spcPct val="100000"/>
+              </a:lnSpc>
+            </a:pPr>
+            <a:r>
+              <a:rPr lang="en-US" sz="1400" b="0" i="0" u="none" strike="noStrike" dirty="0">
+                <a:solidFill>
+                  <a:srgbClr val="000000"/>
+                </a:solidFill>
+              </a:rPr>
+              <a:t>第一步，我让AI帮我查清楚，孩子们天天念叨的这些词，到底是什么意思，</a:t>
+            </a:r>
+            <a:r>
+              <a:rPr lang="zh-CN" altLang="en-US" sz="1400" b="0" i="0" u="none" strike="noStrike" dirty="0">
+                <a:solidFill>
+                  <a:srgbClr val="000000"/>
+                </a:solidFill>
+              </a:rPr>
+              <a:t>发现是意大利语的变形，比如</a:t>
+            </a:r>
+            <a:r>
+              <a:rPr lang="en-US" altLang="zh-CN" sz="1400" b="0" i="0" u="none" strike="noStrike" dirty="0">
+                <a:solidFill>
+                  <a:srgbClr val="000000"/>
+                </a:solidFill>
+              </a:rPr>
+              <a:t>【</a:t>
+            </a:r>
+            <a:r>
+              <a:rPr lang="en-US" altLang="zh-CN" dirty="0"/>
+              <a:t>Bombardiro Crocodilo</a:t>
+            </a:r>
+            <a:r>
+              <a:rPr lang="zh-CN" altLang="en-US" dirty="0"/>
+              <a:t>鳄鱼轰炸机、</a:t>
+            </a:r>
+            <a:r>
+              <a:rPr lang="en-US" altLang="zh-CN" dirty="0"/>
+              <a:t>Chimpanzini Bananini</a:t>
+            </a:r>
+            <a:r>
+              <a:rPr lang="zh-CN" altLang="en-US" dirty="0"/>
+              <a:t>香蕉猴、</a:t>
+            </a:r>
+            <a:r>
+              <a:rPr lang="en-US" altLang="zh-CN" dirty="0"/>
+              <a:t>Cappuccino Assasino</a:t>
+            </a:r>
+            <a:r>
+              <a:rPr lang="zh-CN" altLang="en-US" dirty="0"/>
+              <a:t>卡布奇诺忍者</a:t>
+            </a:r>
+            <a:r>
+              <a:rPr lang="en-US" altLang="zh-CN" sz="1400" b="0" i="0" u="none" strike="noStrike" dirty="0">
+                <a:solidFill>
+                  <a:srgbClr val="000000"/>
+                </a:solidFill>
+              </a:rPr>
+              <a:t>】</a:t>
+            </a:r>
+            <a:br>
+              <a:rPr lang="en-US" altLang="zh-CN" sz="1400" b="0" i="0" u="none" strike="noStrike" dirty="0">
+                <a:solidFill>
+                  <a:srgbClr val="000000"/>
+                </a:solidFill>
+              </a:rPr>
+            </a:br>
+            <a:br>
+              <a:rPr lang="en-US" altLang="zh-CN" sz="1400" b="0" i="0" u="none" strike="noStrike" dirty="0">
+                <a:solidFill>
+                  <a:srgbClr val="000000"/>
+                </a:solidFill>
+              </a:rPr>
+            </a:br>
+            <a:r>
+              <a:rPr lang="en-US" sz="1400" b="0" i="0" u="none" strike="noStrike" dirty="0">
+                <a:solidFill>
+                  <a:srgbClr val="000000"/>
+                </a:solidFill>
+              </a:rPr>
+              <a:t>然后归纳出意大利语的核心发音特点</a:t>
+            </a:r>
+            <a:r>
+              <a:rPr lang="zh-CN" altLang="en-US" sz="1400" b="0" i="0" u="none" strike="noStrike" dirty="0">
+                <a:solidFill>
+                  <a:srgbClr val="000000"/>
+                </a:solidFill>
+              </a:rPr>
+              <a:t>，发现其中一个特点就是最后都是元音结尾</a:t>
+            </a:r>
+            <a:r>
+              <a:rPr lang="en-US" sz="1400" b="0" i="0" u="none" strike="noStrike" dirty="0">
+                <a:solidFill>
+                  <a:srgbClr val="000000"/>
+                </a:solidFill>
+              </a:rPr>
+              <a:t>，还有和英语的发音</a:t>
+            </a:r>
+            <a:r>
+              <a:rPr lang="zh-CN" altLang="en-US" sz="1400" b="0" i="0" u="none" strike="noStrike" dirty="0">
+                <a:solidFill>
+                  <a:srgbClr val="000000"/>
+                </a:solidFill>
+              </a:rPr>
+              <a:t>相比起来比较硬</a:t>
+            </a:r>
+            <a:r>
+              <a:rPr lang="en-US" sz="1400" b="0" i="0" u="none" strike="noStrike" dirty="0">
+                <a:solidFill>
+                  <a:srgbClr val="000000"/>
+                </a:solidFill>
+              </a:rPr>
+              <a:t>，用孩子能懂的</a:t>
+            </a:r>
+            <a:r>
+              <a:rPr lang="zh-CN" altLang="en-US" sz="1400" b="0" i="0" u="none" strike="noStrike" dirty="0">
+                <a:solidFill>
+                  <a:srgbClr val="000000"/>
+                </a:solidFill>
+              </a:rPr>
+              <a:t>英语再次</a:t>
+            </a:r>
+            <a:r>
+              <a:rPr lang="en-US" sz="1400" b="0" i="0" u="none" strike="noStrike" dirty="0">
+                <a:solidFill>
+                  <a:srgbClr val="000000"/>
+                </a:solidFill>
+              </a:rPr>
+              <a:t>呈现出来；</a:t>
+            </a:r>
+          </a:p>
+          <a:p>
+            <a:pPr indent="0" algn="l">
+              <a:lnSpc>
+                <a:spcPct val="100000"/>
+              </a:lnSpc>
+            </a:pPr>
+            <a:endParaRPr lang="en-US" sz="1400" b="0" i="0" u="none" strike="noStrike" dirty="0">
+              <a:solidFill>
+                <a:srgbClr val="000000"/>
+              </a:solidFill>
+            </a:endParaRPr>
+          </a:p>
+          <a:p>
+            <a:pPr indent="0" algn="l">
+              <a:lnSpc>
+                <a:spcPct val="100000"/>
+              </a:lnSpc>
+            </a:pPr>
+            <a:r>
+              <a:rPr lang="en-US" sz="1400" b="0" i="0" u="none" strike="noStrike" dirty="0">
+                <a:solidFill>
+                  <a:srgbClr val="000000"/>
+                </a:solidFill>
+              </a:rPr>
+              <a:t>第二步，让AI结合孩子们的“外国山海经”</a:t>
+            </a:r>
+            <a:r>
+              <a:rPr lang="zh-CN" altLang="en-US" sz="1400" b="0" i="0" u="none" strike="noStrike" dirty="0">
+                <a:solidFill>
+                  <a:srgbClr val="000000"/>
+                </a:solidFill>
+              </a:rPr>
+              <a:t>这些缝合怪动物</a:t>
+            </a:r>
+            <a:r>
+              <a:rPr lang="en-US" sz="1400" b="0" i="0" u="none" strike="noStrike" dirty="0">
+                <a:solidFill>
+                  <a:srgbClr val="000000"/>
+                </a:solidFill>
+              </a:rPr>
+              <a:t>，做了一个简单的意大利语发音对照表，孩子拿着对照表，就能自己拼出他天天念叨的那些词，</a:t>
+            </a:r>
+            <a:r>
+              <a:rPr lang="zh-CN" altLang="en-US" sz="1400" b="0" i="0" u="none" strike="noStrike" dirty="0">
+                <a:solidFill>
+                  <a:srgbClr val="000000"/>
+                </a:solidFill>
+              </a:rPr>
+              <a:t>而且是“官方的”，</a:t>
+            </a:r>
+            <a:r>
+              <a:rPr lang="en-US" sz="1400" b="0" i="0" u="none" strike="noStrike" dirty="0">
+                <a:solidFill>
+                  <a:srgbClr val="000000"/>
+                </a:solidFill>
+              </a:rPr>
+              <a:t>当时</a:t>
+            </a:r>
+            <a:r>
+              <a:rPr lang="zh-CN" altLang="en-US" sz="1400" b="0" i="0" u="none" strike="noStrike" dirty="0">
+                <a:solidFill>
+                  <a:srgbClr val="000000"/>
+                </a:solidFill>
+              </a:rPr>
+              <a:t>就</a:t>
+            </a:r>
+            <a:r>
+              <a:rPr lang="en-US" sz="1400" b="0" i="0" u="none" strike="noStrike" dirty="0">
+                <a:solidFill>
+                  <a:srgbClr val="000000"/>
+                </a:solidFill>
+              </a:rPr>
+              <a:t>特别有成就感；</a:t>
+            </a:r>
+          </a:p>
+          <a:p>
+            <a:pPr indent="0" algn="l">
+              <a:lnSpc>
+                <a:spcPct val="100000"/>
+              </a:lnSpc>
+            </a:pPr>
+            <a:endParaRPr lang="en-US" sz="1400" b="0" i="0" u="none" strike="noStrike" dirty="0">
+              <a:solidFill>
+                <a:srgbClr val="000000"/>
+              </a:solidFill>
+            </a:endParaRPr>
+          </a:p>
+          <a:p>
+            <a:pPr indent="0" algn="l">
+              <a:lnSpc>
+                <a:spcPct val="100000"/>
+              </a:lnSpc>
+            </a:pPr>
+            <a:r>
+              <a:rPr lang="en-US" sz="1400" b="0" i="0" u="none" strike="noStrike" dirty="0">
+                <a:solidFill>
+                  <a:srgbClr val="000000"/>
+                </a:solidFill>
+              </a:rPr>
+              <a:t>第三步，我还和孩子一起，找了《教父God Father》</a:t>
+            </a:r>
+            <a:r>
+              <a:rPr lang="zh-CN" altLang="en-US" sz="1400" b="0" i="0" u="none" strike="noStrike" dirty="0">
+                <a:solidFill>
+                  <a:srgbClr val="000000"/>
+                </a:solidFill>
+              </a:rPr>
+              <a:t>、</a:t>
+            </a:r>
+            <a:r>
+              <a:rPr lang="en-US" altLang="zh-CN" sz="1400" b="0" i="0" u="none" strike="noStrike" dirty="0">
+                <a:solidFill>
+                  <a:srgbClr val="000000"/>
+                </a:solidFill>
+              </a:rPr>
+              <a:t>《</a:t>
+            </a:r>
+            <a:r>
+              <a:rPr lang="zh-CN" altLang="en-US" sz="1400" b="0" i="0" u="none" strike="noStrike" dirty="0">
+                <a:solidFill>
+                  <a:srgbClr val="000000"/>
+                </a:solidFill>
+              </a:rPr>
+              <a:t>这个杀手不太冷</a:t>
+            </a:r>
+            <a:r>
+              <a:rPr lang="en-US" altLang="zh-CN" sz="1400" b="0" i="0" u="none" strike="noStrike" dirty="0">
+                <a:solidFill>
+                  <a:srgbClr val="000000"/>
+                </a:solidFill>
+              </a:rPr>
+              <a:t>Leon》</a:t>
+            </a:r>
+            <a:r>
+              <a:rPr lang="en-US" sz="1400" b="0" i="0" u="none" strike="noStrike" dirty="0">
+                <a:solidFill>
+                  <a:srgbClr val="000000"/>
+                </a:solidFill>
+              </a:rPr>
+              <a:t>里的经典对话，让AI帮我们拆解里面的意式英语发音特点，孩子一边看电影，一边感受意大利语的发音，热情特别高。</a:t>
+            </a:r>
+          </a:p>
+          <a:p>
+            <a:pPr indent="0" algn="l">
+              <a:lnSpc>
+                <a:spcPct val="100000"/>
+              </a:lnSpc>
+            </a:pPr>
+            <a:endParaRPr lang="en-US" sz="1400" b="0" i="0" u="none" strike="noStrike" dirty="0">
+              <a:solidFill>
+                <a:srgbClr val="000000"/>
+              </a:solidFill>
+            </a:endParaRPr>
+          </a:p>
+          <a:p>
+            <a:pPr indent="0" algn="l">
+              <a:lnSpc>
+                <a:spcPct val="100000"/>
+              </a:lnSpc>
+            </a:pPr>
+            <a:r>
+              <a:rPr lang="en-US" sz="1400" b="0" i="0" u="none" strike="noStrike" dirty="0">
+                <a:solidFill>
+                  <a:srgbClr val="000000"/>
+                </a:solidFill>
+              </a:rPr>
+              <a:t>就这么一场从谐音梗开始的启蒙，给孩子带来的变化，是我完全没想到的。从那之后，孩子对语言学习的兴趣一下就起来了，不再觉得背英语单词是枯燥的任务，他会主动用AI查英语单词的发音、词根，甚至会自己对比英语和意大利语的区别，英语成绩也有了很大的进步。最重要的是，他学会了从自己感兴趣的东西里学习，有了主动探索的意识。</a:t>
+            </a:r>
+          </a:p>
+          <a:p>
+            <a:pPr indent="0" algn="l">
+              <a:lnSpc>
+                <a:spcPct val="100000"/>
+              </a:lnSpc>
+            </a:pPr>
+            <a:endParaRPr lang="en-US" sz="1400" b="0" i="0" u="none" strike="noStrike" dirty="0">
+              <a:solidFill>
+                <a:srgbClr val="000000"/>
+              </a:solidFill>
+            </a:endParaRPr>
+          </a:p>
+          <a:p>
+            <a:pPr indent="0" algn="l">
+              <a:lnSpc>
+                <a:spcPct val="100000"/>
+              </a:lnSpc>
+            </a:pPr>
+            <a:r>
+              <a:rPr lang="en-US" sz="1400" b="0" i="0" u="none" strike="noStrike" dirty="0">
+                <a:solidFill>
+                  <a:srgbClr val="000000"/>
+                </a:solidFill>
+              </a:rPr>
+              <a:t>其实各位老师</a:t>
+            </a:r>
+            <a:r>
+              <a:rPr lang="zh-CN" altLang="en-US" sz="1400" b="0" i="0" u="none" strike="noStrike" dirty="0">
+                <a:solidFill>
+                  <a:srgbClr val="000000"/>
+                </a:solidFill>
+              </a:rPr>
+              <a:t>和家长</a:t>
+            </a:r>
+            <a:r>
+              <a:rPr lang="en-US" sz="1400" b="0" i="0" u="none" strike="noStrike" dirty="0">
+                <a:solidFill>
+                  <a:srgbClr val="000000"/>
+                </a:solidFill>
+              </a:rPr>
+              <a:t>在日常教学里，肯定也会遇到这样的情况：孩子对课本里的内容提不起劲，却对一些课外的东西特别感兴趣。而AI，刚好可以帮我们，把课本里的知识点，和孩子感兴趣的动画、游戏、</a:t>
+            </a:r>
+            <a:r>
+              <a:rPr lang="zh-CN" altLang="en-US" sz="1400" b="0" i="0" u="none" strike="noStrike" dirty="0">
+                <a:solidFill>
+                  <a:srgbClr val="000000"/>
+                </a:solidFill>
+              </a:rPr>
+              <a:t>热</a:t>
+            </a:r>
+            <a:r>
+              <a:rPr lang="en-US" sz="1400" b="0" i="0" u="none" strike="noStrike" dirty="0">
+                <a:solidFill>
+                  <a:srgbClr val="000000"/>
+                </a:solidFill>
+              </a:rPr>
+              <a:t>梗结合起来，</a:t>
+            </a:r>
+            <a:r>
+              <a:rPr lang="zh-CN" altLang="en-US" sz="1400" b="0" i="0" u="none" strike="noStrike" dirty="0">
+                <a:solidFill>
+                  <a:srgbClr val="000000"/>
+                </a:solidFill>
+              </a:rPr>
+              <a:t>寓</a:t>
+            </a:r>
+            <a:r>
+              <a:rPr lang="zh-CN" altLang="en-US" sz="1400" b="1" i="0" u="none" strike="noStrike" dirty="0">
+                <a:solidFill>
+                  <a:srgbClr val="000000"/>
+                </a:solidFill>
+              </a:rPr>
+              <a:t>乐</a:t>
+            </a:r>
+            <a:r>
+              <a:rPr lang="zh-CN" altLang="en-US" sz="1400" b="0" i="0" u="none" strike="noStrike" dirty="0">
+                <a:solidFill>
+                  <a:srgbClr val="000000"/>
+                </a:solidFill>
+              </a:rPr>
+              <a:t>于教，</a:t>
+            </a:r>
+            <a:r>
+              <a:rPr lang="en-US" sz="1400" b="0" i="0" u="none" strike="noStrike" dirty="0">
+                <a:solidFill>
+                  <a:srgbClr val="000000"/>
+                </a:solidFill>
+              </a:rPr>
+              <a:t>让孩子在玩里学，真正激发孩子的学习内驱力，这比我们逼着孩子背知识点，效果好太多了。</a:t>
+            </a:r>
+            <a:r>
+              <a:rPr lang="zh-CN" altLang="en-US" sz="1400" b="0" i="0" u="none" strike="noStrike" dirty="0">
+                <a:solidFill>
+                  <a:srgbClr val="000000"/>
+                </a:solidFill>
+              </a:rPr>
+              <a:t>而且</a:t>
+            </a:r>
+            <a:r>
+              <a:rPr lang="en-US" altLang="zh-CN" sz="1400" b="0" i="0" u="none" strike="noStrike" dirty="0">
+                <a:solidFill>
+                  <a:srgbClr val="000000"/>
+                </a:solidFill>
+              </a:rPr>
+              <a:t>AI</a:t>
+            </a:r>
+            <a:r>
+              <a:rPr lang="zh-CN" altLang="en-US" sz="1400" b="0" i="0" u="none" strike="noStrike" dirty="0">
+                <a:solidFill>
+                  <a:srgbClr val="000000"/>
+                </a:solidFill>
+              </a:rPr>
+              <a:t>特别快，不像以前，你觉得一个地方可以深挖，还要</a:t>
+            </a:r>
+            <a:r>
+              <a:rPr lang="en-US" altLang="zh-CN" sz="1400" b="0" i="0" u="none" strike="noStrike" dirty="0">
+                <a:solidFill>
+                  <a:srgbClr val="000000"/>
+                </a:solidFill>
+              </a:rPr>
+              <a:t>Google</a:t>
+            </a:r>
+            <a:r>
+              <a:rPr lang="zh-CN" altLang="en-US" sz="1400" b="0" i="0" u="none" strike="noStrike" dirty="0">
+                <a:solidFill>
+                  <a:srgbClr val="000000"/>
+                </a:solidFill>
+              </a:rPr>
+              <a:t>、要自己组织，拼凑完了给孩子讲，孩子还不一定有趣。现在，你就把你的需求提给</a:t>
+            </a:r>
+            <a:r>
+              <a:rPr lang="en-US" altLang="zh-CN" sz="1400" b="0" i="0" u="none" strike="noStrike" dirty="0">
+                <a:solidFill>
+                  <a:srgbClr val="000000"/>
+                </a:solidFill>
+              </a:rPr>
+              <a:t>AI</a:t>
+            </a:r>
+            <a:r>
+              <a:rPr lang="zh-CN" altLang="en-US" sz="1400" b="0" i="0" u="none" strike="noStrike" dirty="0">
+                <a:solidFill>
+                  <a:srgbClr val="000000"/>
+                </a:solidFill>
+              </a:rPr>
+              <a:t>，它全能帮你完成。有时候比如孩子遇到一个问题，</a:t>
+            </a:r>
+            <a:r>
+              <a:rPr lang="en-US" altLang="zh-CN" sz="1400" b="0" i="0" u="none" strike="noStrike" dirty="0">
+                <a:solidFill>
+                  <a:srgbClr val="000000"/>
+                </a:solidFill>
+              </a:rPr>
+              <a:t>AI</a:t>
+            </a:r>
+            <a:r>
+              <a:rPr lang="zh-CN" altLang="en-US" sz="1400" b="0" i="0" u="none" strike="noStrike" dirty="0">
+                <a:solidFill>
+                  <a:srgbClr val="000000"/>
+                </a:solidFill>
+              </a:rPr>
+              <a:t>解答的可能过于官方或者这个问题本身就比较难以理解，你可以要求</a:t>
+            </a:r>
+            <a:r>
+              <a:rPr lang="en-US" altLang="zh-CN" sz="1400" b="0" i="0" u="none" strike="noStrike" dirty="0">
+                <a:solidFill>
+                  <a:srgbClr val="000000"/>
+                </a:solidFill>
+              </a:rPr>
+              <a:t>AI</a:t>
+            </a:r>
+            <a:r>
+              <a:rPr lang="zh-CN" altLang="en-US" sz="1400" b="0" i="0" u="none" strike="noStrike" dirty="0">
+                <a:solidFill>
+                  <a:srgbClr val="000000"/>
+                </a:solidFill>
+              </a:rPr>
+              <a:t>用三年级小朋友能听懂的话再解释一遍，它就会非常耐心的跟你说“小朋友，我们今天来通过一个故事来理解</a:t>
+            </a:r>
+            <a:r>
+              <a:rPr lang="en-US" altLang="zh-CN" sz="1400" b="0" i="0" u="none" strike="noStrike" dirty="0">
+                <a:solidFill>
+                  <a:srgbClr val="000000"/>
+                </a:solidFill>
+              </a:rPr>
+              <a:t>blablabla</a:t>
+            </a:r>
+            <a:r>
+              <a:rPr lang="zh-CN" altLang="en-US" sz="1400" b="0" i="0" u="none" strike="noStrike" dirty="0">
+                <a:solidFill>
+                  <a:srgbClr val="000000"/>
+                </a:solidFill>
+              </a:rPr>
+              <a:t>”，非常通人性，这样大人、小朋友、</a:t>
+            </a:r>
+            <a:r>
+              <a:rPr lang="en-US" altLang="zh-CN" sz="1400" b="0" i="0" u="none" strike="noStrike" dirty="0">
+                <a:solidFill>
+                  <a:srgbClr val="000000"/>
+                </a:solidFill>
+              </a:rPr>
+              <a:t>AI</a:t>
+            </a:r>
+            <a:r>
+              <a:rPr lang="zh-CN" altLang="en-US" sz="1400" b="0" i="0" u="none" strike="noStrike">
+                <a:solidFill>
+                  <a:srgbClr val="000000"/>
+                </a:solidFill>
+              </a:rPr>
+              <a:t>一起共同完成一个题目的探索。</a:t>
+            </a:r>
+            <a:endParaRPr lang="en-US" sz="1400" b="0" i="0" u="none" strike="noStrike" dirty="0">
+              <a:solidFill>
+                <a:srgbClr val="000000"/>
+              </a:solidFill>
+            </a:endParaRPr>
+          </a:p>
+        </p:txBody>
+      </p:sp>
+      <p:sp>
+        <p:nvSpPr>
+          <p:cNvPr id="6" name="Footer Placeholder 5"/>
+          <p:cNvSpPr>
+            <a:spLocks noGrp="1"/>
+          </p:cNvSpPr>
+          <p:nvPr>
+            <p:ph type="ftr" sz="quarter" idx="4"/>
+          </p:nvPr>
+        </p:nvSpPr>
+        <p:spPr>
+          <a:xfrm>
+            <a:off x="0" y="6502400"/>
+            <a:ext cx="3962400" cy="341313"/>
+          </a:xfrm>
+          <a:prstGeom prst="rect">
+            <a:avLst/>
+          </a:prstGeom>
+        </p:spPr>
+        <p:txBody>
+          <a:bodyPr vert="horz" lIns="91440" tIns="45720" rIns="91440" bIns="45720" rtlCol="0" anchor="b"/>
+          <a:lstStyle>
+            <a:lvl1pPr algn="l">
+              <a:defRPr sz="1200"/>
+            </a:lvl1pPr>
+          </a:lstStyle>
+          <a:p>
+            <a:endParaRPr/>
+          </a:p>
+        </p:txBody>
+      </p:sp>
+      <p:sp>
+        <p:nvSpPr>
+          <p:cNvPr id="7" name="Slide Number Placeholder 6"/>
+          <p:cNvSpPr>
+            <a:spLocks noGrp="1"/>
+          </p:cNvSpPr>
+          <p:nvPr>
+            <p:ph type="sldNum" sz="quarter" idx="5"/>
+          </p:nvPr>
+        </p:nvSpPr>
+        <p:spPr>
+          <a:xfrm>
+            <a:off x="5180013" y="6502400"/>
+            <a:ext cx="3962400" cy="341313"/>
+          </a:xfrm>
+          <a:prstGeom prst="rect">
+            <a:avLst/>
+          </a:prstGeom>
+        </p:spPr>
+        <p:txBody>
+          <a:bodyPr vert="horz" lIns="91440" tIns="45720" rIns="91440" bIns="45720" rtlCol="0" anchor="b"/>
+          <a:lstStyle>
+            <a:lvl1pPr algn="r">
+              <a:defRPr sz="1200"/>
+            </a:lvl1pPr>
+          </a:lstStyle>
+          <a:p>
+            <a:r>
+              <a:rPr lang="cs-CZ"/>
+              <a:t>‹#›</a:t>
+            </a:r>
+          </a:p>
+        </p:txBody>
+      </p:sp>
+    </p:spTree>
+  </p:cSld>
+  <p:clrMapOvr>
+    <a:masterClrMapping/>
+  </p:clrMapOvr>
+</p:notes>
+</file>
+
+<file path=ppt/notesSlides/notesSlide7.xml><?xml version="1.0" encoding="utf-8"?>
 <p:notes xmlns:a="http://schemas.openxmlformats.org/drawingml/2006/main" xmlns:r="http://schemas.openxmlformats.org/officeDocument/2006/relationships" xmlns:p="http://schemas.openxmlformats.org/presentationml/2006/main">
   <p:cSld>
     <p:spTree>
@@ -2095,7 +4149,7 @@
                 <a:effectLst/>
                 <a:latin typeface="ui-sans-serif"/>
               </a:rPr>
-              <a:t>在了解了陪孩子用 </a:t>
+              <a:t>通过上面的案例，我们分析下，</a:t>
             </a:r>
             <a:r>
               <a:rPr lang="en-US" altLang="zh-CN" b="0" dirty="0">
@@ -2115,31 +4169,31 @@
                 <a:effectLst/>
                 <a:latin typeface="ui-sans-serif"/>
               </a:rPr>
-              <a:t>的核心原则之后，我们可以看看，在实际生活中，</a:t>
-            </a:r>
-            <a:r>
-              <a:rPr lang="en-US" altLang="zh-CN" b="0" dirty="0">
+              <a:t>到底能以哪些具体的方式，和孩子相处呢？我总结了三种最常见、也最有效的模式。</a:t>
+            </a:r>
+          </a:p>
+          <a:p>
+            <a:pPr algn="l"/>
+            <a:r>
+              <a:rPr lang="zh-CN" altLang="en-US" b="0" dirty="0">
                 <a:solidFill>
                   <a:srgbClr val="000000"/>
                 </a:solidFill>
                 <a:effectLst/>
                 <a:latin typeface="ui-sans-serif"/>
               </a:rPr>
-              <a:t>AI </a:t>
-            </a:r>
-            <a:r>
-              <a:rPr lang="zh-CN" altLang="en-US" b="0" dirty="0">
+              <a:t>第一种，是</a:t>
+            </a:r>
+            <a:r>
+              <a:rPr lang="zh-CN" altLang="en-US" b="1" dirty="0">
                 <a:solidFill>
                   <a:srgbClr val="000000"/>
                 </a:solidFill>
                 <a:effectLst/>
                 <a:latin typeface="ui-sans-serif"/>
               </a:rPr>
-              <a:t>到底能以哪些具体的方式，和孩子相处呢？我总结了三种最常见、也最有效的模式。</a:t>
-            </a:r>
-          </a:p>
-          <a:p>
-            <a:pPr algn="l"/>
+              <a:t>提效工具模式</a:t>
+            </a:r>
             <a:r>
               <a:rPr lang="zh-CN" altLang="en-US" b="0" dirty="0">
                 <a:solidFill>
@@ -2148,17 +4202,17 @@
                 <a:effectLst/>
                 <a:latin typeface="ui-sans-serif"/>
               </a:rPr>
-              <a:t>第一种，是</a:t>
-            </a:r>
-            <a:r>
-              <a:rPr lang="zh-CN" altLang="en-US" b="1" dirty="0">
+              <a:t>。简单说，就是 “</a:t>
+            </a:r>
+            <a:r>
+              <a:rPr lang="en-US" altLang="zh-CN" b="0" dirty="0">
                 <a:solidFill>
                   <a:srgbClr val="000000"/>
                 </a:solidFill>
                 <a:effectLst/>
                 <a:latin typeface="ui-sans-serif"/>
               </a:rPr>
-              <a:t>自动化模式</a:t>
+              <a:t>AI </a:t>
             </a:r>
             <a:r>
               <a:rPr lang="zh-CN" altLang="en-US" b="0" dirty="0">
@@ -2168,7 +4222,7 @@
                 <a:effectLst/>
                 <a:latin typeface="ui-sans-serif"/>
               </a:rPr>
-              <a:t>，也可以叫工具模式。简单说，就是 “</a:t>
+              <a:t>帮我做”。在这种模式下，</a:t>
             </a:r>
             <a:r>
               <a:rPr lang="en-US" altLang="zh-CN" b="0" dirty="0">
@@ -2188,7 +4242,7 @@
                 <a:effectLst/>
                 <a:latin typeface="ui-sans-serif"/>
               </a:rPr>
-              <a:t>帮我做”。在这种模式下，</a:t>
+              <a:t>主要负责完成那些机械、重复、耗时的工作，比如整理错题、生成练习题、查找资料等等。家长和孩子则把精力放在更重要的事情上 </a:t>
             </a:r>
             <a:r>
               <a:rPr lang="en-US" altLang="zh-CN" b="0" dirty="0">
@@ -2198,7 +4252,7 @@
                 <a:effectLst/>
                 <a:latin typeface="ui-sans-serif"/>
               </a:rPr>
-              <a:t>AI </a:t>
+              <a:t>—— </a:t>
             </a:r>
             <a:r>
               <a:rPr lang="zh-CN" altLang="en-US" b="0" dirty="0">
@@ -2208,7 +4262,7 @@
                 <a:effectLst/>
                 <a:latin typeface="ui-sans-serif"/>
               </a:rPr>
-              <a:t>主要负责完成那些机械、重复、耗时的工作，比如整理错题、生成练习题、查找资料等等。家长和孩子则把精力放在更重要的事情上 </a:t>
+              <a:t>判断信息的准确性、理解背后的知识点、进行深度思考。这就像我们前面提到的 </a:t>
             </a:r>
             <a:r>
               <a:rPr lang="en-US" altLang="zh-CN" b="0" dirty="0">
@@ -2218,7 +4272,7 @@
                 <a:effectLst/>
                 <a:latin typeface="ui-sans-serif"/>
               </a:rPr>
-              <a:t>—— </a:t>
+              <a:t>AI </a:t>
             </a:r>
             <a:r>
               <a:rPr lang="zh-CN" altLang="en-US" b="0" dirty="0">
@@ -2228,7 +4282,7 @@
                 <a:effectLst/>
                 <a:latin typeface="ui-sans-serif"/>
               </a:rPr>
-              <a:t>判断信息的准确性、理解背后的知识点、进行深度思考。这就像我们前面提到的 </a:t>
+              <a:t>错题集案例，</a:t>
             </a:r>
             <a:r>
               <a:rPr lang="en-US" altLang="zh-CN" b="0" dirty="0">
@@ -2248,7 +4302,7 @@
                 <a:effectLst/>
                 <a:latin typeface="ui-sans-serif"/>
               </a:rPr>
-              <a:t>错题集案例，</a:t>
+              <a:t>帮我们完成了讲解和分析，孩子则专注于理解和订正。</a:t>
             </a:r>
             <a:r>
               <a:rPr lang="en-US" altLang="zh-CN" b="0" dirty="0">
@@ -2258,7 +4312,7 @@
                 <a:effectLst/>
                 <a:latin typeface="ui-sans-serif"/>
               </a:rPr>
-              <a:t>AI </a:t>
+              <a:t>——</a:t>
             </a:r>
             <a:r>
               <a:rPr lang="zh-CN" altLang="en-US" b="0" dirty="0">
@@ -2268,31 +4322,48 @@
                 <a:effectLst/>
                 <a:latin typeface="ui-sans-serif"/>
               </a:rPr>
-              <a:t>帮我们完成了讲解和分析，孩子则专注于理解和订正。</a:t>
-            </a:r>
-          </a:p>
-          <a:p>
-            <a:pPr algn="l"/>
-            <a:r>
-              <a:rPr lang="zh-CN" altLang="en-US" b="0" dirty="0">
+              <a:t>在这种模式下，</a:t>
+            </a:r>
+            <a:r>
+              <a:rPr lang="en-US" altLang="zh-CN" b="0" dirty="0">
                 <a:solidFill>
                   <a:srgbClr val="000000"/>
                 </a:solidFill>
                 <a:effectLst/>
                 <a:latin typeface="ui-sans-serif"/>
               </a:rPr>
-              <a:t>第二种，是</a:t>
-            </a:r>
-            <a:r>
-              <a:rPr lang="zh-CN" altLang="en-US" b="1" dirty="0">
+              <a:t>AI</a:t>
+            </a:r>
+            <a:r>
+              <a:rPr lang="zh-CN" altLang="en-US" b="0" dirty="0">
                 <a:solidFill>
                   <a:srgbClr val="000000"/>
                 </a:solidFill>
                 <a:effectLst/>
                 <a:latin typeface="ui-sans-serif"/>
               </a:rPr>
-              <a:t>代理自主模式</a:t>
-            </a:r>
+              <a:t>主要提供的价值是提升信息获取和学习的效率。</a:t>
+            </a:r>
+            <a:endParaRPr lang="en-US" altLang="zh-CN" b="0" dirty="0">
+              <a:solidFill>
+                <a:srgbClr val="000000"/>
+              </a:solidFill>
+              <a:effectLst/>
+              <a:latin typeface="ui-sans-serif"/>
+            </a:endParaRPr>
+          </a:p>
+          <a:p>
+            <a:pPr algn="l"/>
+            <a:endParaRPr lang="zh-CN" altLang="en-US" b="0" dirty="0">
+              <a:solidFill>
+                <a:srgbClr val="000000"/>
+              </a:solidFill>
+              <a:effectLst/>
+              <a:latin typeface="ui-sans-serif"/>
+            </a:endParaRPr>
+          </a:p>
+          <a:p>
+            <a:pPr algn="l"/>
             <a:r>
               <a:rPr lang="zh-CN" altLang="en-US" b="0" dirty="0">
                 <a:solidFill>
@@ -2301,17 +4372,17 @@
                 <a:effectLst/>
                 <a:latin typeface="ui-sans-serif"/>
               </a:rPr>
-              <a:t>，也叫陪伴模式。这种模式下，是 “孩子主导”。孩子自己与 </a:t>
-            </a:r>
-            <a:r>
-              <a:rPr lang="en-US" altLang="zh-CN" b="0" dirty="0">
+              <a:t>第二种，是</a:t>
+            </a:r>
+            <a:r>
+              <a:rPr lang="zh-CN" altLang="en-US" b="1" dirty="0">
                 <a:solidFill>
                   <a:srgbClr val="000000"/>
                 </a:solidFill>
                 <a:effectLst/>
                 <a:latin typeface="ui-sans-serif"/>
               </a:rPr>
-              <a:t>AI </a:t>
+              <a:t>规则代理模式</a:t>
             </a:r>
             <a:r>
               <a:rPr lang="zh-CN" altLang="en-US" b="0" dirty="0">
@@ -2321,81 +4392,195 @@
                 <a:effectLst/>
                 <a:latin typeface="ui-sans-serif"/>
               </a:rPr>
-              <a:t>工具进行互动，家长则退到幕后，扮演引导者和规则制定者的角色。关键在于，我们需要提前为孩子设计好使用的规则和边界，确保孩子在安全、正确的轨道上自主探索。比如我们的 “时间小火车” 案例，就是让孩子自己安排时间，培养自主管理能力。</a:t>
-            </a:r>
-          </a:p>
-          <a:p>
-            <a:pPr algn="l"/>
-            <a:r>
-              <a:rPr lang="zh-CN" altLang="en-US" b="0" dirty="0">
+              <a:t>。这种模式下，是我们制定规则，</a:t>
+            </a:r>
+            <a:r>
+              <a:rPr lang="en-US" altLang="zh-CN" b="0" dirty="0">
                 <a:solidFill>
                   <a:srgbClr val="000000"/>
                 </a:solidFill>
                 <a:effectLst/>
                 <a:latin typeface="ui-sans-serif"/>
               </a:rPr>
-              <a:t>第三种，是</a:t>
-            </a:r>
-            <a:r>
-              <a:rPr lang="zh-CN" altLang="en-US" b="1" dirty="0">
+              <a:t>AI</a:t>
+            </a:r>
+            <a:r>
+              <a:rPr lang="zh-CN" altLang="en-US" b="0" dirty="0">
                 <a:solidFill>
                   <a:srgbClr val="000000"/>
                 </a:solidFill>
                 <a:effectLst/>
                 <a:latin typeface="ui-sans-serif"/>
               </a:rPr>
-              <a:t>增强协作模式</a:t>
-            </a:r>
-            <a:r>
-              <a:rPr lang="zh-CN" altLang="en-US" b="0" dirty="0">
+              <a:t>在规则内完成工作，执行的时候孩子主导。孩子自己与 </a:t>
+            </a:r>
+            <a:r>
+              <a:rPr lang="en-US" altLang="zh-CN" b="0" dirty="0">
                 <a:solidFill>
                   <a:srgbClr val="000000"/>
                 </a:solidFill>
                 <a:effectLst/>
                 <a:latin typeface="ui-sans-serif"/>
               </a:rPr>
-              <a:t>，也叫协作模式。这是最高级的一种方式，我们可以称之为 “我们一起探索”。在这种模式下，家长、孩子和 </a:t>
-            </a:r>
-            <a:r>
-              <a:rPr lang="en-US" altLang="zh-CN" b="0" dirty="0">
+              <a:t>AI </a:t>
+            </a:r>
+            <a:r>
+              <a:rPr lang="zh-CN" altLang="en-US" b="0" dirty="0">
                 <a:solidFill>
                   <a:srgbClr val="000000"/>
                 </a:solidFill>
                 <a:effectLst/>
                 <a:latin typeface="ui-sans-serif"/>
               </a:rPr>
-              <a:t>AI </a:t>
-            </a:r>
-            <a:r>
-              <a:rPr lang="zh-CN" altLang="en-US" b="0" dirty="0">
+              <a:t>进行互动，家长则退到幕后，扮演规则制定者和引导者的角色。关键在于，我们需要提前为孩子设计好使用的规则和边界，确保孩子在安全、正确的轨道上自主探索。比如我们的 “时间小火车” 案例，就是让</a:t>
+            </a:r>
+            <a:r>
+              <a:rPr lang="en-US" altLang="zh-CN" b="0" dirty="0">
                 <a:solidFill>
                   <a:srgbClr val="000000"/>
                 </a:solidFill>
                 <a:effectLst/>
                 <a:latin typeface="ui-sans-serif"/>
               </a:rPr>
-              <a:t>是一个协作的团队，共同去探索一个问题、完成一个项目。方向由我们来定，最终的结论也由我们共同得出，</a:t>
-            </a:r>
-            <a:r>
-              <a:rPr lang="en-US" altLang="zh-CN" b="0" dirty="0">
+              <a:t>AI</a:t>
+            </a:r>
+            <a:r>
+              <a:rPr lang="zh-CN" altLang="en-US" b="0" dirty="0">
                 <a:solidFill>
                   <a:srgbClr val="000000"/>
                 </a:solidFill>
                 <a:effectLst/>
                 <a:latin typeface="ui-sans-serif"/>
               </a:rPr>
-              <a:t>AI </a:t>
-            </a:r>
-            <a:r>
-              <a:rPr lang="zh-CN" altLang="en-US" b="0" dirty="0">
+              <a:t>作为工具，生成一个网页，这个网页里面提供了时间管理的规则（匹配上每天的任务</a:t>
+            </a:r>
+            <a:r>
+              <a:rPr lang="en-US" altLang="zh-CN" b="0" dirty="0">
                 <a:solidFill>
                   <a:srgbClr val="000000"/>
                 </a:solidFill>
                 <a:effectLst/>
                 <a:latin typeface="ui-sans-serif"/>
               </a:rPr>
-              <a:t>在这里是一个强大的协作伙伴，帮助我们放大创造力和探索能力。我们后面会讲到的意大利语启蒙案例，就是一个典型的协作模式。</a:t>
-            </a:r>
+              <a:t>TODO</a:t>
+            </a:r>
+            <a:r>
+              <a:rPr lang="zh-CN" altLang="en-US" b="0" dirty="0">
+                <a:solidFill>
+                  <a:srgbClr val="000000"/>
+                </a:solidFill>
+                <a:effectLst/>
+                <a:latin typeface="ui-sans-serif"/>
+              </a:rPr>
+              <a:t>和半小时框架），孩子在规则内自己探索、安排时间，潜移默化的培养自主管理能力。</a:t>
+            </a:r>
+            <a:endParaRPr lang="en-US" altLang="zh-CN" b="0" dirty="0">
+              <a:solidFill>
+                <a:srgbClr val="000000"/>
+              </a:solidFill>
+              <a:effectLst/>
+              <a:latin typeface="ui-sans-serif"/>
+            </a:endParaRPr>
+          </a:p>
+          <a:p>
+            <a:pPr algn="l"/>
+            <a:endParaRPr lang="zh-CN" altLang="en-US" b="0" dirty="0">
+              <a:solidFill>
+                <a:srgbClr val="000000"/>
+              </a:solidFill>
+              <a:effectLst/>
+              <a:latin typeface="ui-sans-serif"/>
+            </a:endParaRPr>
+          </a:p>
+          <a:p>
+            <a:pPr algn="l"/>
+            <a:r>
+              <a:rPr lang="zh-CN" altLang="en-US" b="0" dirty="0">
+                <a:solidFill>
+                  <a:srgbClr val="000000"/>
+                </a:solidFill>
+                <a:effectLst/>
+                <a:latin typeface="ui-sans-serif"/>
+              </a:rPr>
+              <a:t>第三种，是</a:t>
+            </a:r>
+            <a:r>
+              <a:rPr lang="zh-CN" altLang="en-US" b="1" dirty="0">
+                <a:solidFill>
+                  <a:srgbClr val="000000"/>
+                </a:solidFill>
+                <a:effectLst/>
+                <a:latin typeface="ui-sans-serif"/>
+              </a:rPr>
+              <a:t>增强协作模式</a:t>
+            </a:r>
+            <a:r>
+              <a:rPr lang="zh-CN" altLang="en-US" b="0" dirty="0">
+                <a:solidFill>
+                  <a:srgbClr val="000000"/>
+                </a:solidFill>
+                <a:effectLst/>
+                <a:latin typeface="ui-sans-serif"/>
+              </a:rPr>
+              <a:t>。这是最高级的一种方式，我们可以称之为 “我们一起探索”。在这种模式下，家长、孩子和 </a:t>
+            </a:r>
+            <a:r>
+              <a:rPr lang="en-US" altLang="zh-CN" b="0" dirty="0">
+                <a:solidFill>
+                  <a:srgbClr val="000000"/>
+                </a:solidFill>
+                <a:effectLst/>
+                <a:latin typeface="ui-sans-serif"/>
+              </a:rPr>
+              <a:t>AI </a:t>
+            </a:r>
+            <a:r>
+              <a:rPr lang="zh-CN" altLang="en-US" b="0" dirty="0">
+                <a:solidFill>
+                  <a:srgbClr val="000000"/>
+                </a:solidFill>
+                <a:effectLst/>
+                <a:latin typeface="ui-sans-serif"/>
+              </a:rPr>
+              <a:t>是一个协作的团队，共同去探索一个问题、完成一个项目。方向大家一起来制定，最终的结论也由大家一起共同得出，</a:t>
+            </a:r>
+            <a:r>
+              <a:rPr lang="en-US" altLang="zh-CN" b="0" dirty="0">
+                <a:solidFill>
+                  <a:srgbClr val="000000"/>
+                </a:solidFill>
+                <a:effectLst/>
+                <a:latin typeface="ui-sans-serif"/>
+              </a:rPr>
+              <a:t>AI </a:t>
+            </a:r>
+            <a:r>
+              <a:rPr lang="zh-CN" altLang="en-US" b="0" dirty="0">
+                <a:solidFill>
+                  <a:srgbClr val="000000"/>
+                </a:solidFill>
+                <a:effectLst/>
+                <a:latin typeface="ui-sans-serif"/>
+              </a:rPr>
+              <a:t>在这里是一个强大的协作伙伴，帮助我们放大创造力和探索能力。我们讲到的意大利语启蒙案例，就是一个典型的协作模式。</a:t>
+            </a:r>
+            <a:endParaRPr lang="en-US" altLang="zh-CN" b="0" dirty="0">
+              <a:solidFill>
+                <a:srgbClr val="000000"/>
+              </a:solidFill>
+              <a:effectLst/>
+              <a:latin typeface="ui-sans-serif"/>
+            </a:endParaRPr>
+          </a:p>
+          <a:p>
+            <a:pPr algn="l"/>
+            <a:endParaRPr lang="zh-CN" altLang="en-US" b="0" dirty="0">
+              <a:solidFill>
+                <a:srgbClr val="000000"/>
+              </a:solidFill>
+              <a:effectLst/>
+              <a:latin typeface="ui-sans-serif"/>
+            </a:endParaRPr>
           </a:p>
           <a:p>
             <a:pPr algn="l"/>
@@ -2515,1571 +4700,6 @@
         <p14:creationId xmlns:p14="http://schemas.microsoft.com/office/powerpoint/2010/main" val="1777434736"/>
       </p:ext>
     </p:extLst>
-  </p:cSld>
-  <p:clrMapOvr>
-    <a:masterClrMapping/>
-  </p:clrMapOvr>
-</p:notes>
-</file>
-
-<file path=ppt/notesSlides/notesSlide5.xml><?xml version="1.0" encoding="utf-8"?>
-<p:notes xmlns:a="http://schemas.openxmlformats.org/drawingml/2006/main" xmlns:r="http://schemas.openxmlformats.org/officeDocument/2006/relationships" xmlns:p="http://schemas.openxmlformats.org/presentationml/2006/main">
-  <p:cSld>
-    <p:spTree>
-      <p:nvGrpSpPr>
-        <p:cNvPr id="1" name=""/>
-        <p:cNvGrpSpPr/>
-        <p:nvPr/>
-      </p:nvGrpSpPr>
-      <p:grpSpPr>
-        <a:xfrm>
-          <a:off x="0" y="0"/>
-          <a:ext cx="0" cy="0"/>
-          <a:chOff x="0" y="0"/>
-          <a:chExt cx="0" cy="0"/>
-        </a:xfrm>
-      </p:grpSpPr>
-      <p:sp>
-        <p:nvSpPr>
-          <p:cNvPr id="2" name="Header Placeholder 1"/>
-          <p:cNvSpPr>
-            <a:spLocks noGrp="1"/>
-          </p:cNvSpPr>
-          <p:nvPr>
-            <p:ph type="hdr" sz="quarter"/>
-          </p:nvPr>
-        </p:nvSpPr>
-        <p:spPr>
-          <a:xfrm>
-            <a:off x="0" y="0"/>
-            <a:ext cx="3962400" cy="342900"/>
-          </a:xfrm>
-          <a:prstGeom prst="rect">
-            <a:avLst/>
-          </a:prstGeom>
-        </p:spPr>
-        <p:txBody>
-          <a:bodyPr vert="horz" lIns="91440" tIns="45720" rIns="91440" bIns="45720" rtlCol="0"/>
-          <a:lstStyle>
-            <a:lvl1pPr algn="l">
-              <a:defRPr sz="1200"/>
-            </a:lvl1pPr>
-          </a:lstStyle>
-          <a:p>
-            <a:endParaRPr/>
-          </a:p>
-        </p:txBody>
-      </p:sp>
-      <p:sp>
-        <p:nvSpPr>
-          <p:cNvPr id="3" name="Date Placeholder 2"/>
-          <p:cNvSpPr>
-            <a:spLocks noGrp="1"/>
-          </p:cNvSpPr>
-          <p:nvPr>
-            <p:ph type="dt" idx="1"/>
-          </p:nvPr>
-        </p:nvSpPr>
-        <p:spPr>
-          <a:xfrm>
-            <a:off x="5180013" y="0"/>
-            <a:ext cx="3962400" cy="342900"/>
-          </a:xfrm>
-          <a:prstGeom prst="rect">
-            <a:avLst/>
-          </a:prstGeom>
-        </p:spPr>
-        <p:txBody>
-          <a:bodyPr vert="horz" lIns="91440" tIns="45720" rIns="91440" bIns="45720" rtlCol="0"/>
-          <a:lstStyle>
-            <a:lvl1pPr algn="r">
-              <a:defRPr sz="1200"/>
-            </a:lvl1pPr>
-          </a:lstStyle>
-          <a:p>
-            <a:r>
-              <a:rPr lang="cs-CZ"/>
-              <a:t>1.7.2013</a:t>
-            </a:r>
-          </a:p>
-        </p:txBody>
-      </p:sp>
-      <p:sp>
-        <p:nvSpPr>
-          <p:cNvPr id="4" name="Slide Image Placeholder 3"/>
-          <p:cNvSpPr>
-            <a:spLocks noGrp="1" noRot="1" noChangeAspect="1"/>
-          </p:cNvSpPr>
-          <p:nvPr>
-            <p:ph type="sldImg" idx="2"/>
-          </p:nvPr>
-        </p:nvSpPr>
-        <p:spPr>
-          <a:xfrm>
-            <a:off x="2290763" y="512763"/>
-            <a:ext cx="4562475" cy="2566987"/>
-          </a:xfrm>
-          <a:prstGeom prst="rect">
-            <a:avLst/>
-          </a:prstGeom>
-          <a:noFill/>
-          <a:ln w="12700">
-            <a:solidFill>
-              <a:prstClr val="black"/>
-            </a:solidFill>
-          </a:ln>
-        </p:spPr>
-        <p:txBody>
-          <a:bodyPr vert="horz" lIns="91440" tIns="45720" rIns="91440" bIns="45720" rtlCol="0" anchor="ctr"/>
-          <a:lstStyle/>
-          <a:p>
-            <a:endParaRPr/>
-          </a:p>
-        </p:txBody>
-      </p:sp>
-      <p:sp>
-        <p:nvSpPr>
-          <p:cNvPr id="5" name="Notes Placeholder 4"/>
-          <p:cNvSpPr>
-            <a:spLocks noGrp="1"/>
-          </p:cNvSpPr>
-          <p:nvPr>
-            <p:ph type="body" sz="quarter" idx="3"/>
-          </p:nvPr>
-        </p:nvSpPr>
-        <p:spPr>
-          <a:xfrm>
-            <a:off x="914400" y="3251200"/>
-            <a:ext cx="7315200" cy="3081338"/>
-          </a:xfrm>
-          <a:prstGeom prst="rect">
-            <a:avLst/>
-          </a:prstGeom>
-        </p:spPr>
-        <p:txBody>
-          <a:bodyPr vert="horz" lIns="91440" tIns="45720" rIns="91440" bIns="45720" rtlCol="0" anchor="ctr"/>
-          <a:lstStyle>
-            <a:lvl1pPr algn="l">
-              <a:defRPr sz="1400" b="0" i="0" u="none" strike="noStrike"/>
-            </a:lvl1pPr>
-          </a:lstStyle>
-          <a:p>
-            <a:pPr indent="0" algn="l">
-              <a:lnSpc>
-                <a:spcPct val="100000"/>
-              </a:lnSpc>
-            </a:pPr>
-            <a:r>
-              <a:rPr lang="en-US" sz="1400" b="0" i="0" u="none" strike="noStrike" dirty="0">
-                <a:solidFill>
-                  <a:srgbClr val="000000"/>
-                </a:solidFill>
-              </a:rPr>
-              <a:t>第一个故事，是关于怎么治好我家孩子的拖延症。我家娃一二年级的时候，写作业特别磨蹭，明明半小时就能写完的作业，能硬生生拖2个小时。你催一句，他动一下，你不催，他就能对着一块橡皮玩半小时。我们当时试过各种方法，做时间表、贴小红花、定奖惩规则，</a:t>
-            </a:r>
-            <a:r>
-              <a:rPr lang="zh-CN" altLang="en-US" sz="1400" b="0" i="0" u="none" strike="noStrike" dirty="0">
-                <a:solidFill>
-                  <a:srgbClr val="000000"/>
-                </a:solidFill>
-              </a:rPr>
-              <a:t>连推带拉，</a:t>
-            </a:r>
-            <a:r>
-              <a:rPr lang="en-US" sz="1400" b="0" i="0" u="none" strike="noStrike" dirty="0">
-                <a:solidFill>
-                  <a:srgbClr val="000000"/>
-                </a:solidFill>
-              </a:rPr>
-              <a:t>全都没用。因为孩子觉得，这个时间表是爸爸妈妈给他定的任务，是给我们完成的，他从心底里抵触。</a:t>
-            </a:r>
-          </a:p>
-          <a:p>
-            <a:pPr indent="0" algn="l">
-              <a:lnSpc>
-                <a:spcPct val="100000"/>
-              </a:lnSpc>
-            </a:pPr>
-            <a:r>
-              <a:rPr lang="en-US" sz="1400" b="0" i="0" u="none" strike="noStrike" dirty="0">
-                <a:solidFill>
-                  <a:srgbClr val="000000"/>
-                </a:solidFill>
-              </a:rPr>
-              <a:t>后来我就想，能不能把枯燥的时间管理，变成孩子喜欢的、能自己掌控的游戏？我本身是做产品的，所以我就把我的想法告诉了AI，让AI帮我做了一个网页版的「时间小火车」。这个小火车特别简单，每一节车厢，就代表30分钟的时间块，孩子可以自己拖拽，把写作业、休息、阅读、</a:t>
-            </a:r>
-            <a:r>
-              <a:rPr lang="zh-CN" altLang="en-US" sz="1400" b="0" i="0" u="none" strike="noStrike" dirty="0">
-                <a:solidFill>
-                  <a:srgbClr val="000000"/>
-                </a:solidFill>
-              </a:rPr>
-              <a:t>吃法</a:t>
-            </a:r>
-            <a:r>
-              <a:rPr lang="en-US" sz="1400" b="0" i="0" u="none" strike="noStrike" dirty="0">
-                <a:solidFill>
-                  <a:srgbClr val="000000"/>
-                </a:solidFill>
-              </a:rPr>
-              <a:t>这些事项，放到对应的车厢里，自己安排每天的</a:t>
-            </a:r>
-            <a:r>
-              <a:rPr lang="zh-CN" altLang="en-US" sz="1400" b="0" i="0" u="none" strike="noStrike" dirty="0">
-                <a:solidFill>
-                  <a:srgbClr val="000000"/>
-                </a:solidFill>
-              </a:rPr>
-              <a:t>空余</a:t>
-            </a:r>
-            <a:r>
-              <a:rPr lang="en-US" sz="1400" b="0" i="0" u="none" strike="noStrike" dirty="0">
-                <a:solidFill>
-                  <a:srgbClr val="000000"/>
-                </a:solidFill>
-              </a:rPr>
-              <a:t>时间。完成一项，就可以点亮一节车厢，全部完成，就能解锁小火车的动画奖励。</a:t>
-            </a:r>
-          </a:p>
-          <a:p>
-            <a:pPr indent="0" algn="l">
-              <a:lnSpc>
-                <a:spcPct val="100000"/>
-              </a:lnSpc>
-            </a:pPr>
-            <a:r>
-              <a:rPr lang="en-US" sz="1400" b="0" i="0" u="none" strike="noStrike" dirty="0">
-                <a:solidFill>
-                  <a:srgbClr val="000000"/>
-                </a:solidFill>
-              </a:rPr>
-              <a:t>全程我只做一件事，就是引导，绝对不替他做决定。我只会问他：“你觉得数学作业，需要几节车厢才能完成呀？”“写完作业之后，你想安排多久的休息时间？”</a:t>
-            </a:r>
-            <a:r>
-              <a:rPr lang="zh-CN" altLang="en-US" sz="1400" b="0" i="0" u="none" strike="noStrike" dirty="0">
-                <a:solidFill>
-                  <a:srgbClr val="000000"/>
-                </a:solidFill>
-              </a:rPr>
-              <a:t>“今天</a:t>
-            </a:r>
-            <a:r>
-              <a:rPr lang="en-US" altLang="zh-CN" sz="1400" b="0" i="0" u="none" strike="noStrike" dirty="0">
-                <a:solidFill>
-                  <a:srgbClr val="000000"/>
-                </a:solidFill>
-              </a:rPr>
-              <a:t>LC</a:t>
-            </a:r>
-            <a:r>
-              <a:rPr lang="zh-CN" altLang="en-US" sz="1400" b="0" i="0" u="none" strike="noStrike" dirty="0">
-                <a:solidFill>
-                  <a:srgbClr val="000000"/>
-                </a:solidFill>
-              </a:rPr>
-              <a:t>比较难，要不要先做</a:t>
-            </a:r>
-            <a:r>
-              <a:rPr lang="en-US" altLang="zh-CN" sz="1400" b="0" i="0" u="none" strike="noStrike" dirty="0">
-                <a:solidFill>
-                  <a:srgbClr val="000000"/>
-                </a:solidFill>
-              </a:rPr>
-              <a:t>LC</a:t>
-            </a:r>
-            <a:r>
-              <a:rPr lang="zh-CN" altLang="en-US" sz="1400" b="0" i="0" u="none" strike="noStrike" dirty="0">
-                <a:solidFill>
-                  <a:srgbClr val="000000"/>
-                </a:solidFill>
-              </a:rPr>
-              <a:t>？”</a:t>
-            </a:r>
-            <a:r>
-              <a:rPr lang="en-US" sz="1400" b="0" i="0" u="none" strike="noStrike" dirty="0">
-                <a:solidFill>
-                  <a:srgbClr val="000000"/>
-                </a:solidFill>
-              </a:rPr>
-              <a:t>就这么一个简单的小工具，效果出乎我的意料。用了这个小火车之后，孩子再也不觉得时间管理是家长给他的任务了，他觉得自己是这个小火车的列车长，所有的行程都是他自己安排的，他要为自己的行程负责。</a:t>
-            </a:r>
-          </a:p>
-          <a:p>
-            <a:pPr indent="0" algn="l">
-              <a:lnSpc>
-                <a:spcPct val="100000"/>
-              </a:lnSpc>
-            </a:pPr>
-            <a:r>
-              <a:rPr lang="en-US" sz="1400" b="0" i="0" u="none" strike="noStrike" dirty="0">
-                <a:solidFill>
-                  <a:srgbClr val="000000"/>
-                </a:solidFill>
-              </a:rPr>
-              <a:t>现在不用我们催，他自己就能按安排完成作业，拖延的毛病好</a:t>
-            </a:r>
-            <a:r>
-              <a:rPr lang="zh-CN" altLang="en-US" sz="1400" b="0" i="0" u="none" strike="noStrike" dirty="0">
-                <a:solidFill>
-                  <a:srgbClr val="000000"/>
-                </a:solidFill>
-              </a:rPr>
-              <a:t>很</a:t>
-            </a:r>
-            <a:r>
-              <a:rPr lang="en-US" sz="1400" b="0" i="0" u="none" strike="noStrike" dirty="0">
-                <a:solidFill>
-                  <a:srgbClr val="000000"/>
-                </a:solidFill>
-              </a:rPr>
-              <a:t>多，也慢慢养成了自主管理时间的习惯。其实给各位老师</a:t>
-            </a:r>
-            <a:r>
-              <a:rPr lang="zh-CN" altLang="en-US" sz="1400" b="0" i="0" u="none" strike="noStrike" dirty="0">
-                <a:solidFill>
-                  <a:srgbClr val="000000"/>
-                </a:solidFill>
-              </a:rPr>
-              <a:t>家长</a:t>
-            </a:r>
-            <a:r>
-              <a:rPr lang="en-US" sz="1400" b="0" i="0" u="none" strike="noStrike" dirty="0">
-                <a:solidFill>
-                  <a:srgbClr val="000000"/>
-                </a:solidFill>
-              </a:rPr>
-              <a:t>分享这个故事，也是想给大家一个小小的参考：很多时候孩子不是不想做好，而是枯燥的规则、大人的要求，让他有了抵触感。AI可以帮我们，把学校要求的习惯养成、知识点学习，变成孩子愿意主动参与的趣味形式，让孩子真正从“要我学”，变成“我要学”。</a:t>
-            </a:r>
-            <a:r>
-              <a:rPr lang="en-US" altLang="zh-CN" sz="1400" b="0" i="0" u="none" strike="noStrike" dirty="0">
-                <a:solidFill>
-                  <a:srgbClr val="000000"/>
-                </a:solidFill>
-              </a:rPr>
-              <a:t>——</a:t>
-            </a:r>
-            <a:r>
-              <a:rPr lang="zh-CN" altLang="en-US" sz="1400" b="0" i="0" u="none" strike="noStrike" dirty="0">
-                <a:solidFill>
-                  <a:srgbClr val="000000"/>
-                </a:solidFill>
-              </a:rPr>
-              <a:t>但是，这样一来，问题的焦点就变成了</a:t>
-            </a:r>
-            <a:r>
-              <a:rPr lang="en-US" altLang="zh-CN" sz="1400" b="0" i="0" u="none" strike="noStrike" dirty="0">
-                <a:solidFill>
-                  <a:srgbClr val="000000"/>
-                </a:solidFill>
-              </a:rPr>
-              <a:t>——</a:t>
-            </a:r>
-            <a:r>
-              <a:rPr lang="zh-CN" altLang="en-US" sz="1400" b="0" i="0" u="none" strike="noStrike" dirty="0">
-                <a:solidFill>
-                  <a:srgbClr val="000000"/>
-                </a:solidFill>
-              </a:rPr>
-              <a:t>怎样启发孩子，让他自发的意识到原来“我可以这么做”、“这个做下来这么有意思”。这正是</a:t>
-            </a:r>
-            <a:r>
-              <a:rPr lang="en-US" altLang="zh-CN" sz="1400" b="0" i="0" u="none" strike="noStrike" dirty="0">
-                <a:solidFill>
-                  <a:srgbClr val="000000"/>
-                </a:solidFill>
-              </a:rPr>
-              <a:t>AI</a:t>
-            </a:r>
-            <a:r>
-              <a:rPr lang="zh-CN" altLang="en-US" sz="1400" b="0" i="0" u="none" strike="noStrike" dirty="0">
-                <a:solidFill>
-                  <a:srgbClr val="000000"/>
-                </a:solidFill>
-              </a:rPr>
-              <a:t>的意义，它可以加速从创意到落地的过程，以前可能需要专业人士来配合做的事情，现在只要有好的构思，好的使用方法，每个班级、每个家庭都可以发挥创意，启发孩子。</a:t>
-            </a:r>
-            <a:endParaRPr lang="en-US" sz="1400" b="0" i="0" u="none" strike="noStrike" dirty="0">
-              <a:solidFill>
-                <a:srgbClr val="000000"/>
-              </a:solidFill>
-            </a:endParaRPr>
-          </a:p>
-        </p:txBody>
-      </p:sp>
-      <p:sp>
-        <p:nvSpPr>
-          <p:cNvPr id="6" name="Footer Placeholder 5"/>
-          <p:cNvSpPr>
-            <a:spLocks noGrp="1"/>
-          </p:cNvSpPr>
-          <p:nvPr>
-            <p:ph type="ftr" sz="quarter" idx="4"/>
-          </p:nvPr>
-        </p:nvSpPr>
-        <p:spPr>
-          <a:xfrm>
-            <a:off x="0" y="6502400"/>
-            <a:ext cx="3962400" cy="341313"/>
-          </a:xfrm>
-          <a:prstGeom prst="rect">
-            <a:avLst/>
-          </a:prstGeom>
-        </p:spPr>
-        <p:txBody>
-          <a:bodyPr vert="horz" lIns="91440" tIns="45720" rIns="91440" bIns="45720" rtlCol="0" anchor="b"/>
-          <a:lstStyle>
-            <a:lvl1pPr algn="l">
-              <a:defRPr sz="1200"/>
-            </a:lvl1pPr>
-          </a:lstStyle>
-          <a:p>
-            <a:endParaRPr/>
-          </a:p>
-        </p:txBody>
-      </p:sp>
-      <p:sp>
-        <p:nvSpPr>
-          <p:cNvPr id="7" name="Slide Number Placeholder 6"/>
-          <p:cNvSpPr>
-            <a:spLocks noGrp="1"/>
-          </p:cNvSpPr>
-          <p:nvPr>
-            <p:ph type="sldNum" sz="quarter" idx="5"/>
-          </p:nvPr>
-        </p:nvSpPr>
-        <p:spPr>
-          <a:xfrm>
-            <a:off x="5180013" y="6502400"/>
-            <a:ext cx="3962400" cy="341313"/>
-          </a:xfrm>
-          <a:prstGeom prst="rect">
-            <a:avLst/>
-          </a:prstGeom>
-        </p:spPr>
-        <p:txBody>
-          <a:bodyPr vert="horz" lIns="91440" tIns="45720" rIns="91440" bIns="45720" rtlCol="0" anchor="b"/>
-          <a:lstStyle>
-            <a:lvl1pPr algn="r">
-              <a:defRPr sz="1200"/>
-            </a:lvl1pPr>
-          </a:lstStyle>
-          <a:p>
-            <a:r>
-              <a:rPr lang="cs-CZ"/>
-              <a:t>‹#›</a:t>
-            </a:r>
-          </a:p>
-        </p:txBody>
-      </p:sp>
-    </p:spTree>
-  </p:cSld>
-  <p:clrMapOvr>
-    <a:masterClrMapping/>
-  </p:clrMapOvr>
-</p:notes>
-</file>
-
-<file path=ppt/notesSlides/notesSlide6.xml><?xml version="1.0" encoding="utf-8"?>
-<p:notes xmlns:a="http://schemas.openxmlformats.org/drawingml/2006/main" xmlns:r="http://schemas.openxmlformats.org/officeDocument/2006/relationships" xmlns:p="http://schemas.openxmlformats.org/presentationml/2006/main">
-  <p:cSld>
-    <p:spTree>
-      <p:nvGrpSpPr>
-        <p:cNvPr id="1" name=""/>
-        <p:cNvGrpSpPr/>
-        <p:nvPr/>
-      </p:nvGrpSpPr>
-      <p:grpSpPr>
-        <a:xfrm>
-          <a:off x="0" y="0"/>
-          <a:ext cx="0" cy="0"/>
-          <a:chOff x="0" y="0"/>
-          <a:chExt cx="0" cy="0"/>
-        </a:xfrm>
-      </p:grpSpPr>
-      <p:sp>
-        <p:nvSpPr>
-          <p:cNvPr id="2" name="Header Placeholder 1"/>
-          <p:cNvSpPr>
-            <a:spLocks noGrp="1"/>
-          </p:cNvSpPr>
-          <p:nvPr>
-            <p:ph type="hdr" sz="quarter"/>
-          </p:nvPr>
-        </p:nvSpPr>
-        <p:spPr>
-          <a:xfrm>
-            <a:off x="0" y="0"/>
-            <a:ext cx="3962400" cy="342900"/>
-          </a:xfrm>
-          <a:prstGeom prst="rect">
-            <a:avLst/>
-          </a:prstGeom>
-        </p:spPr>
-        <p:txBody>
-          <a:bodyPr vert="horz" lIns="91440" tIns="45720" rIns="91440" bIns="45720" rtlCol="0"/>
-          <a:lstStyle>
-            <a:lvl1pPr algn="l">
-              <a:defRPr sz="1200"/>
-            </a:lvl1pPr>
-          </a:lstStyle>
-          <a:p>
-            <a:endParaRPr/>
-          </a:p>
-        </p:txBody>
-      </p:sp>
-      <p:sp>
-        <p:nvSpPr>
-          <p:cNvPr id="3" name="Date Placeholder 2"/>
-          <p:cNvSpPr>
-            <a:spLocks noGrp="1"/>
-          </p:cNvSpPr>
-          <p:nvPr>
-            <p:ph type="dt" idx="1"/>
-          </p:nvPr>
-        </p:nvSpPr>
-        <p:spPr>
-          <a:xfrm>
-            <a:off x="5180013" y="0"/>
-            <a:ext cx="3962400" cy="342900"/>
-          </a:xfrm>
-          <a:prstGeom prst="rect">
-            <a:avLst/>
-          </a:prstGeom>
-        </p:spPr>
-        <p:txBody>
-          <a:bodyPr vert="horz" lIns="91440" tIns="45720" rIns="91440" bIns="45720" rtlCol="0"/>
-          <a:lstStyle>
-            <a:lvl1pPr algn="r">
-              <a:defRPr sz="1200"/>
-            </a:lvl1pPr>
-          </a:lstStyle>
-          <a:p>
-            <a:r>
-              <a:rPr lang="cs-CZ"/>
-              <a:t>1.7.2013</a:t>
-            </a:r>
-          </a:p>
-        </p:txBody>
-      </p:sp>
-      <p:sp>
-        <p:nvSpPr>
-          <p:cNvPr id="4" name="Slide Image Placeholder 3"/>
-          <p:cNvSpPr>
-            <a:spLocks noGrp="1" noRot="1" noChangeAspect="1"/>
-          </p:cNvSpPr>
-          <p:nvPr>
-            <p:ph type="sldImg" idx="2"/>
-          </p:nvPr>
-        </p:nvSpPr>
-        <p:spPr>
-          <a:xfrm>
-            <a:off x="2290763" y="512763"/>
-            <a:ext cx="4562475" cy="2566987"/>
-          </a:xfrm>
-          <a:prstGeom prst="rect">
-            <a:avLst/>
-          </a:prstGeom>
-          <a:noFill/>
-          <a:ln w="12700">
-            <a:solidFill>
-              <a:prstClr val="black"/>
-            </a:solidFill>
-          </a:ln>
-        </p:spPr>
-        <p:txBody>
-          <a:bodyPr vert="horz" lIns="91440" tIns="45720" rIns="91440" bIns="45720" rtlCol="0" anchor="ctr"/>
-          <a:lstStyle/>
-          <a:p>
-            <a:endParaRPr/>
-          </a:p>
-        </p:txBody>
-      </p:sp>
-      <p:sp>
-        <p:nvSpPr>
-          <p:cNvPr id="5" name="Notes Placeholder 4"/>
-          <p:cNvSpPr>
-            <a:spLocks noGrp="1"/>
-          </p:cNvSpPr>
-          <p:nvPr>
-            <p:ph type="body" sz="quarter" idx="3"/>
-          </p:nvPr>
-        </p:nvSpPr>
-        <p:spPr>
-          <a:xfrm>
-            <a:off x="914400" y="3251200"/>
-            <a:ext cx="7315200" cy="3081338"/>
-          </a:xfrm>
-          <a:prstGeom prst="rect">
-            <a:avLst/>
-          </a:prstGeom>
-        </p:spPr>
-        <p:txBody>
-          <a:bodyPr vert="horz" lIns="91440" tIns="45720" rIns="91440" bIns="45720" rtlCol="0" anchor="ctr"/>
-          <a:lstStyle>
-            <a:lvl1pPr algn="l">
-              <a:defRPr sz="1400" b="0" i="0" u="none" strike="noStrike"/>
-            </a:lvl1pPr>
-          </a:lstStyle>
-          <a:p>
-            <a:pPr indent="0" algn="l">
-              <a:lnSpc>
-                <a:spcPct val="100000"/>
-              </a:lnSpc>
-            </a:pPr>
-            <a:r>
-              <a:rPr lang="en-US" sz="1400" b="0" i="0" u="none" strike="noStrike" dirty="0">
-                <a:solidFill>
-                  <a:srgbClr val="000000"/>
-                </a:solidFill>
-              </a:rPr>
-              <a:t>第二个故事，是关于错题的，我相信不管是各位老师，还是我们家长，都特别头疼这件事。我家</a:t>
-            </a:r>
-            <a:r>
-              <a:rPr lang="zh-CN" altLang="en-US" sz="1400" b="0" i="0" u="none" strike="noStrike" dirty="0">
-                <a:solidFill>
-                  <a:srgbClr val="000000"/>
-                </a:solidFill>
-              </a:rPr>
-              <a:t>平时是妈妈带娃，</a:t>
-            </a:r>
-            <a:r>
-              <a:rPr lang="en-US" sz="1400" b="0" i="0" u="none" strike="noStrike" dirty="0">
-                <a:solidFill>
-                  <a:srgbClr val="000000"/>
-                </a:solidFill>
-              </a:rPr>
-              <a:t>娃之前数学错题，改了又错，</a:t>
-            </a:r>
-            <a:r>
-              <a:rPr lang="zh-CN" altLang="en-US" sz="1400" b="0" i="0" u="none" strike="noStrike" dirty="0">
-                <a:solidFill>
-                  <a:srgbClr val="000000"/>
-                </a:solidFill>
-              </a:rPr>
-              <a:t>妈妈</a:t>
-            </a:r>
-            <a:r>
-              <a:rPr lang="en-US" sz="1400" b="0" i="0" u="none" strike="noStrike" dirty="0">
-                <a:solidFill>
-                  <a:srgbClr val="000000"/>
-                </a:solidFill>
-              </a:rPr>
-              <a:t>给他讲题，</a:t>
-            </a:r>
-            <a:r>
-              <a:rPr lang="zh-CN" altLang="en-US" sz="1400" b="0" i="0" u="none" strike="noStrike" dirty="0">
-                <a:solidFill>
-                  <a:srgbClr val="000000"/>
-                </a:solidFill>
-              </a:rPr>
-              <a:t>经常</a:t>
-            </a:r>
-            <a:r>
-              <a:rPr lang="en-US" sz="1400" b="0" i="0" u="none" strike="noStrike" dirty="0">
-                <a:solidFill>
-                  <a:srgbClr val="000000"/>
-                </a:solidFill>
-              </a:rPr>
-              <a:t>讲着讲着就急了，好好的讲题，最后变成了亲子大战</a:t>
-            </a:r>
-            <a:r>
-              <a:rPr lang="zh-CN" altLang="en-US" sz="1400" b="0" i="0" u="none" strike="noStrike" dirty="0">
-                <a:solidFill>
-                  <a:srgbClr val="000000"/>
-                </a:solidFill>
-              </a:rPr>
-              <a:t>，真人</a:t>
-            </a:r>
-            <a:r>
-              <a:rPr lang="en-US" altLang="zh-CN" sz="1400" b="0" i="0" u="none" strike="noStrike" dirty="0">
-                <a:solidFill>
-                  <a:srgbClr val="000000"/>
-                </a:solidFill>
-              </a:rPr>
-              <a:t>PK</a:t>
-            </a:r>
-            <a:r>
-              <a:rPr lang="zh-CN" altLang="en-US" sz="1400" b="0" i="0" u="none" strike="noStrike" dirty="0">
-                <a:solidFill>
-                  <a:srgbClr val="000000"/>
-                </a:solidFill>
-              </a:rPr>
-              <a:t>，最后找我当裁判</a:t>
-            </a:r>
-            <a:r>
-              <a:rPr lang="en-US" sz="1400" b="0" i="0" u="none" strike="noStrike" dirty="0">
-                <a:solidFill>
-                  <a:srgbClr val="000000"/>
-                </a:solidFill>
-              </a:rPr>
-              <a:t>。</a:t>
-            </a:r>
-          </a:p>
-          <a:p>
-            <a:pPr indent="0" algn="l">
-              <a:lnSpc>
-                <a:spcPct val="100000"/>
-              </a:lnSpc>
-            </a:pPr>
-            <a:endParaRPr lang="en-US" sz="1400" b="0" i="0" u="none" strike="noStrike" dirty="0">
-              <a:solidFill>
-                <a:srgbClr val="000000"/>
-              </a:solidFill>
-            </a:endParaRPr>
-          </a:p>
-          <a:p>
-            <a:pPr indent="0" algn="l">
-              <a:lnSpc>
-                <a:spcPct val="100000"/>
-              </a:lnSpc>
-            </a:pPr>
-            <a:r>
-              <a:rPr lang="en-US" sz="1400" b="0" i="0" u="none" strike="noStrike" dirty="0">
-                <a:solidFill>
-                  <a:srgbClr val="000000"/>
-                </a:solidFill>
-              </a:rPr>
-              <a:t>说实话，我们家长早就忘了小学的知识点体系，根本不知道这道错题，对应的是课本里的哪个单元、哪个知识点，也不知道该怎么给孩子做巩固练习。</a:t>
-            </a:r>
-            <a:r>
-              <a:rPr lang="zh-CN" altLang="en-US" sz="1400" b="0" i="0" u="none" strike="noStrike" dirty="0">
-                <a:solidFill>
-                  <a:srgbClr val="000000"/>
-                </a:solidFill>
-              </a:rPr>
-              <a:t>比如之前给小朋友讲鸡兔同笼问题，我一上来就介绍了一堆二元一次方程的知识，结果讲了一周，真的是整整一周，他都不理解是啥意思，方法也没掌握。后来发现他脑力还没发育到能理解那么抽象概念的地步，我当时真有点沮丧，没想到还有讲不懂的情况。</a:t>
-            </a:r>
-            <a:endParaRPr lang="en-US" altLang="zh-CN" sz="1400" b="0" i="0" u="none" strike="noStrike" dirty="0">
-              <a:solidFill>
-                <a:srgbClr val="000000"/>
-              </a:solidFill>
-            </a:endParaRPr>
-          </a:p>
-          <a:p>
-            <a:pPr indent="0" algn="l">
-              <a:lnSpc>
-                <a:spcPct val="100000"/>
-              </a:lnSpc>
-            </a:pPr>
-            <a:endParaRPr lang="en-US" altLang="zh-CN" sz="1400" b="0" i="0" u="none" strike="noStrike" dirty="0">
-              <a:solidFill>
-                <a:srgbClr val="000000"/>
-              </a:solidFill>
-            </a:endParaRPr>
-          </a:p>
-          <a:p>
-            <a:pPr indent="0" algn="l">
-              <a:lnSpc>
-                <a:spcPct val="100000"/>
-              </a:lnSpc>
-            </a:pPr>
-            <a:r>
-              <a:rPr lang="en-US" sz="1400" b="0" i="0" u="none" strike="noStrike" dirty="0">
-                <a:solidFill>
-                  <a:srgbClr val="000000"/>
-                </a:solidFill>
-              </a:rPr>
-              <a:t>后来我就</a:t>
-            </a:r>
-            <a:r>
-              <a:rPr lang="zh-CN" altLang="en-US" sz="1400" b="0" i="0" u="none" strike="noStrike" dirty="0">
-                <a:solidFill>
-                  <a:srgbClr val="000000"/>
-                </a:solidFill>
-              </a:rPr>
-              <a:t>把我的困惑跟我们字节的同事说了一下，他们后来做</a:t>
-            </a:r>
-            <a:r>
-              <a:rPr lang="en-US" sz="1400" b="0" i="0" u="none" strike="noStrike" dirty="0">
-                <a:solidFill>
-                  <a:srgbClr val="000000"/>
-                </a:solidFill>
-              </a:rPr>
-              <a:t>了</a:t>
-            </a:r>
-            <a:r>
-              <a:rPr lang="zh-CN" altLang="en-US" sz="1400" b="0" i="0" u="none" strike="noStrike" dirty="0">
-                <a:solidFill>
-                  <a:srgbClr val="000000"/>
-                </a:solidFill>
-              </a:rPr>
-              <a:t>一款叫“</a:t>
-            </a:r>
-            <a:r>
-              <a:rPr lang="en-US" sz="1400" b="0" i="0" u="none" strike="noStrike" dirty="0">
-                <a:solidFill>
-                  <a:srgbClr val="000000"/>
-                </a:solidFill>
-              </a:rPr>
-              <a:t>豆包爱学</a:t>
-            </a:r>
-            <a:r>
-              <a:rPr lang="zh-CN" altLang="en-US" sz="1400" b="0" i="0" u="none" strike="noStrike" dirty="0">
-                <a:solidFill>
-                  <a:srgbClr val="000000"/>
-                </a:solidFill>
-              </a:rPr>
-              <a:t>”的</a:t>
-            </a:r>
-            <a:r>
-              <a:rPr lang="en-US" sz="1400" b="0" i="0" u="none" strike="noStrike" dirty="0">
-                <a:solidFill>
-                  <a:srgbClr val="000000"/>
-                </a:solidFill>
-              </a:rPr>
-              <a:t>APP，</a:t>
-            </a:r>
-            <a:r>
-              <a:rPr lang="zh-CN" altLang="en-US" sz="1400" b="0" i="0" u="none" strike="noStrike" dirty="0">
-                <a:solidFill>
-                  <a:srgbClr val="000000"/>
-                </a:solidFill>
-              </a:rPr>
-              <a:t>它是在豆包的基础上，强化了国内外的学习知识，它可以</a:t>
-            </a:r>
-            <a:r>
-              <a:rPr lang="en-US" sz="1400" b="0" i="0" u="none" strike="noStrike" dirty="0">
-                <a:solidFill>
-                  <a:srgbClr val="000000"/>
-                </a:solidFill>
-              </a:rPr>
-              <a:t>帮孩子做错题集，全程我只定规则，孩子自己操作，效果特别好。我们的流程特别简单：第一步，孩子必须先自己订正错题，</a:t>
-            </a:r>
-            <a:r>
-              <a:rPr lang="zh-CN" altLang="en-US" sz="1400" b="0" i="0" u="none" strike="noStrike" dirty="0">
-                <a:solidFill>
-                  <a:srgbClr val="000000"/>
-                </a:solidFill>
-              </a:rPr>
-              <a:t>订正</a:t>
-            </a:r>
-            <a:r>
-              <a:rPr lang="en-US" sz="1400" b="0" i="0" u="none" strike="noStrike" dirty="0">
-                <a:solidFill>
-                  <a:srgbClr val="000000"/>
-                </a:solidFill>
-              </a:rPr>
-              <a:t>不出来的，再拍照上传；第二步，AI会先告诉孩子，这道题对应的是课本里哪个单元的哪个知识点，再用小学孩子能听懂的大白话，一步步拆解解题步骤；</a:t>
-            </a:r>
-            <a:r>
-              <a:rPr lang="zh-CN" altLang="en-US" sz="1400" b="0" i="0" u="none" strike="noStrike" dirty="0">
-                <a:solidFill>
-                  <a:srgbClr val="000000"/>
-                </a:solidFill>
-              </a:rPr>
-              <a:t>比如鸡兔同笼，</a:t>
-            </a:r>
-            <a:r>
-              <a:rPr lang="en-US" altLang="zh-CN" sz="1400" b="0" i="0" u="none" strike="noStrike" dirty="0">
-                <a:solidFill>
-                  <a:srgbClr val="000000"/>
-                </a:solidFill>
-              </a:rPr>
-              <a:t>APP</a:t>
-            </a:r>
-            <a:r>
-              <a:rPr lang="zh-CN" altLang="en-US" sz="1400" b="0" i="0" u="none" strike="noStrike" dirty="0">
-                <a:solidFill>
-                  <a:srgbClr val="000000"/>
-                </a:solidFill>
-              </a:rPr>
-              <a:t>就会讲假设笼子里都是鸡，那么应该有多少条腿，那么现在多出来这么多腿，多出来的就是兔子的，那一只兔子多出两条腿，所以一共有多少兔子呢？这样小朋友就理解了，它还有动画，让小朋友更直观的理解；</a:t>
-            </a:r>
-            <a:r>
-              <a:rPr lang="en-US" sz="1400" b="0" i="0" u="none" strike="noStrike" dirty="0">
-                <a:solidFill>
-                  <a:srgbClr val="000000"/>
-                </a:solidFill>
-              </a:rPr>
-              <a:t>第三步，AI会帮孩子分析错因，是知识点没掌握，还是粗心看错了数，最后再给</a:t>
-            </a:r>
-            <a:r>
-              <a:rPr lang="zh-CN" altLang="en-US" sz="1400" b="0" i="0" u="none" strike="noStrike" dirty="0">
-                <a:solidFill>
-                  <a:srgbClr val="000000"/>
-                </a:solidFill>
-              </a:rPr>
-              <a:t>几</a:t>
-            </a:r>
-            <a:r>
-              <a:rPr lang="en-US" sz="1400" b="0" i="0" u="none" strike="noStrike" dirty="0">
-                <a:solidFill>
-                  <a:srgbClr val="000000"/>
-                </a:solidFill>
-              </a:rPr>
-              <a:t>道同类型的基础练习题</a:t>
-            </a:r>
-            <a:r>
-              <a:rPr lang="zh-CN" altLang="en-US" sz="1400" b="0" i="0" u="none" strike="noStrike" dirty="0">
-                <a:solidFill>
-                  <a:srgbClr val="000000"/>
-                </a:solidFill>
-              </a:rPr>
-              <a:t>和拔高题</a:t>
-            </a:r>
-            <a:r>
-              <a:rPr lang="en-US" sz="1400" b="0" i="0" u="none" strike="noStrike" dirty="0">
-                <a:solidFill>
-                  <a:srgbClr val="000000"/>
-                </a:solidFill>
-              </a:rPr>
-              <a:t>，帮孩子巩固。最让我惊喜的是，它的语音讲解特别亲切，像咱们老师上课的语气一样，完全没有机械感，孩子愿意反复听。</a:t>
-            </a:r>
-            <a:br>
-              <a:rPr lang="en-US" sz="1400" b="0" i="0" u="none" strike="noStrike" dirty="0">
-                <a:solidFill>
-                  <a:srgbClr val="000000"/>
-                </a:solidFill>
-              </a:rPr>
-            </a:br>
-            <a:br>
-              <a:rPr lang="en-US" sz="1400" b="0" i="0" u="none" strike="noStrike" dirty="0">
-                <a:solidFill>
-                  <a:srgbClr val="000000"/>
-                </a:solidFill>
-              </a:rPr>
-            </a:br>
-            <a:r>
-              <a:rPr lang="en-US" sz="1400" b="0" i="0" u="none" strike="noStrike" dirty="0">
-                <a:solidFill>
-                  <a:srgbClr val="000000"/>
-                </a:solidFill>
-              </a:rPr>
-              <a:t>用了这个方法之后，孩子的变化特别大。现在他遇到错题，不会直接扔给我，也不会偷偷抄答案，而是自己先订正，再用AI听讲解，自己整理错题本。错题对应的知识点，掌握的越来越牢，数学成绩也</a:t>
-            </a:r>
-            <a:r>
-              <a:rPr lang="zh-CN" altLang="en-US" sz="1400" b="0" i="0" u="none" strike="noStrike" dirty="0">
-                <a:solidFill>
-                  <a:srgbClr val="000000"/>
-                </a:solidFill>
-              </a:rPr>
-              <a:t>有了一些进步（最近连续得了三个</a:t>
-            </a:r>
-            <a:r>
-              <a:rPr lang="en-US" altLang="zh-CN" sz="1400" b="0" i="0" u="none" strike="noStrike" dirty="0">
-                <a:solidFill>
-                  <a:srgbClr val="000000"/>
-                </a:solidFill>
-              </a:rPr>
-              <a:t>A+</a:t>
-            </a:r>
-            <a:r>
-              <a:rPr lang="zh-CN" altLang="en-US" sz="1400" b="0" i="0" u="none" strike="noStrike" dirty="0">
-                <a:solidFill>
-                  <a:srgbClr val="000000"/>
-                </a:solidFill>
-              </a:rPr>
-              <a:t>）</a:t>
-            </a:r>
-            <a:r>
-              <a:rPr lang="en-US" sz="1400" b="0" i="0" u="none" strike="noStrike" dirty="0">
-                <a:solidFill>
-                  <a:srgbClr val="000000"/>
-                </a:solidFill>
-              </a:rPr>
-              <a:t>。最重要的是，他不再怕错题，不再怕学习里的困难，慢慢养成了自己解决问题的意识。</a:t>
-            </a:r>
-            <a:br>
-              <a:rPr lang="en-US" sz="1400" b="0" i="0" u="none" strike="noStrike" dirty="0">
-                <a:solidFill>
-                  <a:srgbClr val="000000"/>
-                </a:solidFill>
-              </a:rPr>
-            </a:br>
-            <a:br>
-              <a:rPr lang="en-US" sz="1400" b="0" i="0" u="none" strike="noStrike" dirty="0">
-                <a:solidFill>
-                  <a:srgbClr val="000000"/>
-                </a:solidFill>
-              </a:rPr>
-            </a:br>
-            <a:r>
-              <a:rPr lang="en-US" sz="1400" b="0" i="0" u="none" strike="noStrike" dirty="0">
-                <a:solidFill>
-                  <a:srgbClr val="000000"/>
-                </a:solidFill>
-              </a:rPr>
-              <a:t>其实这个故事，也给我自己带来了很大的启发。咱们</a:t>
-            </a:r>
-            <a:r>
-              <a:rPr lang="zh-CN" altLang="en-US" sz="1400" b="0" i="0" u="none" strike="noStrike" dirty="0">
-                <a:solidFill>
-                  <a:srgbClr val="000000"/>
-                </a:solidFill>
-              </a:rPr>
-              <a:t>每</a:t>
-            </a:r>
-            <a:r>
-              <a:rPr lang="en-US" sz="1400" b="0" i="0" u="none" strike="noStrike" dirty="0">
-                <a:solidFill>
-                  <a:srgbClr val="000000"/>
-                </a:solidFill>
-              </a:rPr>
-              <a:t>个班有几十个孩子，每个孩子的错题、薄弱点都不一样，各位老师很难给每个孩子，做一对一的错题讲解和巩固。而AI，完全可以成为咱们老师的“专属助教”，帮孩子做个性化的错题巩固，帮家长做日常的讲题辅导，和咱们学校的课堂教学形成完美的互补，真正实现差异化教学。</a:t>
-            </a:r>
-            <a:br>
-              <a:rPr lang="en-US" sz="1400" b="0" i="0" u="none" strike="noStrike" dirty="0">
-                <a:solidFill>
-                  <a:srgbClr val="000000"/>
-                </a:solidFill>
-              </a:rPr>
-            </a:br>
-            <a:br>
-              <a:rPr lang="en-US" sz="1400" b="0" i="0" u="none" strike="noStrike" dirty="0">
-                <a:solidFill>
-                  <a:srgbClr val="000000"/>
-                </a:solidFill>
-              </a:rPr>
-            </a:br>
-            <a:r>
-              <a:rPr lang="zh-CN" altLang="en-US" sz="1400" b="0" i="0" u="none" strike="noStrike" dirty="0">
-                <a:solidFill>
-                  <a:srgbClr val="000000"/>
-                </a:solidFill>
-              </a:rPr>
-              <a:t>启示我感觉咱们学校一直有整理错题集的传统，尤其是数学，我记得每学期的小练兵也好、大作战也好、期末的大礼包也好，其实都是总结了前几个年级同学错的多的部分，那么现在有个</a:t>
-            </a:r>
-            <a:r>
-              <a:rPr lang="en-US" altLang="zh-CN" sz="1400" b="0" i="0" u="none" strike="noStrike" dirty="0">
-                <a:solidFill>
-                  <a:srgbClr val="000000"/>
-                </a:solidFill>
-              </a:rPr>
-              <a:t>AI</a:t>
-            </a:r>
-            <a:r>
-              <a:rPr lang="zh-CN" altLang="en-US" sz="1400" b="0" i="0" u="none" strike="noStrike" dirty="0">
-                <a:solidFill>
-                  <a:srgbClr val="000000"/>
-                </a:solidFill>
-              </a:rPr>
-              <a:t>，可以针对每个人定制自己的大礼包，这种工作量放在以往是不敢想想的，但是现在有了</a:t>
-            </a:r>
-            <a:r>
-              <a:rPr lang="en-US" altLang="zh-CN" sz="1400" b="0" i="0" u="none" strike="noStrike" dirty="0">
-                <a:solidFill>
-                  <a:srgbClr val="000000"/>
-                </a:solidFill>
-              </a:rPr>
-              <a:t>AI</a:t>
-            </a:r>
-            <a:r>
-              <a:rPr lang="zh-CN" altLang="en-US" sz="1400" b="0" i="0" u="none" strike="noStrike" dirty="0">
-                <a:solidFill>
-                  <a:srgbClr val="000000"/>
-                </a:solidFill>
-              </a:rPr>
-              <a:t>，这种针对性以及质量和效率的提升，是跨越式的，也是降维打击式的。</a:t>
-            </a:r>
-            <a:endParaRPr lang="en-US" sz="1400" b="0" i="0" u="none" strike="noStrike" dirty="0">
-              <a:solidFill>
-                <a:srgbClr val="000000"/>
-              </a:solidFill>
-            </a:endParaRPr>
-          </a:p>
-        </p:txBody>
-      </p:sp>
-      <p:sp>
-        <p:nvSpPr>
-          <p:cNvPr id="6" name="Footer Placeholder 5"/>
-          <p:cNvSpPr>
-            <a:spLocks noGrp="1"/>
-          </p:cNvSpPr>
-          <p:nvPr>
-            <p:ph type="ftr" sz="quarter" idx="4"/>
-          </p:nvPr>
-        </p:nvSpPr>
-        <p:spPr>
-          <a:xfrm>
-            <a:off x="0" y="6502400"/>
-            <a:ext cx="3962400" cy="341313"/>
-          </a:xfrm>
-          <a:prstGeom prst="rect">
-            <a:avLst/>
-          </a:prstGeom>
-        </p:spPr>
-        <p:txBody>
-          <a:bodyPr vert="horz" lIns="91440" tIns="45720" rIns="91440" bIns="45720" rtlCol="0" anchor="b"/>
-          <a:lstStyle>
-            <a:lvl1pPr algn="l">
-              <a:defRPr sz="1200"/>
-            </a:lvl1pPr>
-          </a:lstStyle>
-          <a:p>
-            <a:endParaRPr/>
-          </a:p>
-        </p:txBody>
-      </p:sp>
-      <p:sp>
-        <p:nvSpPr>
-          <p:cNvPr id="7" name="Slide Number Placeholder 6"/>
-          <p:cNvSpPr>
-            <a:spLocks noGrp="1"/>
-          </p:cNvSpPr>
-          <p:nvPr>
-            <p:ph type="sldNum" sz="quarter" idx="5"/>
-          </p:nvPr>
-        </p:nvSpPr>
-        <p:spPr>
-          <a:xfrm>
-            <a:off x="5180013" y="6502400"/>
-            <a:ext cx="3962400" cy="341313"/>
-          </a:xfrm>
-          <a:prstGeom prst="rect">
-            <a:avLst/>
-          </a:prstGeom>
-        </p:spPr>
-        <p:txBody>
-          <a:bodyPr vert="horz" lIns="91440" tIns="45720" rIns="91440" bIns="45720" rtlCol="0" anchor="b"/>
-          <a:lstStyle>
-            <a:lvl1pPr algn="r">
-              <a:defRPr sz="1200"/>
-            </a:lvl1pPr>
-          </a:lstStyle>
-          <a:p>
-            <a:r>
-              <a:rPr lang="cs-CZ"/>
-              <a:t>‹#›</a:t>
-            </a:r>
-          </a:p>
-        </p:txBody>
-      </p:sp>
-    </p:spTree>
-  </p:cSld>
-  <p:clrMapOvr>
-    <a:masterClrMapping/>
-  </p:clrMapOvr>
-</p:notes>
-</file>
-
-<file path=ppt/notesSlides/notesSlide7.xml><?xml version="1.0" encoding="utf-8"?>
-<p:notes xmlns:a="http://schemas.openxmlformats.org/drawingml/2006/main" xmlns:r="http://schemas.openxmlformats.org/officeDocument/2006/relationships" xmlns:p="http://schemas.openxmlformats.org/presentationml/2006/main">
-  <p:cSld>
-    <p:spTree>
-      <p:nvGrpSpPr>
-        <p:cNvPr id="1" name=""/>
-        <p:cNvGrpSpPr/>
-        <p:nvPr/>
-      </p:nvGrpSpPr>
-      <p:grpSpPr>
-        <a:xfrm>
-          <a:off x="0" y="0"/>
-          <a:ext cx="0" cy="0"/>
-          <a:chOff x="0" y="0"/>
-          <a:chExt cx="0" cy="0"/>
-        </a:xfrm>
-      </p:grpSpPr>
-      <p:sp>
-        <p:nvSpPr>
-          <p:cNvPr id="2" name="Header Placeholder 1"/>
-          <p:cNvSpPr>
-            <a:spLocks noGrp="1"/>
-          </p:cNvSpPr>
-          <p:nvPr>
-            <p:ph type="hdr" sz="quarter"/>
-          </p:nvPr>
-        </p:nvSpPr>
-        <p:spPr>
-          <a:xfrm>
-            <a:off x="0" y="0"/>
-            <a:ext cx="3962400" cy="342900"/>
-          </a:xfrm>
-          <a:prstGeom prst="rect">
-            <a:avLst/>
-          </a:prstGeom>
-        </p:spPr>
-        <p:txBody>
-          <a:bodyPr vert="horz" lIns="91440" tIns="45720" rIns="91440" bIns="45720" rtlCol="0"/>
-          <a:lstStyle>
-            <a:lvl1pPr algn="l">
-              <a:defRPr sz="1200"/>
-            </a:lvl1pPr>
-          </a:lstStyle>
-          <a:p>
-            <a:endParaRPr/>
-          </a:p>
-        </p:txBody>
-      </p:sp>
-      <p:sp>
-        <p:nvSpPr>
-          <p:cNvPr id="3" name="Date Placeholder 2"/>
-          <p:cNvSpPr>
-            <a:spLocks noGrp="1"/>
-          </p:cNvSpPr>
-          <p:nvPr>
-            <p:ph type="dt" idx="1"/>
-          </p:nvPr>
-        </p:nvSpPr>
-        <p:spPr>
-          <a:xfrm>
-            <a:off x="5180013" y="0"/>
-            <a:ext cx="3962400" cy="342900"/>
-          </a:xfrm>
-          <a:prstGeom prst="rect">
-            <a:avLst/>
-          </a:prstGeom>
-        </p:spPr>
-        <p:txBody>
-          <a:bodyPr vert="horz" lIns="91440" tIns="45720" rIns="91440" bIns="45720" rtlCol="0"/>
-          <a:lstStyle>
-            <a:lvl1pPr algn="r">
-              <a:defRPr sz="1200"/>
-            </a:lvl1pPr>
-          </a:lstStyle>
-          <a:p>
-            <a:r>
-              <a:rPr lang="cs-CZ"/>
-              <a:t>1.7.2013</a:t>
-            </a:r>
-          </a:p>
-        </p:txBody>
-      </p:sp>
-      <p:sp>
-        <p:nvSpPr>
-          <p:cNvPr id="4" name="Slide Image Placeholder 3"/>
-          <p:cNvSpPr>
-            <a:spLocks noGrp="1" noRot="1" noChangeAspect="1"/>
-          </p:cNvSpPr>
-          <p:nvPr>
-            <p:ph type="sldImg" idx="2"/>
-          </p:nvPr>
-        </p:nvSpPr>
-        <p:spPr>
-          <a:xfrm>
-            <a:off x="2290763" y="512763"/>
-            <a:ext cx="4562475" cy="2566987"/>
-          </a:xfrm>
-          <a:prstGeom prst="rect">
-            <a:avLst/>
-          </a:prstGeom>
-          <a:noFill/>
-          <a:ln w="12700">
-            <a:solidFill>
-              <a:prstClr val="black"/>
-            </a:solidFill>
-          </a:ln>
-        </p:spPr>
-        <p:txBody>
-          <a:bodyPr vert="horz" lIns="91440" tIns="45720" rIns="91440" bIns="45720" rtlCol="0" anchor="ctr"/>
-          <a:lstStyle/>
-          <a:p>
-            <a:endParaRPr/>
-          </a:p>
-        </p:txBody>
-      </p:sp>
-      <p:sp>
-        <p:nvSpPr>
-          <p:cNvPr id="5" name="Notes Placeholder 4"/>
-          <p:cNvSpPr>
-            <a:spLocks noGrp="1"/>
-          </p:cNvSpPr>
-          <p:nvPr>
-            <p:ph type="body" sz="quarter" idx="3"/>
-          </p:nvPr>
-        </p:nvSpPr>
-        <p:spPr>
-          <a:xfrm>
-            <a:off x="914400" y="3251200"/>
-            <a:ext cx="7315200" cy="3081338"/>
-          </a:xfrm>
-          <a:prstGeom prst="rect">
-            <a:avLst/>
-          </a:prstGeom>
-        </p:spPr>
-        <p:txBody>
-          <a:bodyPr vert="horz" lIns="91440" tIns="45720" rIns="91440" bIns="45720" rtlCol="0" anchor="ctr"/>
-          <a:lstStyle>
-            <a:lvl1pPr algn="l">
-              <a:defRPr sz="1400" b="0" i="0" u="none" strike="noStrike"/>
-            </a:lvl1pPr>
-          </a:lstStyle>
-          <a:p>
-            <a:pPr indent="0" algn="l">
-              <a:lnSpc>
-                <a:spcPct val="100000"/>
-              </a:lnSpc>
-            </a:pPr>
-            <a:r>
-              <a:rPr lang="en-US" sz="1400" b="0" i="0" u="none" strike="noStrike" dirty="0">
-                <a:solidFill>
-                  <a:srgbClr val="000000"/>
-                </a:solidFill>
-              </a:rPr>
-              <a:t>第三个故事，是关于</a:t>
-            </a:r>
-            <a:r>
-              <a:rPr lang="zh-CN" altLang="en-US" sz="1400" b="0" i="0" u="none" strike="noStrike" dirty="0">
-                <a:solidFill>
-                  <a:srgbClr val="000000"/>
-                </a:solidFill>
-              </a:rPr>
-              <a:t>寓乐于教</a:t>
-            </a:r>
-            <a:r>
-              <a:rPr lang="en-US" sz="1400" b="0" i="0" u="none" strike="noStrike" dirty="0">
-                <a:solidFill>
-                  <a:srgbClr val="000000"/>
-                </a:solidFill>
-              </a:rPr>
-              <a:t>的，也是我自己觉得最有成就感的一个故事。2025年初的时候，我家娃和班里的同学，突然疯传起了所谓的“外国山海经”，天天嘴里念叨着一堆奇奇怪怪的词。我一开始以为是什么乱七八糟的网络梗，后来仔细听了听，发现都是意大利语的谐音。孩子对这些词特别感兴趣，天天挂在嘴边，却对学校要求背的英语单词，提不起半点劲，</a:t>
-            </a:r>
-            <a:r>
-              <a:rPr lang="zh-CN" altLang="en-US" sz="1400" b="0" i="0" u="none" strike="noStrike" dirty="0">
-                <a:solidFill>
-                  <a:srgbClr val="000000"/>
-                </a:solidFill>
-              </a:rPr>
-              <a:t>经常</a:t>
-            </a:r>
-            <a:r>
-              <a:rPr lang="en-US" sz="1400" b="0" i="0" u="none" strike="noStrike" dirty="0">
-                <a:solidFill>
-                  <a:srgbClr val="000000"/>
-                </a:solidFill>
-              </a:rPr>
-              <a:t>背了就忘。</a:t>
-            </a:r>
-          </a:p>
-          <a:p>
-            <a:pPr indent="0" algn="l">
-              <a:lnSpc>
-                <a:spcPct val="100000"/>
-              </a:lnSpc>
-            </a:pPr>
-            <a:r>
-              <a:rPr lang="en-US" sz="1400" b="0" i="0" u="none" strike="noStrike" dirty="0">
-                <a:solidFill>
-                  <a:srgbClr val="000000"/>
-                </a:solidFill>
-              </a:rPr>
-              <a:t>我当时没有禁止孩子念叨这些词，反而想，能不能从他感兴趣的点入手，把这个没意义的谐音梗，变成一场有意思的语言启蒙？我自己完全不懂意大利语，所以全程都是靠AI，帮我完成了整个启蒙设计。</a:t>
-            </a:r>
-          </a:p>
-          <a:p>
-            <a:pPr indent="0" algn="l">
-              <a:lnSpc>
-                <a:spcPct val="100000"/>
-              </a:lnSpc>
-            </a:pPr>
-            <a:r>
-              <a:rPr lang="en-US" sz="1400" b="0" i="0" u="none" strike="noStrike" dirty="0">
-                <a:solidFill>
-                  <a:srgbClr val="000000"/>
-                </a:solidFill>
-              </a:rPr>
-              <a:t>第一步，我让AI帮我查清楚，孩子们天天念叨的这些词，到底是什么意思，</a:t>
-            </a:r>
-            <a:r>
-              <a:rPr lang="zh-CN" altLang="en-US" sz="1400" b="0" i="0" u="none" strike="noStrike" dirty="0">
-                <a:solidFill>
-                  <a:srgbClr val="000000"/>
-                </a:solidFill>
-              </a:rPr>
-              <a:t>发现是意大利语的变形，比如</a:t>
-            </a:r>
-            <a:r>
-              <a:rPr lang="en-US" altLang="zh-CN" sz="1400" b="0" i="0" u="none" strike="noStrike" dirty="0">
-                <a:solidFill>
-                  <a:srgbClr val="000000"/>
-                </a:solidFill>
-              </a:rPr>
-              <a:t>【】</a:t>
-            </a:r>
-            <a:br>
-              <a:rPr lang="en-US" altLang="zh-CN" sz="1400" b="0" i="0" u="none" strike="noStrike" dirty="0">
-                <a:solidFill>
-                  <a:srgbClr val="000000"/>
-                </a:solidFill>
-              </a:rPr>
-            </a:br>
-            <a:br>
-              <a:rPr lang="en-US" altLang="zh-CN" sz="1400" b="0" i="0" u="none" strike="noStrike" dirty="0">
-                <a:solidFill>
-                  <a:srgbClr val="000000"/>
-                </a:solidFill>
-              </a:rPr>
-            </a:br>
-            <a:r>
-              <a:rPr lang="en-US" sz="1400" b="0" i="0" u="none" strike="noStrike" dirty="0">
-                <a:solidFill>
-                  <a:srgbClr val="000000"/>
-                </a:solidFill>
-              </a:rPr>
-              <a:t>然后归纳出意大利语的核心发音特点，还有和英语的发音区别，用孩子能懂的谐音、儿歌的形式呈现出来；</a:t>
-            </a:r>
-          </a:p>
-          <a:p>
-            <a:pPr indent="0" algn="l">
-              <a:lnSpc>
-                <a:spcPct val="100000"/>
-              </a:lnSpc>
-            </a:pPr>
-            <a:r>
-              <a:rPr lang="en-US" sz="1400" b="0" i="0" u="none" strike="noStrike" dirty="0">
-                <a:solidFill>
-                  <a:srgbClr val="000000"/>
-                </a:solidFill>
-              </a:rPr>
-              <a:t>第二步，让AI结合孩子们的“外国山海经”梗，做了一个简单的意大利语发音对照表，孩子拿着对照表，就能自己拼出他天天念叨的那些词，当时他特别有成就感；</a:t>
-            </a:r>
-          </a:p>
-          <a:p>
-            <a:pPr indent="0" algn="l">
-              <a:lnSpc>
-                <a:spcPct val="100000"/>
-              </a:lnSpc>
-            </a:pPr>
-            <a:r>
-              <a:rPr lang="en-US" sz="1400" b="0" i="0" u="none" strike="noStrike" dirty="0">
-                <a:solidFill>
-                  <a:srgbClr val="000000"/>
-                </a:solidFill>
-              </a:rPr>
-              <a:t>第三步，我还和孩子一起，找了《教父》里的经典对话，让AI帮我们拆解里面的意式英语发音特点，孩子一边看电影，一边感受意大利语的发音，热情特别高。</a:t>
-            </a:r>
-          </a:p>
-          <a:p>
-            <a:pPr indent="0" algn="l">
-              <a:lnSpc>
-                <a:spcPct val="100000"/>
-              </a:lnSpc>
-            </a:pPr>
-            <a:r>
-              <a:rPr lang="en-US" sz="1400" b="0" i="0" u="none" strike="noStrike" dirty="0">
-                <a:solidFill>
-                  <a:srgbClr val="000000"/>
-                </a:solidFill>
-              </a:rPr>
-              <a:t>就这么一场从谐音梗开始的启蒙，给孩子带来的变化，是我完全没想到的。从那之后，孩子对语言学习的兴趣一下就起来了，不再觉得背英语单词是枯燥的任务，他会主动用AI查英语单词的发音、词根，甚至会自己对比英语和意大利语的区别，英语成绩也有了很大的进步。最重要的是，他学会了从自己感兴趣的东西里学习，有了主动探索的意识。</a:t>
-            </a:r>
-          </a:p>
-          <a:p>
-            <a:pPr indent="0" algn="l">
-              <a:lnSpc>
-                <a:spcPct val="100000"/>
-              </a:lnSpc>
-            </a:pPr>
-            <a:endParaRPr lang="en-US" sz="1400" b="0" i="0" u="none" strike="noStrike" dirty="0">
-              <a:solidFill>
-                <a:srgbClr val="000000"/>
-              </a:solidFill>
-            </a:endParaRPr>
-          </a:p>
-          <a:p>
-            <a:pPr indent="0" algn="l">
-              <a:lnSpc>
-                <a:spcPct val="100000"/>
-              </a:lnSpc>
-            </a:pPr>
-            <a:r>
-              <a:rPr lang="en-US" sz="1400" b="0" i="0" u="none" strike="noStrike" dirty="0">
-                <a:solidFill>
-                  <a:srgbClr val="000000"/>
-                </a:solidFill>
-              </a:rPr>
-              <a:t>其实各位老师在日常教学里，肯定也会遇到这样的情况：孩子对课本里的内容提不起劲，却对一些课外的东西特别感兴趣。而AI，刚好可以帮我们，把课本里的知识点，和孩子感兴趣的动画、游戏、</a:t>
-            </a:r>
-            <a:r>
-              <a:rPr lang="zh-CN" altLang="en-US" sz="1400" b="0" i="0" u="none" strike="noStrike" dirty="0">
-                <a:solidFill>
-                  <a:srgbClr val="000000"/>
-                </a:solidFill>
-              </a:rPr>
-              <a:t>热</a:t>
-            </a:r>
-            <a:r>
-              <a:rPr lang="en-US" sz="1400" b="0" i="0" u="none" strike="noStrike" dirty="0">
-                <a:solidFill>
-                  <a:srgbClr val="000000"/>
-                </a:solidFill>
-              </a:rPr>
-              <a:t>梗结合起来，</a:t>
-            </a:r>
-            <a:r>
-              <a:rPr lang="zh-CN" altLang="en-US" sz="1400" b="0" i="0" u="none" strike="noStrike" dirty="0">
-                <a:solidFill>
-                  <a:srgbClr val="000000"/>
-                </a:solidFill>
-              </a:rPr>
-              <a:t>寓乐于教，</a:t>
-            </a:r>
-            <a:r>
-              <a:rPr lang="en-US" sz="1400" b="0" i="0" u="none" strike="noStrike" dirty="0">
-                <a:solidFill>
-                  <a:srgbClr val="000000"/>
-                </a:solidFill>
-              </a:rPr>
-              <a:t>让孩子在玩里学，真正激发孩子的学习内驱力，这比我们逼着孩子背知识点，效果好太多了。</a:t>
-            </a:r>
-          </a:p>
-        </p:txBody>
-      </p:sp>
-      <p:sp>
-        <p:nvSpPr>
-          <p:cNvPr id="6" name="Footer Placeholder 5"/>
-          <p:cNvSpPr>
-            <a:spLocks noGrp="1"/>
-          </p:cNvSpPr>
-          <p:nvPr>
-            <p:ph type="ftr" sz="quarter" idx="4"/>
-          </p:nvPr>
-        </p:nvSpPr>
-        <p:spPr>
-          <a:xfrm>
-            <a:off x="0" y="6502400"/>
-            <a:ext cx="3962400" cy="341313"/>
-          </a:xfrm>
-          <a:prstGeom prst="rect">
-            <a:avLst/>
-          </a:prstGeom>
-        </p:spPr>
-        <p:txBody>
-          <a:bodyPr vert="horz" lIns="91440" tIns="45720" rIns="91440" bIns="45720" rtlCol="0" anchor="b"/>
-          <a:lstStyle>
-            <a:lvl1pPr algn="l">
-              <a:defRPr sz="1200"/>
-            </a:lvl1pPr>
-          </a:lstStyle>
-          <a:p>
-            <a:endParaRPr/>
-          </a:p>
-        </p:txBody>
-      </p:sp>
-      <p:sp>
-        <p:nvSpPr>
-          <p:cNvPr id="7" name="Slide Number Placeholder 6"/>
-          <p:cNvSpPr>
-            <a:spLocks noGrp="1"/>
-          </p:cNvSpPr>
-          <p:nvPr>
-            <p:ph type="sldNum" sz="quarter" idx="5"/>
-          </p:nvPr>
-        </p:nvSpPr>
-        <p:spPr>
-          <a:xfrm>
-            <a:off x="5180013" y="6502400"/>
-            <a:ext cx="3962400" cy="341313"/>
-          </a:xfrm>
-          <a:prstGeom prst="rect">
-            <a:avLst/>
-          </a:prstGeom>
-        </p:spPr>
-        <p:txBody>
-          <a:bodyPr vert="horz" lIns="91440" tIns="45720" rIns="91440" bIns="45720" rtlCol="0" anchor="b"/>
-          <a:lstStyle>
-            <a:lvl1pPr algn="r">
-              <a:defRPr sz="1200"/>
-            </a:lvl1pPr>
-          </a:lstStyle>
-          <a:p>
-            <a:r>
-              <a:rPr lang="cs-CZ"/>
-              <a:t>‹#›</a:t>
-            </a:r>
-          </a:p>
-        </p:txBody>
-      </p:sp>
-    </p:spTree>
   </p:cSld>
   <p:clrMapOvr>
     <a:masterClrMapping/>
@@ -4235,12 +4855,44 @@
               </a:lnSpc>
             </a:pPr>
             <a:r>
+              <a:rPr lang="zh-CN" altLang="en-US" sz="1400" b="0" i="0" u="none" strike="noStrike" dirty="0">
+                <a:solidFill>
+                  <a:srgbClr val="000000"/>
+                </a:solidFill>
+              </a:rPr>
+              <a:t>那</a:t>
+            </a:r>
+            <a:r>
               <a:rPr lang="en-US" sz="1400" b="0" i="0" u="none" strike="noStrike" dirty="0">
                 <a:solidFill>
                   <a:srgbClr val="000000"/>
                 </a:solidFill>
               </a:rPr>
-              <a:t>这三个故事讲完，很多老师可能会问，那我们不管是老师，还是家长，陪孩子用AI，到底有没有什么可复制的方法？我总结了4个最核心的原则，也是我陪孩子用AI的底线，特别简单，所有人都能直接用。</a:t>
+              <a:t>很多老师可能会问，那我们不管是老师，还是家长，陪孩子用AI，到底有没有什么可复制的方法</a:t>
+            </a:r>
+            <a:r>
+              <a:rPr lang="zh-CN" altLang="en-US" sz="1400" b="0" i="0" u="none" strike="noStrike" dirty="0">
+                <a:solidFill>
+                  <a:srgbClr val="000000"/>
+                </a:solidFill>
+              </a:rPr>
+              <a:t>，我到底应该怎么用</a:t>
+            </a:r>
+            <a:r>
+              <a:rPr lang="en-US" altLang="zh-CN" sz="1400" b="0" i="0" u="none" strike="noStrike" dirty="0">
+                <a:solidFill>
+                  <a:srgbClr val="000000"/>
+                </a:solidFill>
+              </a:rPr>
+              <a:t>AI</a:t>
+            </a:r>
+            <a:r>
+              <a:rPr lang="en-US" sz="1400" b="0" i="0" u="none" strike="noStrike" dirty="0">
+                <a:solidFill>
+                  <a:srgbClr val="000000"/>
+                </a:solidFill>
+              </a:rPr>
+              <a:t>？我总结了4个最核心的原则，也是我陪孩子用AI的底线，特别简单，所有人都能直接用。</a:t>
             </a:r>
           </a:p>
           <a:p>
@@ -4286,7 +4938,7 @@
                   <a:srgbClr val="000000"/>
                 </a:solidFill>
               </a:rPr>
-              <a:t>，也不用学复杂的AI技术，你只要像教一个专属助教一样，说清楚孩子的年龄、认知水平，还有你想要的效果，AI就能帮你完成你做不了的事，放大你的能力。</a:t>
+              <a:t>，也不用学复杂的AI技术，你只要像教一个助教一样，说清楚孩子的年龄、认知水平，还有你想要的效果，AI就能帮你完成你做不了的事，放大你的能力。</a:t>
             </a:r>
           </a:p>
           <a:p>
@@ -18337,15 +18989,19 @@
 <file path=ppt/slides/slide4.xml><?xml version="1.0" encoding="utf-8"?>
 <p:sld xmlns:a="http://schemas.openxmlformats.org/drawingml/2006/main" xmlns:r="http://schemas.openxmlformats.org/officeDocument/2006/relationships" xmlns:p="http://schemas.openxmlformats.org/presentationml/2006/main">
   <p:cSld>
+    <p:bg>
+      <p:bgPr>
+        <a:solidFill>
+          <a:srgbClr val="FFFFFF">
+            <a:alpha val="100000"/>
+          </a:srgbClr>
+        </a:solidFill>
+        <a:effectLst/>
+      </p:bgPr>
+    </p:bg>
     <p:spTree>
       <p:nvGrpSpPr>
-        <p:cNvPr id="1" name="">
-          <a:extLst>
-            <a:ext uri="{FF2B5EF4-FFF2-40B4-BE49-F238E27FC236}">
-              <a16:creationId xmlns:a16="http://schemas.microsoft.com/office/drawing/2014/main" id="{7A467FDE-EE49-D3C7-BAFA-2150BA35BF6C}"/>
-            </a:ext>
-          </a:extLst>
-        </p:cNvPr>
+        <p:cNvPr id="1" name=""/>
         <p:cNvGrpSpPr/>
         <p:nvPr/>
       </p:nvGrpSpPr>
@@ -18359,13 +19015,7 @@
       </p:grpSpPr>
       <p:pic>
         <p:nvPicPr>
-          <p:cNvPr id="2" name="Picture 2">
-            <a:extLst>
-              <a:ext uri="{FF2B5EF4-FFF2-40B4-BE49-F238E27FC236}">
-                <a16:creationId xmlns:a16="http://schemas.microsoft.com/office/drawing/2014/main" id="{2B551FA0-A770-F8DD-FA39-4297E790D4FB}"/>
-              </a:ext>
-            </a:extLst>
-          </p:cNvPr>
+          <p:cNvPr id="2" name="Picture 2"/>
           <p:cNvPicPr>
             <a:picLocks noChangeAspect="1"/>
           </p:cNvPicPr>
@@ -18396,20 +19046,14 @@
       </p:pic>
       <p:sp>
         <p:nvSpPr>
-          <p:cNvPr id="3" name="AutoShape 3">
-            <a:extLst>
-              <a:ext uri="{FF2B5EF4-FFF2-40B4-BE49-F238E27FC236}">
-                <a16:creationId xmlns:a16="http://schemas.microsoft.com/office/drawing/2014/main" id="{69B8BF1A-DE5C-9495-6B88-8EE0E7229DB7}"/>
-              </a:ext>
-            </a:extLst>
-          </p:cNvPr>
+          <p:cNvPr id="3" name="AutoShape 3"/>
           <p:cNvSpPr/>
           <p:nvPr/>
         </p:nvSpPr>
         <p:spPr>
           <a:xfrm>
-            <a:off x="762000" y="762000"/>
-            <a:ext cx="10668000" cy="635000"/>
+            <a:off x="762000" y="1016000"/>
+            <a:ext cx="11569700" cy="635000"/>
           </a:xfrm>
           <a:prstGeom prst="rect">
             <a:avLst/>
@@ -18441,49 +19085,71 @@
                 <a:cs typeface="Noto Sans SC"/>
                 <a:sym typeface="Noto Sans SC"/>
               </a:rPr>
-              <a:t>AI</a:t>
-            </a:r>
-            <a:r>
-              <a:rPr lang="zh-CN" altLang="en-US" sz="3600" b="1" i="0" u="none" strike="noStrike" dirty="0">
-                <a:solidFill>
-                  <a:srgbClr val="1E3A8A"/>
-                </a:solidFill>
-                <a:latin typeface="Noto Sans SC"/>
-                <a:ea typeface="Noto Sans SC"/>
-                <a:cs typeface="Noto Sans SC"/>
-                <a:sym typeface="Noto Sans SC"/>
-              </a:rPr>
-              <a:t>与孩子的三种相处方式</a:t>
+              <a:t>案例1：AI错题集，比我讲的更清楚，孩子更爱听</a:t>
             </a:r>
             <a:endParaRPr lang="en-US" sz="1100" dirty="0"/>
           </a:p>
         </p:txBody>
       </p:sp>
+      <p:pic>
+        <p:nvPicPr>
+          <p:cNvPr id="4" name="Picture 4"/>
+          <p:cNvPicPr>
+            <a:picLocks noChangeAspect="1"/>
+          </p:cNvPicPr>
+          <p:nvPr/>
+        </p:nvPicPr>
+        <p:blipFill>
+          <a:blip r:embed="rId4"/>
+          <a:srcRect l="10000" t="10000" r="10000" b="10000"/>
+          <a:stretch>
+            <a:fillRect/>
+          </a:stretch>
+        </p:blipFill>
+        <p:spPr>
+          <a:xfrm>
+            <a:off x="762000" y="1905000"/>
+            <a:ext cx="4064000" cy="2286000"/>
+          </a:xfrm>
+          <a:prstGeom prst="roundRect">
+            <a:avLst>
+              <a:gd name="adj" fmla="val 8333"/>
+            </a:avLst>
+          </a:prstGeom>
+          <a:noFill/>
+          <a:ln w="25400" cap="flat" cmpd="sng">
+            <a:noFill/>
+            <a:prstDash val="solid"/>
+            <a:round/>
+          </a:ln>
+          <a:effectLst>
+            <a:outerShdw blurRad="127000" dist="101600" dir="2700000" algn="tl" rotWithShape="0">
+              <a:srgbClr val="1E3A8A">
+                <a:alpha val="20000"/>
+              </a:srgbClr>
+            </a:outerShdw>
+          </a:effectLst>
+        </p:spPr>
+      </p:pic>
       <p:sp>
         <p:nvSpPr>
-          <p:cNvPr id="4" name="AutoShape 4">
-            <a:extLst>
-              <a:ext uri="{FF2B5EF4-FFF2-40B4-BE49-F238E27FC236}">
-                <a16:creationId xmlns:a16="http://schemas.microsoft.com/office/drawing/2014/main" id="{EFBD4948-9562-03FE-9A77-30FC46DF3245}"/>
-              </a:ext>
-            </a:extLst>
-          </p:cNvPr>
+          <p:cNvPr id="5" name="AutoShape 5"/>
           <p:cNvSpPr/>
           <p:nvPr/>
         </p:nvSpPr>
         <p:spPr>
           <a:xfrm>
-            <a:off x="762000" y="1460500"/>
-            <a:ext cx="762000" cy="50800"/>
+            <a:off x="5207000" y="1905000"/>
+            <a:ext cx="6223000" cy="762000"/>
           </a:xfrm>
           <a:prstGeom prst="roundRect">
             <a:avLst>
-              <a:gd name="adj" fmla="val 0"/>
+              <a:gd name="adj" fmla="val 16666"/>
             </a:avLst>
           </a:prstGeom>
           <a:solidFill>
-            <a:srgbClr val="F97316">
-              <a:alpha val="100000"/>
+            <a:srgbClr val="FFFFFF">
+              <a:alpha val="85000"/>
             </a:srgbClr>
           </a:solidFill>
           <a:ln w="25400" cap="flat" cmpd="sng">
@@ -18503,31 +19169,117 @@
           </a:p>
         </p:txBody>
       </p:sp>
+      <p:pic>
+        <p:nvPicPr>
+          <p:cNvPr id="6" name="Picture 6"/>
+          <p:cNvPicPr>
+            <a:picLocks noChangeAspect="1"/>
+          </p:cNvPicPr>
+          <p:nvPr/>
+        </p:nvPicPr>
+        <p:blipFill>
+          <a:blip r:embed="rId5">
+            <a:extLst>
+              <a:ext uri="{28A0092B-C50C-407E-A947-70E740481C1C}">
+                <a14:useLocalDpi xmlns:a14="http://schemas.microsoft.com/office/drawing/2010/main" val="0"/>
+              </a:ext>
+              <a:ext uri="{96DAC541-7B7A-43D3-8B79-37D633B846F1}">
+                <asvg:svgBlip xmlns:asvg="http://schemas.microsoft.com/office/drawing/2016/SVG/main" r:embed="rId6"/>
+              </a:ext>
+            </a:extLst>
+          </a:blip>
+          <a:stretch>
+            <a:fillRect/>
+          </a:stretch>
+        </p:blipFill>
+        <p:spPr>
+          <a:xfrm>
+            <a:off x="5334000" y="2032000"/>
+            <a:ext cx="406400" cy="406400"/>
+          </a:xfrm>
+          <a:prstGeom prst="rect">
+            <a:avLst/>
+          </a:prstGeom>
+        </p:spPr>
+      </p:pic>
       <p:sp>
         <p:nvSpPr>
-          <p:cNvPr id="5" name="AutoShape 5">
-            <a:extLst>
-              <a:ext uri="{FF2B5EF4-FFF2-40B4-BE49-F238E27FC236}">
-                <a16:creationId xmlns:a16="http://schemas.microsoft.com/office/drawing/2014/main" id="{DA1A0524-ACEA-8284-0A6D-8AC9A86619A4}"/>
-              </a:ext>
-            </a:extLst>
-          </p:cNvPr>
+          <p:cNvPr id="7" name="AutoShape 7"/>
           <p:cNvSpPr/>
           <p:nvPr/>
         </p:nvSpPr>
         <p:spPr>
           <a:xfrm>
-            <a:off x="762000" y="1905000"/>
-            <a:ext cx="3302000" cy="2794000"/>
+            <a:off x="5842000" y="1905000"/>
+            <a:ext cx="5461000" cy="762000"/>
+          </a:xfrm>
+          <a:prstGeom prst="rect">
+            <a:avLst/>
+          </a:prstGeom>
+          <a:noFill/>
+          <a:ln w="12700" cap="flat" cmpd="sng">
+            <a:noFill/>
+            <a:prstDash val="solid"/>
+            <a:round/>
+          </a:ln>
+        </p:spPr>
+        <p:txBody>
+          <a:bodyPr vert="horz" wrap="square" lIns="0" tIns="0" rIns="0" bIns="0" rtlCol="0" anchor="ctr" anchorCtr="0"/>
+          <a:lstStyle/>
+          <a:p>
+            <a:pPr indent="0" algn="l">
+              <a:lnSpc>
+                <a:spcPct val="100000"/>
+              </a:lnSpc>
+              <a:defRPr/>
+            </a:pPr>
+            <a:r>
+              <a:rPr lang="en-US" sz="1800" b="1" i="0" u="none" strike="noStrike">
+                <a:solidFill>
+                  <a:srgbClr val="1E3A8A"/>
+                </a:solidFill>
+                <a:latin typeface="Noto Sans SC"/>
+                <a:ea typeface="Noto Sans SC"/>
+                <a:cs typeface="Noto Sans SC"/>
+                <a:sym typeface="Noto Sans SC"/>
+              </a:rPr>
+              <a:t>孩子痛点：</a:t>
+            </a:r>
+            <a:r>
+              <a:rPr lang="en-US" sz="1600" b="0" i="0" u="none" strike="noStrike">
+                <a:solidFill>
+                  <a:srgbClr val="374151"/>
+                </a:solidFill>
+                <a:latin typeface="Noto Sans SC"/>
+                <a:ea typeface="Noto Sans SC"/>
+                <a:cs typeface="Noto Sans SC"/>
+                <a:sym typeface="Noto Sans SC"/>
+              </a:rPr>
+              <a:t>错题反复错，家长讲题亲子矛盾频发</a:t>
+            </a:r>
+            <a:endParaRPr lang="en-US" sz="1100"/>
+          </a:p>
+        </p:txBody>
+      </p:sp>
+      <p:sp>
+        <p:nvSpPr>
+          <p:cNvPr id="8" name="AutoShape 8"/>
+          <p:cNvSpPr/>
+          <p:nvPr/>
+        </p:nvSpPr>
+        <p:spPr>
+          <a:xfrm>
+            <a:off x="5207000" y="2794000"/>
+            <a:ext cx="6223000" cy="762000"/>
           </a:xfrm>
           <a:prstGeom prst="roundRect">
             <a:avLst>
-              <a:gd name="adj" fmla="val 4545"/>
+              <a:gd name="adj" fmla="val 16666"/>
             </a:avLst>
           </a:prstGeom>
           <a:solidFill>
             <a:srgbClr val="FFFFFF">
-              <a:alpha val="92000"/>
+              <a:alpha val="85000"/>
             </a:srgbClr>
           </a:solidFill>
           <a:ln w="25400" cap="flat" cmpd="sng">
@@ -18535,13 +19287,6 @@
             <a:prstDash val="solid"/>
             <a:round/>
           </a:ln>
-          <a:effectLst>
-            <a:outerShdw blurRad="190500" dist="101600" dir="5400000" algn="tl" rotWithShape="0">
-              <a:srgbClr val="1E3A8A">
-                <a:alpha val="15000"/>
-              </a:srgbClr>
-            </a:outerShdw>
-          </a:effectLst>
         </p:spPr>
         <p:txBody>
           <a:bodyPr vert="horz" wrap="square" lIns="63500" tIns="63500" rIns="63500" bIns="63500" rtlCol="0" anchor="ctr"/>
@@ -18556,26 +19301,20 @@
       </p:sp>
       <p:pic>
         <p:nvPicPr>
-          <p:cNvPr id="6" name="Picture 6">
-            <a:extLst>
-              <a:ext uri="{FF2B5EF4-FFF2-40B4-BE49-F238E27FC236}">
-                <a16:creationId xmlns:a16="http://schemas.microsoft.com/office/drawing/2014/main" id="{B64B994F-24AF-60BD-4C65-3DAF2E871FF8}"/>
-              </a:ext>
-            </a:extLst>
-          </p:cNvPr>
+          <p:cNvPr id="9" name="Picture 9"/>
           <p:cNvPicPr>
             <a:picLocks noChangeAspect="1"/>
           </p:cNvPicPr>
           <p:nvPr/>
         </p:nvPicPr>
         <p:blipFill>
-          <a:blip r:embed="rId4">
+          <a:blip r:embed="rId7">
             <a:extLst>
               <a:ext uri="{28A0092B-C50C-407E-A947-70E740481C1C}">
                 <a14:useLocalDpi xmlns:a14="http://schemas.microsoft.com/office/drawing/2010/main" val="0"/>
               </a:ext>
               <a:ext uri="{96DAC541-7B7A-43D3-8B79-37D633B846F1}">
-                <asvg:svgBlip xmlns:asvg="http://schemas.microsoft.com/office/drawing/2016/SVG/main" r:embed="rId5"/>
+                <asvg:svgBlip xmlns:asvg="http://schemas.microsoft.com/office/drawing/2016/SVG/main" r:embed="rId8"/>
               </a:ext>
             </a:extLst>
           </a:blip>
@@ -18585,8 +19324,8 @@
         </p:blipFill>
         <p:spPr>
           <a:xfrm>
-            <a:off x="2095500" y="2159000"/>
-            <a:ext cx="635000" cy="635000"/>
+            <a:off x="5334000" y="2921000"/>
+            <a:ext cx="406400" cy="406400"/>
           </a:xfrm>
           <a:prstGeom prst="rect">
             <a:avLst/>
@@ -18595,20 +19334,14 @@
       </p:pic>
       <p:sp>
         <p:nvSpPr>
-          <p:cNvPr id="7" name="AutoShape 7">
-            <a:extLst>
-              <a:ext uri="{FF2B5EF4-FFF2-40B4-BE49-F238E27FC236}">
-                <a16:creationId xmlns:a16="http://schemas.microsoft.com/office/drawing/2014/main" id="{F73BF4ED-821F-96C8-FC50-EB1C55E3194A}"/>
-              </a:ext>
-            </a:extLst>
-          </p:cNvPr>
+          <p:cNvPr id="10" name="AutoShape 10"/>
           <p:cNvSpPr/>
           <p:nvPr/>
         </p:nvSpPr>
         <p:spPr>
           <a:xfrm>
-            <a:off x="889000" y="2921000"/>
-            <a:ext cx="3048000" cy="381000"/>
+            <a:off x="5842000" y="2794000"/>
+            <a:ext cx="5461000" cy="762000"/>
           </a:xfrm>
           <a:prstGeom prst="rect">
             <a:avLst/>
@@ -18624,14 +19357,14 @@
           <a:bodyPr vert="horz" wrap="square" lIns="0" tIns="0" rIns="0" bIns="0" rtlCol="0" anchor="ctr" anchorCtr="0"/>
           <a:lstStyle/>
           <a:p>
-            <a:pPr indent="0" algn="ctr">
-              <a:lnSpc>
-                <a:spcPct val="125000"/>
+            <a:pPr indent="0" algn="l">
+              <a:lnSpc>
+                <a:spcPct val="100000"/>
               </a:lnSpc>
               <a:defRPr/>
             </a:pPr>
             <a:r>
-              <a:rPr lang="zh-CN" altLang="en-US" sz="1800" b="1" i="0" u="none" strike="noStrike" dirty="0">
+              <a:rPr lang="en-US" sz="1800" b="1" i="0" u="none" strike="noStrike">
                 <a:solidFill>
                   <a:srgbClr val="1E3A8A"/>
                 </a:solidFill>
@@ -18640,214 +19373,43 @@
                 <a:cs typeface="Noto Sans SC"/>
                 <a:sym typeface="Noto Sans SC"/>
               </a:rPr>
-              <a:t>自动化模式</a:t>
-            </a:r>
-            <a:endParaRPr lang="en-US" sz="1100" dirty="0"/>
+              <a:t>核心思路：</a:t>
+            </a:r>
+            <a:r>
+              <a:rPr lang="en-US" sz="1600" b="0" i="0" u="none" strike="noStrike">
+                <a:solidFill>
+                  <a:srgbClr val="374151"/>
+                </a:solidFill>
+                <a:latin typeface="Noto Sans SC"/>
+                <a:ea typeface="Noto Sans SC"/>
+                <a:cs typeface="Noto Sans SC"/>
+                <a:sym typeface="Noto Sans SC"/>
+              </a:rPr>
+              <a:t>AI做个性化辅导，家长做陪伴引导</a:t>
+            </a:r>
+            <a:endParaRPr lang="en-US" sz="1100"/>
           </a:p>
         </p:txBody>
       </p:sp>
       <p:sp>
         <p:nvSpPr>
-          <p:cNvPr id="8" name="AutoShape 8">
-            <a:extLst>
-              <a:ext uri="{FF2B5EF4-FFF2-40B4-BE49-F238E27FC236}">
-                <a16:creationId xmlns:a16="http://schemas.microsoft.com/office/drawing/2014/main" id="{90D49611-73FF-2D15-E084-652E90DEEDFE}"/>
-              </a:ext>
-            </a:extLst>
-          </p:cNvPr>
+          <p:cNvPr id="11" name="AutoShape 11"/>
           <p:cNvSpPr/>
           <p:nvPr/>
         </p:nvSpPr>
         <p:spPr>
           <a:xfrm>
-            <a:off x="952500" y="3365500"/>
-            <a:ext cx="2921000" cy="1016000"/>
-          </a:xfrm>
-          <a:prstGeom prst="rect">
-            <a:avLst/>
-          </a:prstGeom>
-          <a:noFill/>
-          <a:ln w="12700" cap="flat" cmpd="sng">
-            <a:noFill/>
-            <a:prstDash val="solid"/>
-            <a:round/>
-          </a:ln>
-        </p:spPr>
-        <p:txBody>
-          <a:bodyPr vert="horz" wrap="square" lIns="0" tIns="0" rIns="0" bIns="0" rtlCol="0" anchor="ctr" anchorCtr="0"/>
-          <a:lstStyle/>
-          <a:p>
-            <a:pPr indent="0" algn="just">
-              <a:lnSpc>
-                <a:spcPct val="108333"/>
-              </a:lnSpc>
-              <a:defRPr/>
-            </a:pPr>
-            <a:r>
-              <a:rPr lang="zh-CN" altLang="en-US" sz="1400" b="0" i="0" u="none" strike="noStrike" dirty="0">
-                <a:solidFill>
-                  <a:srgbClr val="374151"/>
-                </a:solidFill>
-                <a:latin typeface="Noto Sans SC"/>
-                <a:ea typeface="Noto Sans SC"/>
-                <a:cs typeface="Noto Sans SC"/>
-                <a:sym typeface="Noto Sans SC"/>
-              </a:rPr>
-              <a:t>**工具模式</a:t>
-            </a:r>
-            <a:r>
-              <a:rPr lang="en-US" sz="1400" b="0" i="0" u="none" strike="noStrike" dirty="0">
-                <a:solidFill>
-                  <a:srgbClr val="374151"/>
-                </a:solidFill>
-                <a:latin typeface="Noto Sans SC"/>
-                <a:ea typeface="Noto Sans SC"/>
-                <a:cs typeface="Noto Sans SC"/>
-                <a:sym typeface="Noto Sans SC"/>
-              </a:rPr>
-              <a:t>AI </a:t>
-            </a:r>
-            <a:r>
-              <a:rPr lang="zh-CN" altLang="en-US" sz="1400" b="0" i="0" u="none" strike="noStrike" dirty="0">
-                <a:solidFill>
-                  <a:srgbClr val="374151"/>
-                </a:solidFill>
-                <a:latin typeface="Noto Sans SC"/>
-                <a:ea typeface="Noto Sans SC"/>
-                <a:cs typeface="Noto Sans SC"/>
-                <a:sym typeface="Noto Sans SC"/>
-              </a:rPr>
-              <a:t>帮我做**</a:t>
-            </a:r>
-          </a:p>
-          <a:p>
-            <a:pPr indent="0" algn="just">
-              <a:lnSpc>
-                <a:spcPct val="108333"/>
-              </a:lnSpc>
-              <a:defRPr/>
-            </a:pPr>
-            <a:r>
-              <a:rPr lang="en-US" sz="1400" b="0" i="0" u="none" strike="noStrike" dirty="0">
-                <a:solidFill>
-                  <a:srgbClr val="374151"/>
-                </a:solidFill>
-                <a:latin typeface="Noto Sans SC"/>
-                <a:ea typeface="Noto Sans SC"/>
-                <a:cs typeface="Noto Sans SC"/>
-                <a:sym typeface="Noto Sans SC"/>
-              </a:rPr>
-              <a:t>AI </a:t>
-            </a:r>
-            <a:r>
-              <a:rPr lang="zh-CN" altLang="en-US" sz="1400" b="0" i="0" u="none" strike="noStrike" dirty="0">
-                <a:solidFill>
-                  <a:srgbClr val="374151"/>
-                </a:solidFill>
-                <a:latin typeface="Noto Sans SC"/>
-                <a:ea typeface="Noto Sans SC"/>
-                <a:cs typeface="Noto Sans SC"/>
-                <a:sym typeface="Noto Sans SC"/>
-              </a:rPr>
-              <a:t>完成机械重复工作，家长来判断和审核结果孩子把精力放在理解和思考上</a:t>
-            </a:r>
-          </a:p>
-          <a:p>
-            <a:pPr indent="0" algn="just">
-              <a:lnSpc>
-                <a:spcPct val="108333"/>
-              </a:lnSpc>
-              <a:defRPr/>
-            </a:pPr>
-            <a:r>
-              <a:rPr lang="zh-CN" altLang="en-US" sz="1400" b="0" i="0" u="none" strike="noStrike" dirty="0">
-                <a:solidFill>
-                  <a:srgbClr val="374151"/>
-                </a:solidFill>
-                <a:latin typeface="Noto Sans SC"/>
-                <a:ea typeface="Noto Sans SC"/>
-                <a:cs typeface="Noto Sans SC"/>
-                <a:sym typeface="Noto Sans SC"/>
-              </a:rPr>
-              <a:t>详见案例</a:t>
-            </a:r>
-            <a:r>
-              <a:rPr lang="en-US" altLang="zh-CN" sz="1400" b="0" i="0" u="none" strike="noStrike" dirty="0">
-                <a:solidFill>
-                  <a:srgbClr val="374151"/>
-                </a:solidFill>
-                <a:latin typeface="Noto Sans SC"/>
-                <a:ea typeface="Noto Sans SC"/>
-                <a:cs typeface="Noto Sans SC"/>
-                <a:sym typeface="Noto Sans SC"/>
-              </a:rPr>
-              <a:t>1</a:t>
-            </a:r>
-            <a:r>
-              <a:rPr lang="zh-CN" altLang="en-US" sz="1400" b="0" i="0" u="none" strike="noStrike" dirty="0">
-                <a:solidFill>
-                  <a:srgbClr val="374151"/>
-                </a:solidFill>
-                <a:latin typeface="Noto Sans SC"/>
-                <a:ea typeface="Noto Sans SC"/>
-                <a:cs typeface="Noto Sans SC"/>
-                <a:sym typeface="Noto Sans SC"/>
-              </a:rPr>
-              <a:t>：</a:t>
-            </a:r>
-            <a:r>
-              <a:rPr lang="en-US" sz="1400" b="0" i="0" u="none" strike="noStrike" dirty="0">
-                <a:solidFill>
-                  <a:srgbClr val="374151"/>
-                </a:solidFill>
-                <a:latin typeface="Noto Sans SC"/>
-                <a:ea typeface="Noto Sans SC"/>
-                <a:cs typeface="Noto Sans SC"/>
-                <a:sym typeface="Noto Sans SC"/>
-              </a:rPr>
-              <a:t>AI </a:t>
-            </a:r>
-            <a:r>
-              <a:rPr lang="zh-CN" altLang="en-US" sz="1400" b="0" i="0" u="none" strike="noStrike" dirty="0">
-                <a:solidFill>
-                  <a:srgbClr val="374151"/>
-                </a:solidFill>
-                <a:latin typeface="Noto Sans SC"/>
-                <a:ea typeface="Noto Sans SC"/>
-                <a:cs typeface="Noto Sans SC"/>
-                <a:sym typeface="Noto Sans SC"/>
-              </a:rPr>
-              <a:t>错题讲解</a:t>
-            </a:r>
-            <a:endParaRPr lang="en-US" sz="1100" dirty="0"/>
-          </a:p>
-        </p:txBody>
-      </p:sp>
-      <p:sp>
-        <p:nvSpPr>
-          <p:cNvPr id="9" name="AutoShape 9">
-            <a:extLst>
-              <a:ext uri="{FF2B5EF4-FFF2-40B4-BE49-F238E27FC236}">
-                <a16:creationId xmlns:a16="http://schemas.microsoft.com/office/drawing/2014/main" id="{007E4343-471F-6745-7C02-B414AADF385A}"/>
-              </a:ext>
-            </a:extLst>
-          </p:cNvPr>
-          <p:cNvSpPr/>
-          <p:nvPr/>
-        </p:nvSpPr>
-        <p:spPr>
-          <a:xfrm>
-            <a:off x="4445000" y="1905000"/>
-            <a:ext cx="3302000" cy="2794000"/>
+            <a:off x="5207000" y="3683000"/>
+            <a:ext cx="6223000" cy="889000"/>
           </a:xfrm>
           <a:prstGeom prst="roundRect">
             <a:avLst>
-              <a:gd name="adj" fmla="val 4545"/>
+              <a:gd name="adj" fmla="val 14285"/>
             </a:avLst>
           </a:prstGeom>
           <a:solidFill>
             <a:srgbClr val="FFFFFF">
-              <a:alpha val="92000"/>
+              <a:alpha val="85000"/>
             </a:srgbClr>
           </a:solidFill>
           <a:ln w="25400" cap="flat" cmpd="sng">
@@ -18855,13 +19417,6 @@
             <a:prstDash val="solid"/>
             <a:round/>
           </a:ln>
-          <a:effectLst>
-            <a:outerShdw blurRad="190500" dist="101600" dir="5400000" algn="tl" rotWithShape="0">
-              <a:srgbClr val="1E3A8A">
-                <a:alpha val="15000"/>
-              </a:srgbClr>
-            </a:outerShdw>
-          </a:effectLst>
         </p:spPr>
         <p:txBody>
           <a:bodyPr vert="horz" wrap="square" lIns="63500" tIns="63500" rIns="63500" bIns="63500" rtlCol="0" anchor="ctr"/>
@@ -18876,26 +19431,20 @@
       </p:sp>
       <p:pic>
         <p:nvPicPr>
-          <p:cNvPr id="10" name="Picture 10">
-            <a:extLst>
-              <a:ext uri="{FF2B5EF4-FFF2-40B4-BE49-F238E27FC236}">
-                <a16:creationId xmlns:a16="http://schemas.microsoft.com/office/drawing/2014/main" id="{D5C6AE22-8E65-F268-61CB-58F626492970}"/>
-              </a:ext>
-            </a:extLst>
-          </p:cNvPr>
+          <p:cNvPr id="12" name="Picture 12"/>
           <p:cNvPicPr>
             <a:picLocks noChangeAspect="1"/>
           </p:cNvPicPr>
           <p:nvPr/>
         </p:nvPicPr>
         <p:blipFill>
-          <a:blip r:embed="rId6">
+          <a:blip r:embed="rId9">
             <a:extLst>
               <a:ext uri="{28A0092B-C50C-407E-A947-70E740481C1C}">
                 <a14:useLocalDpi xmlns:a14="http://schemas.microsoft.com/office/drawing/2010/main" val="0"/>
               </a:ext>
               <a:ext uri="{96DAC541-7B7A-43D3-8B79-37D633B846F1}">
-                <asvg:svgBlip xmlns:asvg="http://schemas.microsoft.com/office/drawing/2016/SVG/main" r:embed="rId7"/>
+                <asvg:svgBlip xmlns:asvg="http://schemas.microsoft.com/office/drawing/2016/SVG/main" r:embed="rId10"/>
               </a:ext>
             </a:extLst>
           </a:blip>
@@ -18905,8 +19454,8 @@
         </p:blipFill>
         <p:spPr>
           <a:xfrm>
-            <a:off x="5778500" y="2159000"/>
-            <a:ext cx="635000" cy="635000"/>
+            <a:off x="5334000" y="3873500"/>
+            <a:ext cx="406400" cy="406400"/>
           </a:xfrm>
           <a:prstGeom prst="rect">
             <a:avLst/>
@@ -18915,20 +19464,14 @@
       </p:pic>
       <p:sp>
         <p:nvSpPr>
-          <p:cNvPr id="11" name="AutoShape 11">
-            <a:extLst>
-              <a:ext uri="{FF2B5EF4-FFF2-40B4-BE49-F238E27FC236}">
-                <a16:creationId xmlns:a16="http://schemas.microsoft.com/office/drawing/2014/main" id="{022094FE-9A8F-CABF-B78F-FC11F5B11020}"/>
-              </a:ext>
-            </a:extLst>
-          </p:cNvPr>
+          <p:cNvPr id="13" name="AutoShape 13"/>
           <p:cNvSpPr/>
           <p:nvPr/>
         </p:nvSpPr>
         <p:spPr>
           <a:xfrm>
-            <a:off x="4572000" y="2921000"/>
-            <a:ext cx="3048000" cy="381000"/>
+            <a:off x="5842000" y="3683000"/>
+            <a:ext cx="5461000" cy="889000"/>
           </a:xfrm>
           <a:prstGeom prst="rect">
             <a:avLst/>
@@ -18944,9 +19487,9 @@
           <a:bodyPr vert="horz" wrap="square" lIns="0" tIns="0" rIns="0" bIns="0" rtlCol="0" anchor="ctr" anchorCtr="0"/>
           <a:lstStyle/>
           <a:p>
-            <a:pPr indent="0" algn="ctr">
-              <a:lnSpc>
-                <a:spcPct val="125000"/>
+            <a:pPr indent="0" algn="l">
+              <a:lnSpc>
+                <a:spcPct val="100000"/>
               </a:lnSpc>
               <a:defRPr/>
             </a:pPr>
@@ -18960,7 +19503,19 @@
                 <a:cs typeface="Noto Sans SC"/>
                 <a:sym typeface="Noto Sans SC"/>
               </a:rPr>
-              <a:t>AI是成长的「脚手架」</a:t>
+              <a:t>AI作用：</a:t>
+            </a:r>
+            <a:r>
+              <a:rPr lang="en-US" sz="1600" b="0" i="0" u="none" strike="noStrike">
+                <a:solidFill>
+                  <a:srgbClr val="374151"/>
+                </a:solidFill>
+                <a:latin typeface="Noto Sans SC"/>
+                <a:ea typeface="Noto Sans SC"/>
+                <a:cs typeface="Noto Sans SC"/>
+                <a:sym typeface="Noto Sans SC"/>
+              </a:rPr>
+              <a:t>知识点拆解+错因分析+同类题巩固+拟人语音讲解</a:t>
             </a:r>
             <a:endParaRPr lang="en-US" sz="1100"/>
           </a:p>
@@ -18968,82 +19523,23 @@
       </p:sp>
       <p:sp>
         <p:nvSpPr>
-          <p:cNvPr id="12" name="AutoShape 12">
-            <a:extLst>
-              <a:ext uri="{FF2B5EF4-FFF2-40B4-BE49-F238E27FC236}">
-                <a16:creationId xmlns:a16="http://schemas.microsoft.com/office/drawing/2014/main" id="{58CD7872-194F-4D31-CD0F-B0A9B219BDCB}"/>
-              </a:ext>
-            </a:extLst>
-          </p:cNvPr>
+          <p:cNvPr id="14" name="AutoShape 14"/>
           <p:cNvSpPr/>
           <p:nvPr/>
         </p:nvSpPr>
         <p:spPr>
           <a:xfrm>
-            <a:off x="4635500" y="3365500"/>
-            <a:ext cx="2921000" cy="1016000"/>
-          </a:xfrm>
-          <a:prstGeom prst="rect">
-            <a:avLst/>
-          </a:prstGeom>
-          <a:noFill/>
-          <a:ln w="12700" cap="flat" cmpd="sng">
-            <a:noFill/>
-            <a:prstDash val="solid"/>
-            <a:round/>
-          </a:ln>
-        </p:spPr>
-        <p:txBody>
-          <a:bodyPr vert="horz" wrap="square" lIns="0" tIns="0" rIns="0" bIns="0" rtlCol="0" anchor="ctr" anchorCtr="0"/>
-          <a:lstStyle/>
-          <a:p>
-            <a:pPr indent="0" algn="just">
-              <a:lnSpc>
-                <a:spcPct val="108333"/>
-              </a:lnSpc>
-              <a:defRPr/>
-            </a:pPr>
-            <a:r>
-              <a:rPr lang="en-US" sz="1400" b="0" i="0" u="none" strike="noStrike">
-                <a:solidFill>
-                  <a:srgbClr val="374151"/>
-                </a:solidFill>
-                <a:latin typeface="Noto Sans SC"/>
-                <a:ea typeface="Noto Sans SC"/>
-                <a:cs typeface="Noto Sans SC"/>
-                <a:sym typeface="Noto Sans SC"/>
-              </a:rPr>
-              <a:t>AI不是万能神器，而是帮我们减负、从机械工作中解放出来，专注于引导孩子成长的辅助工具。</a:t>
-            </a:r>
-            <a:endParaRPr lang="en-US" sz="1100"/>
-          </a:p>
-        </p:txBody>
-      </p:sp>
-      <p:sp>
-        <p:nvSpPr>
-          <p:cNvPr id="13" name="AutoShape 13">
-            <a:extLst>
-              <a:ext uri="{FF2B5EF4-FFF2-40B4-BE49-F238E27FC236}">
-                <a16:creationId xmlns:a16="http://schemas.microsoft.com/office/drawing/2014/main" id="{E33320E0-4DBE-F61E-4873-AD69C2A417AB}"/>
-              </a:ext>
-            </a:extLst>
-          </p:cNvPr>
-          <p:cNvSpPr/>
-          <p:nvPr/>
-        </p:nvSpPr>
-        <p:spPr>
-          <a:xfrm>
-            <a:off x="8128000" y="1905000"/>
-            <a:ext cx="3302000" cy="2794000"/>
+            <a:off x="5207000" y="4699000"/>
+            <a:ext cx="6223000" cy="762000"/>
           </a:xfrm>
           <a:prstGeom prst="roundRect">
             <a:avLst>
-              <a:gd name="adj" fmla="val 4545"/>
+              <a:gd name="adj" fmla="val 16666"/>
             </a:avLst>
           </a:prstGeom>
           <a:solidFill>
             <a:srgbClr val="FFFFFF">
-              <a:alpha val="92000"/>
+              <a:alpha val="85000"/>
             </a:srgbClr>
           </a:solidFill>
           <a:ln w="25400" cap="flat" cmpd="sng">
@@ -19051,13 +19547,6 @@
             <a:prstDash val="solid"/>
             <a:round/>
           </a:ln>
-          <a:effectLst>
-            <a:outerShdw blurRad="190500" dist="101600" dir="5400000" algn="tl" rotWithShape="0">
-              <a:srgbClr val="1E3A8A">
-                <a:alpha val="15000"/>
-              </a:srgbClr>
-            </a:outerShdw>
-          </a:effectLst>
         </p:spPr>
         <p:txBody>
           <a:bodyPr vert="horz" wrap="square" lIns="63500" tIns="63500" rIns="63500" bIns="63500" rtlCol="0" anchor="ctr"/>
@@ -19072,26 +19561,20 @@
       </p:sp>
       <p:pic>
         <p:nvPicPr>
-          <p:cNvPr id="14" name="Picture 14">
-            <a:extLst>
-              <a:ext uri="{FF2B5EF4-FFF2-40B4-BE49-F238E27FC236}">
-                <a16:creationId xmlns:a16="http://schemas.microsoft.com/office/drawing/2014/main" id="{EE357911-F28E-4789-E932-33937F993712}"/>
-              </a:ext>
-            </a:extLst>
-          </p:cNvPr>
+          <p:cNvPr id="15" name="Picture 15"/>
           <p:cNvPicPr>
             <a:picLocks noChangeAspect="1"/>
           </p:cNvPicPr>
           <p:nvPr/>
         </p:nvPicPr>
         <p:blipFill>
-          <a:blip r:embed="rId8">
+          <a:blip r:embed="rId11">
             <a:extLst>
               <a:ext uri="{28A0092B-C50C-407E-A947-70E740481C1C}">
                 <a14:useLocalDpi xmlns:a14="http://schemas.microsoft.com/office/drawing/2010/main" val="0"/>
               </a:ext>
               <a:ext uri="{96DAC541-7B7A-43D3-8B79-37D633B846F1}">
-                <asvg:svgBlip xmlns:asvg="http://schemas.microsoft.com/office/drawing/2016/SVG/main" r:embed="rId9"/>
+                <asvg:svgBlip xmlns:asvg="http://schemas.microsoft.com/office/drawing/2016/SVG/main" r:embed="rId12"/>
               </a:ext>
             </a:extLst>
           </a:blip>
@@ -19101,8 +19584,8 @@
         </p:blipFill>
         <p:spPr>
           <a:xfrm>
-            <a:off x="9461500" y="2159000"/>
-            <a:ext cx="635000" cy="635000"/>
+            <a:off x="5334000" y="4826000"/>
+            <a:ext cx="406400" cy="406400"/>
           </a:xfrm>
           <a:prstGeom prst="rect">
             <a:avLst/>
@@ -19111,20 +19594,14 @@
       </p:pic>
       <p:sp>
         <p:nvSpPr>
-          <p:cNvPr id="15" name="AutoShape 15">
-            <a:extLst>
-              <a:ext uri="{FF2B5EF4-FFF2-40B4-BE49-F238E27FC236}">
-                <a16:creationId xmlns:a16="http://schemas.microsoft.com/office/drawing/2014/main" id="{C80EB6D5-5034-BDB0-5A38-2CBA2797EB54}"/>
-              </a:ext>
-            </a:extLst>
-          </p:cNvPr>
+          <p:cNvPr id="16" name="AutoShape 16"/>
           <p:cNvSpPr/>
           <p:nvPr/>
         </p:nvSpPr>
         <p:spPr>
           <a:xfrm>
-            <a:off x="8255000" y="2921000"/>
-            <a:ext cx="3048000" cy="381000"/>
+            <a:off x="5842000" y="4699000"/>
+            <a:ext cx="5461000" cy="762000"/>
           </a:xfrm>
           <a:prstGeom prst="rect">
             <a:avLst/>
@@ -19140,9 +19617,9 @@
           <a:bodyPr vert="horz" wrap="square" lIns="0" tIns="0" rIns="0" bIns="0" rtlCol="0" anchor="ctr" anchorCtr="0"/>
           <a:lstStyle/>
           <a:p>
-            <a:pPr indent="0" algn="ctr">
-              <a:lnSpc>
-                <a:spcPct val="125000"/>
+            <a:pPr indent="0" algn="l">
+              <a:lnSpc>
+                <a:spcPct val="100000"/>
               </a:lnSpc>
               <a:defRPr/>
             </a:pPr>
@@ -19156,51 +19633,10 @@
                 <a:cs typeface="Noto Sans SC"/>
                 <a:sym typeface="Noto Sans SC"/>
               </a:rPr>
-              <a:t>家校同频，事半功倍</a:t>
-            </a:r>
-            <a:endParaRPr lang="en-US" sz="1100"/>
-          </a:p>
-        </p:txBody>
-      </p:sp>
-      <p:sp>
-        <p:nvSpPr>
-          <p:cNvPr id="16" name="AutoShape 16">
-            <a:extLst>
-              <a:ext uri="{FF2B5EF4-FFF2-40B4-BE49-F238E27FC236}">
-                <a16:creationId xmlns:a16="http://schemas.microsoft.com/office/drawing/2014/main" id="{E3226499-0072-6D36-DF35-2912D0CE127D}"/>
-              </a:ext>
-            </a:extLst>
-          </p:cNvPr>
-          <p:cNvSpPr/>
-          <p:nvPr/>
-        </p:nvSpPr>
-        <p:spPr>
-          <a:xfrm>
-            <a:off x="8318500" y="3365500"/>
-            <a:ext cx="2921000" cy="1016000"/>
-          </a:xfrm>
-          <a:prstGeom prst="rect">
-            <a:avLst/>
-          </a:prstGeom>
-          <a:noFill/>
-          <a:ln w="12700" cap="flat" cmpd="sng">
-            <a:noFill/>
-            <a:prstDash val="solid"/>
-            <a:round/>
-          </a:ln>
-        </p:spPr>
-        <p:txBody>
-          <a:bodyPr vert="horz" wrap="square" lIns="0" tIns="0" rIns="0" bIns="0" rtlCol="0" anchor="ctr" anchorCtr="0"/>
-          <a:lstStyle/>
-          <a:p>
-            <a:pPr indent="0" algn="just">
-              <a:lnSpc>
-                <a:spcPct val="108333"/>
-              </a:lnSpc>
-              <a:defRPr/>
-            </a:pPr>
-            <a:r>
-              <a:rPr lang="en-US" sz="1400" b="0" i="0" u="none" strike="noStrike">
+              <a:t>成长变化：</a:t>
+            </a:r>
+            <a:r>
+              <a:rPr lang="en-US" sz="1600" b="0" i="0" u="none" strike="noStrike">
                 <a:solidFill>
                   <a:srgbClr val="374151"/>
                 </a:solidFill>
@@ -19209,18 +19645,13 @@
                 <a:cs typeface="Noto Sans SC"/>
                 <a:sym typeface="Noto Sans SC"/>
               </a:rPr>
-              <a:t>堵不如疏。只有家校目标一致，才能教会孩子正确使用AI，让它成为学习帮手而非抄作业的工具。</a:t>
+              <a:t>不怕错题，养成自主订正、主动解决问题的习惯</a:t>
             </a:r>
             <a:endParaRPr lang="en-US" sz="1100"/>
           </a:p>
         </p:txBody>
       </p:sp>
     </p:spTree>
-    <p:extLst>
-      <p:ext uri="{BB962C8B-B14F-4D97-AF65-F5344CB8AC3E}">
-        <p14:creationId xmlns:p14="http://schemas.microsoft.com/office/powerpoint/2010/main" val="3705019064"/>
-      </p:ext>
-    </p:extLst>
   </p:cSld>
   <p:clrMapOvr>
     <a:masterClrMapping/>
@@ -19356,7 +19787,7 @@
               <a:defRPr/>
             </a:pPr>
             <a:r>
-              <a:rPr lang="en-US" sz="3600" b="1" i="0" u="none" strike="noStrike">
+              <a:rPr lang="en-US" sz="3600" b="1" i="0" u="none" strike="noStrike" dirty="0">
                 <a:solidFill>
                   <a:srgbClr val="1E3A8A"/>
                 </a:solidFill>
@@ -19365,9 +19796,9 @@
                 <a:cs typeface="Noto Sans SC"/>
                 <a:sym typeface="Noto Sans SC"/>
               </a:rPr>
-              <a:t>案例1：用「时间小火车」，治好孩子的拖延症</a:t>
-            </a:r>
-            <a:endParaRPr lang="en-US" sz="1100"/>
+              <a:t>案例2：用「时间小火车」，治好孩子的拖延症</a:t>
+            </a:r>
+            <a:endParaRPr lang="en-US" sz="1100" dirty="0"/>
           </a:p>
         </p:txBody>
       </p:sp>
@@ -20116,679 +20547,6 @@
         </p:nvSpPr>
         <p:spPr>
           <a:xfrm>
-            <a:off x="762000" y="1016000"/>
-            <a:ext cx="11569700" cy="635000"/>
-          </a:xfrm>
-          <a:prstGeom prst="rect">
-            <a:avLst/>
-          </a:prstGeom>
-          <a:noFill/>
-          <a:ln w="12700" cap="flat" cmpd="sng">
-            <a:noFill/>
-            <a:prstDash val="solid"/>
-            <a:round/>
-          </a:ln>
-        </p:spPr>
-        <p:txBody>
-          <a:bodyPr vert="horz" wrap="none" lIns="0" tIns="0" rIns="0" bIns="0" rtlCol="0" anchor="ctr" anchorCtr="0"/>
-          <a:lstStyle/>
-          <a:p>
-            <a:pPr indent="0" algn="l">
-              <a:lnSpc>
-                <a:spcPct val="125000"/>
-              </a:lnSpc>
-              <a:defRPr/>
-            </a:pPr>
-            <a:r>
-              <a:rPr lang="en-US" sz="3600" b="1" i="0" u="none" strike="noStrike">
-                <a:solidFill>
-                  <a:srgbClr val="1E3A8A"/>
-                </a:solidFill>
-                <a:latin typeface="Noto Sans SC"/>
-                <a:ea typeface="Noto Sans SC"/>
-                <a:cs typeface="Noto Sans SC"/>
-                <a:sym typeface="Noto Sans SC"/>
-              </a:rPr>
-              <a:t>案例2：AI错题集，比我讲的更清楚，孩子更爱听</a:t>
-            </a:r>
-            <a:endParaRPr lang="en-US" sz="1100"/>
-          </a:p>
-        </p:txBody>
-      </p:sp>
-      <p:pic>
-        <p:nvPicPr>
-          <p:cNvPr id="4" name="Picture 4"/>
-          <p:cNvPicPr>
-            <a:picLocks noChangeAspect="1"/>
-          </p:cNvPicPr>
-          <p:nvPr/>
-        </p:nvPicPr>
-        <p:blipFill>
-          <a:blip r:embed="rId4"/>
-          <a:srcRect l="10000" t="10000" r="10000" b="10000"/>
-          <a:stretch>
-            <a:fillRect/>
-          </a:stretch>
-        </p:blipFill>
-        <p:spPr>
-          <a:xfrm>
-            <a:off x="762000" y="1905000"/>
-            <a:ext cx="4064000" cy="2286000"/>
-          </a:xfrm>
-          <a:prstGeom prst="roundRect">
-            <a:avLst>
-              <a:gd name="adj" fmla="val 8333"/>
-            </a:avLst>
-          </a:prstGeom>
-          <a:noFill/>
-          <a:ln w="25400" cap="flat" cmpd="sng">
-            <a:noFill/>
-            <a:prstDash val="solid"/>
-            <a:round/>
-          </a:ln>
-          <a:effectLst>
-            <a:outerShdw blurRad="127000" dist="101600" dir="2700000" algn="tl" rotWithShape="0">
-              <a:srgbClr val="1E3A8A">
-                <a:alpha val="20000"/>
-              </a:srgbClr>
-            </a:outerShdw>
-          </a:effectLst>
-        </p:spPr>
-      </p:pic>
-      <p:sp>
-        <p:nvSpPr>
-          <p:cNvPr id="5" name="AutoShape 5"/>
-          <p:cNvSpPr/>
-          <p:nvPr/>
-        </p:nvSpPr>
-        <p:spPr>
-          <a:xfrm>
-            <a:off x="5207000" y="1905000"/>
-            <a:ext cx="6223000" cy="762000"/>
-          </a:xfrm>
-          <a:prstGeom prst="roundRect">
-            <a:avLst>
-              <a:gd name="adj" fmla="val 16666"/>
-            </a:avLst>
-          </a:prstGeom>
-          <a:solidFill>
-            <a:srgbClr val="FFFFFF">
-              <a:alpha val="85000"/>
-            </a:srgbClr>
-          </a:solidFill>
-          <a:ln w="25400" cap="flat" cmpd="sng">
-            <a:noFill/>
-            <a:prstDash val="solid"/>
-            <a:round/>
-          </a:ln>
-        </p:spPr>
-        <p:txBody>
-          <a:bodyPr vert="horz" wrap="square" lIns="63500" tIns="63500" rIns="63500" bIns="63500" rtlCol="0" anchor="ctr"/>
-          <a:lstStyle/>
-          <a:p>
-            <a:pPr algn="ctr">
-              <a:defRPr/>
-            </a:pPr>
-            <a:endParaRPr/>
-          </a:p>
-        </p:txBody>
-      </p:sp>
-      <p:pic>
-        <p:nvPicPr>
-          <p:cNvPr id="6" name="Picture 6"/>
-          <p:cNvPicPr>
-            <a:picLocks noChangeAspect="1"/>
-          </p:cNvPicPr>
-          <p:nvPr/>
-        </p:nvPicPr>
-        <p:blipFill>
-          <a:blip r:embed="rId5">
-            <a:extLst>
-              <a:ext uri="{28A0092B-C50C-407E-A947-70E740481C1C}">
-                <a14:useLocalDpi xmlns:a14="http://schemas.microsoft.com/office/drawing/2010/main" val="0"/>
-              </a:ext>
-              <a:ext uri="{96DAC541-7B7A-43D3-8B79-37D633B846F1}">
-                <asvg:svgBlip xmlns:asvg="http://schemas.microsoft.com/office/drawing/2016/SVG/main" r:embed="rId6"/>
-              </a:ext>
-            </a:extLst>
-          </a:blip>
-          <a:stretch>
-            <a:fillRect/>
-          </a:stretch>
-        </p:blipFill>
-        <p:spPr>
-          <a:xfrm>
-            <a:off x="5334000" y="2032000"/>
-            <a:ext cx="406400" cy="406400"/>
-          </a:xfrm>
-          <a:prstGeom prst="rect">
-            <a:avLst/>
-          </a:prstGeom>
-        </p:spPr>
-      </p:pic>
-      <p:sp>
-        <p:nvSpPr>
-          <p:cNvPr id="7" name="AutoShape 7"/>
-          <p:cNvSpPr/>
-          <p:nvPr/>
-        </p:nvSpPr>
-        <p:spPr>
-          <a:xfrm>
-            <a:off x="5842000" y="1905000"/>
-            <a:ext cx="5461000" cy="762000"/>
-          </a:xfrm>
-          <a:prstGeom prst="rect">
-            <a:avLst/>
-          </a:prstGeom>
-          <a:noFill/>
-          <a:ln w="12700" cap="flat" cmpd="sng">
-            <a:noFill/>
-            <a:prstDash val="solid"/>
-            <a:round/>
-          </a:ln>
-        </p:spPr>
-        <p:txBody>
-          <a:bodyPr vert="horz" wrap="square" lIns="0" tIns="0" rIns="0" bIns="0" rtlCol="0" anchor="ctr" anchorCtr="0"/>
-          <a:lstStyle/>
-          <a:p>
-            <a:pPr indent="0" algn="l">
-              <a:lnSpc>
-                <a:spcPct val="100000"/>
-              </a:lnSpc>
-              <a:defRPr/>
-            </a:pPr>
-            <a:r>
-              <a:rPr lang="en-US" sz="1800" b="1" i="0" u="none" strike="noStrike">
-                <a:solidFill>
-                  <a:srgbClr val="1E3A8A"/>
-                </a:solidFill>
-                <a:latin typeface="Noto Sans SC"/>
-                <a:ea typeface="Noto Sans SC"/>
-                <a:cs typeface="Noto Sans SC"/>
-                <a:sym typeface="Noto Sans SC"/>
-              </a:rPr>
-              <a:t>孩子痛点：</a:t>
-            </a:r>
-            <a:r>
-              <a:rPr lang="en-US" sz="1600" b="0" i="0" u="none" strike="noStrike">
-                <a:solidFill>
-                  <a:srgbClr val="374151"/>
-                </a:solidFill>
-                <a:latin typeface="Noto Sans SC"/>
-                <a:ea typeface="Noto Sans SC"/>
-                <a:cs typeface="Noto Sans SC"/>
-                <a:sym typeface="Noto Sans SC"/>
-              </a:rPr>
-              <a:t>错题反复错，家长讲题亲子矛盾频发</a:t>
-            </a:r>
-            <a:endParaRPr lang="en-US" sz="1100"/>
-          </a:p>
-        </p:txBody>
-      </p:sp>
-      <p:sp>
-        <p:nvSpPr>
-          <p:cNvPr id="8" name="AutoShape 8"/>
-          <p:cNvSpPr/>
-          <p:nvPr/>
-        </p:nvSpPr>
-        <p:spPr>
-          <a:xfrm>
-            <a:off x="5207000" y="2794000"/>
-            <a:ext cx="6223000" cy="762000"/>
-          </a:xfrm>
-          <a:prstGeom prst="roundRect">
-            <a:avLst>
-              <a:gd name="adj" fmla="val 16666"/>
-            </a:avLst>
-          </a:prstGeom>
-          <a:solidFill>
-            <a:srgbClr val="FFFFFF">
-              <a:alpha val="85000"/>
-            </a:srgbClr>
-          </a:solidFill>
-          <a:ln w="25400" cap="flat" cmpd="sng">
-            <a:noFill/>
-            <a:prstDash val="solid"/>
-            <a:round/>
-          </a:ln>
-        </p:spPr>
-        <p:txBody>
-          <a:bodyPr vert="horz" wrap="square" lIns="63500" tIns="63500" rIns="63500" bIns="63500" rtlCol="0" anchor="ctr"/>
-          <a:lstStyle/>
-          <a:p>
-            <a:pPr algn="ctr">
-              <a:defRPr/>
-            </a:pPr>
-            <a:endParaRPr/>
-          </a:p>
-        </p:txBody>
-      </p:sp>
-      <p:pic>
-        <p:nvPicPr>
-          <p:cNvPr id="9" name="Picture 9"/>
-          <p:cNvPicPr>
-            <a:picLocks noChangeAspect="1"/>
-          </p:cNvPicPr>
-          <p:nvPr/>
-        </p:nvPicPr>
-        <p:blipFill>
-          <a:blip r:embed="rId7">
-            <a:extLst>
-              <a:ext uri="{28A0092B-C50C-407E-A947-70E740481C1C}">
-                <a14:useLocalDpi xmlns:a14="http://schemas.microsoft.com/office/drawing/2010/main" val="0"/>
-              </a:ext>
-              <a:ext uri="{96DAC541-7B7A-43D3-8B79-37D633B846F1}">
-                <asvg:svgBlip xmlns:asvg="http://schemas.microsoft.com/office/drawing/2016/SVG/main" r:embed="rId8"/>
-              </a:ext>
-            </a:extLst>
-          </a:blip>
-          <a:stretch>
-            <a:fillRect/>
-          </a:stretch>
-        </p:blipFill>
-        <p:spPr>
-          <a:xfrm>
-            <a:off x="5334000" y="2921000"/>
-            <a:ext cx="406400" cy="406400"/>
-          </a:xfrm>
-          <a:prstGeom prst="rect">
-            <a:avLst/>
-          </a:prstGeom>
-        </p:spPr>
-      </p:pic>
-      <p:sp>
-        <p:nvSpPr>
-          <p:cNvPr id="10" name="AutoShape 10"/>
-          <p:cNvSpPr/>
-          <p:nvPr/>
-        </p:nvSpPr>
-        <p:spPr>
-          <a:xfrm>
-            <a:off x="5842000" y="2794000"/>
-            <a:ext cx="5461000" cy="762000"/>
-          </a:xfrm>
-          <a:prstGeom prst="rect">
-            <a:avLst/>
-          </a:prstGeom>
-          <a:noFill/>
-          <a:ln w="12700" cap="flat" cmpd="sng">
-            <a:noFill/>
-            <a:prstDash val="solid"/>
-            <a:round/>
-          </a:ln>
-        </p:spPr>
-        <p:txBody>
-          <a:bodyPr vert="horz" wrap="square" lIns="0" tIns="0" rIns="0" bIns="0" rtlCol="0" anchor="ctr" anchorCtr="0"/>
-          <a:lstStyle/>
-          <a:p>
-            <a:pPr indent="0" algn="l">
-              <a:lnSpc>
-                <a:spcPct val="100000"/>
-              </a:lnSpc>
-              <a:defRPr/>
-            </a:pPr>
-            <a:r>
-              <a:rPr lang="en-US" sz="1800" b="1" i="0" u="none" strike="noStrike">
-                <a:solidFill>
-                  <a:srgbClr val="1E3A8A"/>
-                </a:solidFill>
-                <a:latin typeface="Noto Sans SC"/>
-                <a:ea typeface="Noto Sans SC"/>
-                <a:cs typeface="Noto Sans SC"/>
-                <a:sym typeface="Noto Sans SC"/>
-              </a:rPr>
-              <a:t>核心思路：</a:t>
-            </a:r>
-            <a:r>
-              <a:rPr lang="en-US" sz="1600" b="0" i="0" u="none" strike="noStrike">
-                <a:solidFill>
-                  <a:srgbClr val="374151"/>
-                </a:solidFill>
-                <a:latin typeface="Noto Sans SC"/>
-                <a:ea typeface="Noto Sans SC"/>
-                <a:cs typeface="Noto Sans SC"/>
-                <a:sym typeface="Noto Sans SC"/>
-              </a:rPr>
-              <a:t>AI做个性化辅导，家长做陪伴引导</a:t>
-            </a:r>
-            <a:endParaRPr lang="en-US" sz="1100"/>
-          </a:p>
-        </p:txBody>
-      </p:sp>
-      <p:sp>
-        <p:nvSpPr>
-          <p:cNvPr id="11" name="AutoShape 11"/>
-          <p:cNvSpPr/>
-          <p:nvPr/>
-        </p:nvSpPr>
-        <p:spPr>
-          <a:xfrm>
-            <a:off x="5207000" y="3683000"/>
-            <a:ext cx="6223000" cy="889000"/>
-          </a:xfrm>
-          <a:prstGeom prst="roundRect">
-            <a:avLst>
-              <a:gd name="adj" fmla="val 14285"/>
-            </a:avLst>
-          </a:prstGeom>
-          <a:solidFill>
-            <a:srgbClr val="FFFFFF">
-              <a:alpha val="85000"/>
-            </a:srgbClr>
-          </a:solidFill>
-          <a:ln w="25400" cap="flat" cmpd="sng">
-            <a:noFill/>
-            <a:prstDash val="solid"/>
-            <a:round/>
-          </a:ln>
-        </p:spPr>
-        <p:txBody>
-          <a:bodyPr vert="horz" wrap="square" lIns="63500" tIns="63500" rIns="63500" bIns="63500" rtlCol="0" anchor="ctr"/>
-          <a:lstStyle/>
-          <a:p>
-            <a:pPr algn="ctr">
-              <a:defRPr/>
-            </a:pPr>
-            <a:endParaRPr/>
-          </a:p>
-        </p:txBody>
-      </p:sp>
-      <p:pic>
-        <p:nvPicPr>
-          <p:cNvPr id="12" name="Picture 12"/>
-          <p:cNvPicPr>
-            <a:picLocks noChangeAspect="1"/>
-          </p:cNvPicPr>
-          <p:nvPr/>
-        </p:nvPicPr>
-        <p:blipFill>
-          <a:blip r:embed="rId9">
-            <a:extLst>
-              <a:ext uri="{28A0092B-C50C-407E-A947-70E740481C1C}">
-                <a14:useLocalDpi xmlns:a14="http://schemas.microsoft.com/office/drawing/2010/main" val="0"/>
-              </a:ext>
-              <a:ext uri="{96DAC541-7B7A-43D3-8B79-37D633B846F1}">
-                <asvg:svgBlip xmlns:asvg="http://schemas.microsoft.com/office/drawing/2016/SVG/main" r:embed="rId10"/>
-              </a:ext>
-            </a:extLst>
-          </a:blip>
-          <a:stretch>
-            <a:fillRect/>
-          </a:stretch>
-        </p:blipFill>
-        <p:spPr>
-          <a:xfrm>
-            <a:off x="5334000" y="3873500"/>
-            <a:ext cx="406400" cy="406400"/>
-          </a:xfrm>
-          <a:prstGeom prst="rect">
-            <a:avLst/>
-          </a:prstGeom>
-        </p:spPr>
-      </p:pic>
-      <p:sp>
-        <p:nvSpPr>
-          <p:cNvPr id="13" name="AutoShape 13"/>
-          <p:cNvSpPr/>
-          <p:nvPr/>
-        </p:nvSpPr>
-        <p:spPr>
-          <a:xfrm>
-            <a:off x="5842000" y="3683000"/>
-            <a:ext cx="5461000" cy="889000"/>
-          </a:xfrm>
-          <a:prstGeom prst="rect">
-            <a:avLst/>
-          </a:prstGeom>
-          <a:noFill/>
-          <a:ln w="12700" cap="flat" cmpd="sng">
-            <a:noFill/>
-            <a:prstDash val="solid"/>
-            <a:round/>
-          </a:ln>
-        </p:spPr>
-        <p:txBody>
-          <a:bodyPr vert="horz" wrap="square" lIns="0" tIns="0" rIns="0" bIns="0" rtlCol="0" anchor="ctr" anchorCtr="0"/>
-          <a:lstStyle/>
-          <a:p>
-            <a:pPr indent="0" algn="l">
-              <a:lnSpc>
-                <a:spcPct val="100000"/>
-              </a:lnSpc>
-              <a:defRPr/>
-            </a:pPr>
-            <a:r>
-              <a:rPr lang="en-US" sz="1800" b="1" i="0" u="none" strike="noStrike">
-                <a:solidFill>
-                  <a:srgbClr val="1E3A8A"/>
-                </a:solidFill>
-                <a:latin typeface="Noto Sans SC"/>
-                <a:ea typeface="Noto Sans SC"/>
-                <a:cs typeface="Noto Sans SC"/>
-                <a:sym typeface="Noto Sans SC"/>
-              </a:rPr>
-              <a:t>AI作用：</a:t>
-            </a:r>
-            <a:r>
-              <a:rPr lang="en-US" sz="1600" b="0" i="0" u="none" strike="noStrike">
-                <a:solidFill>
-                  <a:srgbClr val="374151"/>
-                </a:solidFill>
-                <a:latin typeface="Noto Sans SC"/>
-                <a:ea typeface="Noto Sans SC"/>
-                <a:cs typeface="Noto Sans SC"/>
-                <a:sym typeface="Noto Sans SC"/>
-              </a:rPr>
-              <a:t>知识点拆解+错因分析+同类题巩固+拟人语音讲解</a:t>
-            </a:r>
-            <a:endParaRPr lang="en-US" sz="1100"/>
-          </a:p>
-        </p:txBody>
-      </p:sp>
-      <p:sp>
-        <p:nvSpPr>
-          <p:cNvPr id="14" name="AutoShape 14"/>
-          <p:cNvSpPr/>
-          <p:nvPr/>
-        </p:nvSpPr>
-        <p:spPr>
-          <a:xfrm>
-            <a:off x="5207000" y="4699000"/>
-            <a:ext cx="6223000" cy="762000"/>
-          </a:xfrm>
-          <a:prstGeom prst="roundRect">
-            <a:avLst>
-              <a:gd name="adj" fmla="val 16666"/>
-            </a:avLst>
-          </a:prstGeom>
-          <a:solidFill>
-            <a:srgbClr val="FFFFFF">
-              <a:alpha val="85000"/>
-            </a:srgbClr>
-          </a:solidFill>
-          <a:ln w="25400" cap="flat" cmpd="sng">
-            <a:noFill/>
-            <a:prstDash val="solid"/>
-            <a:round/>
-          </a:ln>
-        </p:spPr>
-        <p:txBody>
-          <a:bodyPr vert="horz" wrap="square" lIns="63500" tIns="63500" rIns="63500" bIns="63500" rtlCol="0" anchor="ctr"/>
-          <a:lstStyle/>
-          <a:p>
-            <a:pPr algn="ctr">
-              <a:defRPr/>
-            </a:pPr>
-            <a:endParaRPr/>
-          </a:p>
-        </p:txBody>
-      </p:sp>
-      <p:pic>
-        <p:nvPicPr>
-          <p:cNvPr id="15" name="Picture 15"/>
-          <p:cNvPicPr>
-            <a:picLocks noChangeAspect="1"/>
-          </p:cNvPicPr>
-          <p:nvPr/>
-        </p:nvPicPr>
-        <p:blipFill>
-          <a:blip r:embed="rId11">
-            <a:extLst>
-              <a:ext uri="{28A0092B-C50C-407E-A947-70E740481C1C}">
-                <a14:useLocalDpi xmlns:a14="http://schemas.microsoft.com/office/drawing/2010/main" val="0"/>
-              </a:ext>
-              <a:ext uri="{96DAC541-7B7A-43D3-8B79-37D633B846F1}">
-                <asvg:svgBlip xmlns:asvg="http://schemas.microsoft.com/office/drawing/2016/SVG/main" r:embed="rId12"/>
-              </a:ext>
-            </a:extLst>
-          </a:blip>
-          <a:stretch>
-            <a:fillRect/>
-          </a:stretch>
-        </p:blipFill>
-        <p:spPr>
-          <a:xfrm>
-            <a:off x="5334000" y="4826000"/>
-            <a:ext cx="406400" cy="406400"/>
-          </a:xfrm>
-          <a:prstGeom prst="rect">
-            <a:avLst/>
-          </a:prstGeom>
-        </p:spPr>
-      </p:pic>
-      <p:sp>
-        <p:nvSpPr>
-          <p:cNvPr id="16" name="AutoShape 16"/>
-          <p:cNvSpPr/>
-          <p:nvPr/>
-        </p:nvSpPr>
-        <p:spPr>
-          <a:xfrm>
-            <a:off x="5842000" y="4699000"/>
-            <a:ext cx="5461000" cy="762000"/>
-          </a:xfrm>
-          <a:prstGeom prst="rect">
-            <a:avLst/>
-          </a:prstGeom>
-          <a:noFill/>
-          <a:ln w="12700" cap="flat" cmpd="sng">
-            <a:noFill/>
-            <a:prstDash val="solid"/>
-            <a:round/>
-          </a:ln>
-        </p:spPr>
-        <p:txBody>
-          <a:bodyPr vert="horz" wrap="square" lIns="0" tIns="0" rIns="0" bIns="0" rtlCol="0" anchor="ctr" anchorCtr="0"/>
-          <a:lstStyle/>
-          <a:p>
-            <a:pPr indent="0" algn="l">
-              <a:lnSpc>
-                <a:spcPct val="100000"/>
-              </a:lnSpc>
-              <a:defRPr/>
-            </a:pPr>
-            <a:r>
-              <a:rPr lang="en-US" sz="1800" b="1" i="0" u="none" strike="noStrike">
-                <a:solidFill>
-                  <a:srgbClr val="1E3A8A"/>
-                </a:solidFill>
-                <a:latin typeface="Noto Sans SC"/>
-                <a:ea typeface="Noto Sans SC"/>
-                <a:cs typeface="Noto Sans SC"/>
-                <a:sym typeface="Noto Sans SC"/>
-              </a:rPr>
-              <a:t>成长变化：</a:t>
-            </a:r>
-            <a:r>
-              <a:rPr lang="en-US" sz="1600" b="0" i="0" u="none" strike="noStrike">
-                <a:solidFill>
-                  <a:srgbClr val="374151"/>
-                </a:solidFill>
-                <a:latin typeface="Noto Sans SC"/>
-                <a:ea typeface="Noto Sans SC"/>
-                <a:cs typeface="Noto Sans SC"/>
-                <a:sym typeface="Noto Sans SC"/>
-              </a:rPr>
-              <a:t>不怕错题，养成自主订正、主动解决问题的习惯</a:t>
-            </a:r>
-            <a:endParaRPr lang="en-US" sz="1100"/>
-          </a:p>
-        </p:txBody>
-      </p:sp>
-    </p:spTree>
-  </p:cSld>
-  <p:clrMapOvr>
-    <a:masterClrMapping/>
-  </p:clrMapOvr>
-</p:sld>
-</file>
-
-<file path=ppt/slides/slide7.xml><?xml version="1.0" encoding="utf-8"?>
-<p:sld xmlns:a="http://schemas.openxmlformats.org/drawingml/2006/main" xmlns:r="http://schemas.openxmlformats.org/officeDocument/2006/relationships" xmlns:p="http://schemas.openxmlformats.org/presentationml/2006/main">
-  <p:cSld>
-    <p:bg>
-      <p:bgPr>
-        <a:solidFill>
-          <a:srgbClr val="FFFFFF">
-            <a:alpha val="100000"/>
-          </a:srgbClr>
-        </a:solidFill>
-        <a:effectLst/>
-      </p:bgPr>
-    </p:bg>
-    <p:spTree>
-      <p:nvGrpSpPr>
-        <p:cNvPr id="1" name=""/>
-        <p:cNvGrpSpPr/>
-        <p:nvPr/>
-      </p:nvGrpSpPr>
-      <p:grpSpPr>
-        <a:xfrm>
-          <a:off x="0" y="0"/>
-          <a:ext cx="0" cy="0"/>
-          <a:chOff x="0" y="0"/>
-          <a:chExt cx="0" cy="0"/>
-        </a:xfrm>
-      </p:grpSpPr>
-      <p:pic>
-        <p:nvPicPr>
-          <p:cNvPr id="2" name="Picture 2"/>
-          <p:cNvPicPr>
-            <a:picLocks noChangeAspect="1"/>
-          </p:cNvPicPr>
-          <p:nvPr/>
-        </p:nvPicPr>
-        <p:blipFill>
-          <a:blip r:embed="rId3"/>
-          <a:srcRect/>
-          <a:stretch>
-            <a:fillRect/>
-          </a:stretch>
-        </p:blipFill>
-        <p:spPr>
-          <a:xfrm>
-            <a:off x="0" y="0"/>
-            <a:ext cx="12192000" cy="6858000"/>
-          </a:xfrm>
-          <a:prstGeom prst="rect">
-            <a:avLst/>
-          </a:prstGeom>
-          <a:noFill/>
-          <a:ln w="25400" cap="flat" cmpd="sng">
-            <a:noFill/>
-            <a:prstDash val="solid"/>
-            <a:round/>
-          </a:ln>
-        </p:spPr>
-      </p:pic>
-      <p:sp>
-        <p:nvSpPr>
-          <p:cNvPr id="3" name="AutoShape 3"/>
-          <p:cNvSpPr/>
-          <p:nvPr/>
-        </p:nvSpPr>
-        <p:spPr>
-          <a:xfrm>
             <a:off x="0" y="0"/>
             <a:ext cx="12192000" cy="6858000"/>
           </a:xfrm>
@@ -21495,6 +21253,1133 @@
         </p:txBody>
       </p:sp>
     </p:spTree>
+  </p:cSld>
+  <p:clrMapOvr>
+    <a:masterClrMapping/>
+  </p:clrMapOvr>
+</p:sld>
+</file>
+
+<file path=ppt/slides/slide7.xml><?xml version="1.0" encoding="utf-8"?>
+<p:sld xmlns:a="http://schemas.openxmlformats.org/drawingml/2006/main" xmlns:r="http://schemas.openxmlformats.org/officeDocument/2006/relationships" xmlns:p="http://schemas.openxmlformats.org/presentationml/2006/main">
+  <p:cSld>
+    <p:spTree>
+      <p:nvGrpSpPr>
+        <p:cNvPr id="1" name="">
+          <a:extLst>
+            <a:ext uri="{FF2B5EF4-FFF2-40B4-BE49-F238E27FC236}">
+              <a16:creationId xmlns:a16="http://schemas.microsoft.com/office/drawing/2014/main" id="{7A467FDE-EE49-D3C7-BAFA-2150BA35BF6C}"/>
+            </a:ext>
+          </a:extLst>
+        </p:cNvPr>
+        <p:cNvGrpSpPr/>
+        <p:nvPr/>
+      </p:nvGrpSpPr>
+      <p:grpSpPr>
+        <a:xfrm>
+          <a:off x="0" y="0"/>
+          <a:ext cx="0" cy="0"/>
+          <a:chOff x="0" y="0"/>
+          <a:chExt cx="0" cy="0"/>
+        </a:xfrm>
+      </p:grpSpPr>
+      <p:pic>
+        <p:nvPicPr>
+          <p:cNvPr id="2" name="Picture 2">
+            <a:extLst>
+              <a:ext uri="{FF2B5EF4-FFF2-40B4-BE49-F238E27FC236}">
+                <a16:creationId xmlns:a16="http://schemas.microsoft.com/office/drawing/2014/main" id="{2B551FA0-A770-F8DD-FA39-4297E790D4FB}"/>
+              </a:ext>
+            </a:extLst>
+          </p:cNvPr>
+          <p:cNvPicPr>
+            <a:picLocks noChangeAspect="1"/>
+          </p:cNvPicPr>
+          <p:nvPr/>
+        </p:nvPicPr>
+        <p:blipFill>
+          <a:blip r:embed="rId3"/>
+          <a:srcRect/>
+          <a:stretch>
+            <a:fillRect/>
+          </a:stretch>
+        </p:blipFill>
+        <p:spPr>
+          <a:xfrm>
+            <a:off x="0" y="0"/>
+            <a:ext cx="12192000" cy="6858000"/>
+          </a:xfrm>
+          <a:prstGeom prst="rect">
+            <a:avLst/>
+          </a:prstGeom>
+          <a:noFill/>
+          <a:ln w="25400" cap="flat" cmpd="sng">
+            <a:noFill/>
+            <a:prstDash val="solid"/>
+            <a:round/>
+          </a:ln>
+        </p:spPr>
+      </p:pic>
+      <p:sp>
+        <p:nvSpPr>
+          <p:cNvPr id="3" name="AutoShape 3">
+            <a:extLst>
+              <a:ext uri="{FF2B5EF4-FFF2-40B4-BE49-F238E27FC236}">
+                <a16:creationId xmlns:a16="http://schemas.microsoft.com/office/drawing/2014/main" id="{69B8BF1A-DE5C-9495-6B88-8EE0E7229DB7}"/>
+              </a:ext>
+            </a:extLst>
+          </p:cNvPr>
+          <p:cNvSpPr/>
+          <p:nvPr/>
+        </p:nvSpPr>
+        <p:spPr>
+          <a:xfrm>
+            <a:off x="762000" y="762000"/>
+            <a:ext cx="10668000" cy="635000"/>
+          </a:xfrm>
+          <a:prstGeom prst="rect">
+            <a:avLst/>
+          </a:prstGeom>
+          <a:noFill/>
+          <a:ln w="12700" cap="flat" cmpd="sng">
+            <a:noFill/>
+            <a:prstDash val="solid"/>
+            <a:round/>
+          </a:ln>
+        </p:spPr>
+        <p:txBody>
+          <a:bodyPr vert="horz" wrap="none" lIns="0" tIns="0" rIns="0" bIns="0" rtlCol="0" anchor="ctr" anchorCtr="0"/>
+          <a:lstStyle/>
+          <a:p>
+            <a:pPr indent="0" algn="l">
+              <a:lnSpc>
+                <a:spcPct val="125000"/>
+              </a:lnSpc>
+              <a:defRPr/>
+            </a:pPr>
+            <a:r>
+              <a:rPr lang="en-US" sz="3600" b="1" i="0" u="none" strike="noStrike" dirty="0">
+                <a:solidFill>
+                  <a:srgbClr val="1E3A8A"/>
+                </a:solidFill>
+                <a:latin typeface="Noto Sans SC"/>
+                <a:ea typeface="Noto Sans SC"/>
+                <a:cs typeface="Noto Sans SC"/>
+                <a:sym typeface="Noto Sans SC"/>
+              </a:rPr>
+              <a:t>AI</a:t>
+            </a:r>
+            <a:r>
+              <a:rPr lang="zh-CN" altLang="en-US" sz="3600" b="1" i="0" u="none" strike="noStrike" dirty="0">
+                <a:solidFill>
+                  <a:srgbClr val="1E3A8A"/>
+                </a:solidFill>
+                <a:latin typeface="Noto Sans SC"/>
+                <a:ea typeface="Noto Sans SC"/>
+                <a:cs typeface="Noto Sans SC"/>
+                <a:sym typeface="Noto Sans SC"/>
+              </a:rPr>
+              <a:t>与孩子的三种相处方式</a:t>
+            </a:r>
+            <a:endParaRPr lang="en-US" sz="1100" dirty="0"/>
+          </a:p>
+        </p:txBody>
+      </p:sp>
+      <p:sp>
+        <p:nvSpPr>
+          <p:cNvPr id="4" name="AutoShape 4">
+            <a:extLst>
+              <a:ext uri="{FF2B5EF4-FFF2-40B4-BE49-F238E27FC236}">
+                <a16:creationId xmlns:a16="http://schemas.microsoft.com/office/drawing/2014/main" id="{EFBD4948-9562-03FE-9A77-30FC46DF3245}"/>
+              </a:ext>
+            </a:extLst>
+          </p:cNvPr>
+          <p:cNvSpPr/>
+          <p:nvPr/>
+        </p:nvSpPr>
+        <p:spPr>
+          <a:xfrm>
+            <a:off x="762000" y="1460500"/>
+            <a:ext cx="762000" cy="50800"/>
+          </a:xfrm>
+          <a:prstGeom prst="roundRect">
+            <a:avLst>
+              <a:gd name="adj" fmla="val 0"/>
+            </a:avLst>
+          </a:prstGeom>
+          <a:solidFill>
+            <a:srgbClr val="F97316">
+              <a:alpha val="100000"/>
+            </a:srgbClr>
+          </a:solidFill>
+          <a:ln w="25400" cap="flat" cmpd="sng">
+            <a:noFill/>
+            <a:prstDash val="solid"/>
+            <a:round/>
+          </a:ln>
+        </p:spPr>
+        <p:txBody>
+          <a:bodyPr vert="horz" wrap="square" lIns="63500" tIns="63500" rIns="63500" bIns="63500" rtlCol="0" anchor="ctr"/>
+          <a:lstStyle/>
+          <a:p>
+            <a:pPr algn="ctr">
+              <a:defRPr/>
+            </a:pPr>
+            <a:endParaRPr/>
+          </a:p>
+        </p:txBody>
+      </p:sp>
+      <p:sp>
+        <p:nvSpPr>
+          <p:cNvPr id="5" name="AutoShape 5">
+            <a:extLst>
+              <a:ext uri="{FF2B5EF4-FFF2-40B4-BE49-F238E27FC236}">
+                <a16:creationId xmlns:a16="http://schemas.microsoft.com/office/drawing/2014/main" id="{DA1A0524-ACEA-8284-0A6D-8AC9A86619A4}"/>
+              </a:ext>
+            </a:extLst>
+          </p:cNvPr>
+          <p:cNvSpPr/>
+          <p:nvPr/>
+        </p:nvSpPr>
+        <p:spPr>
+          <a:xfrm>
+            <a:off x="762000" y="1905000"/>
+            <a:ext cx="3302000" cy="2794000"/>
+          </a:xfrm>
+          <a:prstGeom prst="roundRect">
+            <a:avLst>
+              <a:gd name="adj" fmla="val 4545"/>
+            </a:avLst>
+          </a:prstGeom>
+          <a:solidFill>
+            <a:srgbClr val="FFFFFF">
+              <a:alpha val="92000"/>
+            </a:srgbClr>
+          </a:solidFill>
+          <a:ln w="25400" cap="flat" cmpd="sng">
+            <a:noFill/>
+            <a:prstDash val="solid"/>
+            <a:round/>
+          </a:ln>
+          <a:effectLst>
+            <a:outerShdw blurRad="190500" dist="101600" dir="5400000" algn="tl" rotWithShape="0">
+              <a:srgbClr val="1E3A8A">
+                <a:alpha val="15000"/>
+              </a:srgbClr>
+            </a:outerShdw>
+          </a:effectLst>
+        </p:spPr>
+        <p:txBody>
+          <a:bodyPr vert="horz" wrap="square" lIns="63500" tIns="63500" rIns="63500" bIns="63500" rtlCol="0" anchor="ctr"/>
+          <a:lstStyle/>
+          <a:p>
+            <a:pPr algn="ctr">
+              <a:defRPr/>
+            </a:pPr>
+            <a:endParaRPr/>
+          </a:p>
+        </p:txBody>
+      </p:sp>
+      <p:pic>
+        <p:nvPicPr>
+          <p:cNvPr id="6" name="Picture 6">
+            <a:extLst>
+              <a:ext uri="{FF2B5EF4-FFF2-40B4-BE49-F238E27FC236}">
+                <a16:creationId xmlns:a16="http://schemas.microsoft.com/office/drawing/2014/main" id="{B64B994F-24AF-60BD-4C65-3DAF2E871FF8}"/>
+              </a:ext>
+            </a:extLst>
+          </p:cNvPr>
+          <p:cNvPicPr>
+            <a:picLocks noChangeAspect="1"/>
+          </p:cNvPicPr>
+          <p:nvPr/>
+        </p:nvPicPr>
+        <p:blipFill>
+          <a:blip r:embed="rId4">
+            <a:extLst>
+              <a:ext uri="{28A0092B-C50C-407E-A947-70E740481C1C}">
+                <a14:useLocalDpi xmlns:a14="http://schemas.microsoft.com/office/drawing/2010/main" val="0"/>
+              </a:ext>
+              <a:ext uri="{96DAC541-7B7A-43D3-8B79-37D633B846F1}">
+                <asvg:svgBlip xmlns:asvg="http://schemas.microsoft.com/office/drawing/2016/SVG/main" r:embed="rId5"/>
+              </a:ext>
+            </a:extLst>
+          </a:blip>
+          <a:stretch>
+            <a:fillRect/>
+          </a:stretch>
+        </p:blipFill>
+        <p:spPr>
+          <a:xfrm>
+            <a:off x="2095500" y="2159000"/>
+            <a:ext cx="635000" cy="635000"/>
+          </a:xfrm>
+          <a:prstGeom prst="rect">
+            <a:avLst/>
+          </a:prstGeom>
+        </p:spPr>
+      </p:pic>
+      <p:sp>
+        <p:nvSpPr>
+          <p:cNvPr id="7" name="AutoShape 7">
+            <a:extLst>
+              <a:ext uri="{FF2B5EF4-FFF2-40B4-BE49-F238E27FC236}">
+                <a16:creationId xmlns:a16="http://schemas.microsoft.com/office/drawing/2014/main" id="{F73BF4ED-821F-96C8-FC50-EB1C55E3194A}"/>
+              </a:ext>
+            </a:extLst>
+          </p:cNvPr>
+          <p:cNvSpPr/>
+          <p:nvPr/>
+        </p:nvSpPr>
+        <p:spPr>
+          <a:xfrm>
+            <a:off x="889000" y="2921000"/>
+            <a:ext cx="3048000" cy="381000"/>
+          </a:xfrm>
+          <a:prstGeom prst="rect">
+            <a:avLst/>
+          </a:prstGeom>
+          <a:noFill/>
+          <a:ln w="12700" cap="flat" cmpd="sng">
+            <a:noFill/>
+            <a:prstDash val="solid"/>
+            <a:round/>
+          </a:ln>
+        </p:spPr>
+        <p:txBody>
+          <a:bodyPr vert="horz" wrap="square" lIns="0" tIns="0" rIns="0" bIns="0" rtlCol="0" anchor="ctr" anchorCtr="0"/>
+          <a:lstStyle/>
+          <a:p>
+            <a:pPr indent="0" algn="ctr">
+              <a:lnSpc>
+                <a:spcPct val="125000"/>
+              </a:lnSpc>
+              <a:defRPr/>
+            </a:pPr>
+            <a:r>
+              <a:rPr lang="zh-CN" altLang="en-US" sz="1800" b="1" dirty="0">
+                <a:solidFill>
+                  <a:srgbClr val="1E3A8A"/>
+                </a:solidFill>
+                <a:latin typeface="Noto Sans SC"/>
+                <a:ea typeface="Noto Sans SC"/>
+                <a:cs typeface="Noto Sans SC"/>
+                <a:sym typeface="Noto Sans SC"/>
+              </a:rPr>
+              <a:t>提效工具</a:t>
+            </a:r>
+            <a:r>
+              <a:rPr lang="zh-CN" altLang="en-US" sz="1800" b="1" i="0" u="none" strike="noStrike" dirty="0">
+                <a:solidFill>
+                  <a:srgbClr val="1E3A8A"/>
+                </a:solidFill>
+                <a:latin typeface="Noto Sans SC"/>
+                <a:ea typeface="Noto Sans SC"/>
+                <a:cs typeface="Noto Sans SC"/>
+                <a:sym typeface="Noto Sans SC"/>
+              </a:rPr>
+              <a:t>模式</a:t>
+            </a:r>
+            <a:endParaRPr lang="en-US" sz="1100" dirty="0"/>
+          </a:p>
+        </p:txBody>
+      </p:sp>
+      <p:sp>
+        <p:nvSpPr>
+          <p:cNvPr id="8" name="AutoShape 8">
+            <a:extLst>
+              <a:ext uri="{FF2B5EF4-FFF2-40B4-BE49-F238E27FC236}">
+                <a16:creationId xmlns:a16="http://schemas.microsoft.com/office/drawing/2014/main" id="{90D49611-73FF-2D15-E084-652E90DEEDFE}"/>
+              </a:ext>
+            </a:extLst>
+          </p:cNvPr>
+          <p:cNvSpPr/>
+          <p:nvPr/>
+        </p:nvSpPr>
+        <p:spPr>
+          <a:xfrm>
+            <a:off x="952500" y="3365500"/>
+            <a:ext cx="2921000" cy="1016000"/>
+          </a:xfrm>
+          <a:prstGeom prst="rect">
+            <a:avLst/>
+          </a:prstGeom>
+          <a:noFill/>
+          <a:ln w="12700" cap="flat" cmpd="sng">
+            <a:noFill/>
+            <a:prstDash val="solid"/>
+            <a:round/>
+          </a:ln>
+        </p:spPr>
+        <p:txBody>
+          <a:bodyPr vert="horz" wrap="square" lIns="0" tIns="0" rIns="0" bIns="0" rtlCol="0" anchor="ctr" anchorCtr="0"/>
+          <a:lstStyle/>
+          <a:p>
+            <a:pPr indent="0" algn="just">
+              <a:lnSpc>
+                <a:spcPct val="108333"/>
+              </a:lnSpc>
+              <a:defRPr/>
+            </a:pPr>
+            <a:r>
+              <a:rPr lang="zh-CN" altLang="en-US" sz="1400" b="0" i="0" u="none" strike="noStrike" dirty="0">
+                <a:solidFill>
+                  <a:srgbClr val="374151"/>
+                </a:solidFill>
+                <a:latin typeface="Noto Sans SC"/>
+                <a:ea typeface="Noto Sans SC"/>
+                <a:cs typeface="Noto Sans SC"/>
+                <a:sym typeface="Noto Sans SC"/>
+              </a:rPr>
+              <a:t>工具模式：</a:t>
+            </a:r>
+            <a:r>
+              <a:rPr lang="en-US" sz="1400" b="0" i="0" u="none" strike="noStrike" dirty="0">
+                <a:solidFill>
+                  <a:srgbClr val="374151"/>
+                </a:solidFill>
+                <a:latin typeface="Noto Sans SC"/>
+                <a:ea typeface="Noto Sans SC"/>
+                <a:cs typeface="Noto Sans SC"/>
+                <a:sym typeface="Noto Sans SC"/>
+              </a:rPr>
+              <a:t>AI </a:t>
+            </a:r>
+            <a:r>
+              <a:rPr lang="zh-CN" altLang="en-US" sz="1400" b="0" i="0" u="none" strike="noStrike" dirty="0">
+                <a:solidFill>
+                  <a:srgbClr val="374151"/>
+                </a:solidFill>
+                <a:latin typeface="Noto Sans SC"/>
+                <a:ea typeface="Noto Sans SC"/>
+                <a:cs typeface="Noto Sans SC"/>
+                <a:sym typeface="Noto Sans SC"/>
+              </a:rPr>
+              <a:t>帮我做</a:t>
+            </a:r>
+          </a:p>
+          <a:p>
+            <a:pPr indent="0" algn="just">
+              <a:lnSpc>
+                <a:spcPct val="108333"/>
+              </a:lnSpc>
+              <a:defRPr/>
+            </a:pPr>
+            <a:r>
+              <a:rPr lang="en-US" sz="1400" b="0" i="0" u="none" strike="noStrike" dirty="0">
+                <a:solidFill>
+                  <a:srgbClr val="374151"/>
+                </a:solidFill>
+                <a:latin typeface="Noto Sans SC"/>
+                <a:ea typeface="Noto Sans SC"/>
+                <a:cs typeface="Noto Sans SC"/>
+                <a:sym typeface="Noto Sans SC"/>
+              </a:rPr>
+              <a:t>AI </a:t>
+            </a:r>
+            <a:r>
+              <a:rPr lang="zh-CN" altLang="en-US" sz="1400" b="0" i="0" u="none" strike="noStrike" dirty="0">
+                <a:solidFill>
+                  <a:srgbClr val="374151"/>
+                </a:solidFill>
+                <a:latin typeface="Noto Sans SC"/>
+                <a:ea typeface="Noto Sans SC"/>
+                <a:cs typeface="Noto Sans SC"/>
+                <a:sym typeface="Noto Sans SC"/>
+              </a:rPr>
+              <a:t>完成机械重复工作，家长来判断和审核结果孩子把精力放在理解和思考上</a:t>
+            </a:r>
+          </a:p>
+          <a:p>
+            <a:pPr indent="0" algn="just">
+              <a:lnSpc>
+                <a:spcPct val="108333"/>
+              </a:lnSpc>
+              <a:defRPr/>
+            </a:pPr>
+            <a:r>
+              <a:rPr lang="zh-CN" altLang="en-US" sz="1400" b="0" i="0" u="none" strike="noStrike" dirty="0">
+                <a:solidFill>
+                  <a:srgbClr val="374151"/>
+                </a:solidFill>
+                <a:latin typeface="Noto Sans SC"/>
+                <a:ea typeface="Noto Sans SC"/>
+                <a:cs typeface="Noto Sans SC"/>
+                <a:sym typeface="Noto Sans SC"/>
+              </a:rPr>
+              <a:t>详见案例</a:t>
+            </a:r>
+            <a:r>
+              <a:rPr lang="en-US" altLang="zh-CN" sz="1400" b="0" i="0" u="none" strike="noStrike" dirty="0">
+                <a:solidFill>
+                  <a:srgbClr val="374151"/>
+                </a:solidFill>
+                <a:latin typeface="Noto Sans SC"/>
+                <a:ea typeface="Noto Sans SC"/>
+                <a:cs typeface="Noto Sans SC"/>
+                <a:sym typeface="Noto Sans SC"/>
+              </a:rPr>
+              <a:t>1</a:t>
+            </a:r>
+            <a:r>
+              <a:rPr lang="zh-CN" altLang="en-US" sz="1400" b="0" i="0" u="none" strike="noStrike" dirty="0">
+                <a:solidFill>
+                  <a:srgbClr val="374151"/>
+                </a:solidFill>
+                <a:latin typeface="Noto Sans SC"/>
+                <a:ea typeface="Noto Sans SC"/>
+                <a:cs typeface="Noto Sans SC"/>
+                <a:sym typeface="Noto Sans SC"/>
+              </a:rPr>
+              <a:t>：</a:t>
+            </a:r>
+            <a:r>
+              <a:rPr lang="en-US" sz="1400" b="0" i="0" u="none" strike="noStrike" dirty="0">
+                <a:solidFill>
+                  <a:srgbClr val="374151"/>
+                </a:solidFill>
+                <a:latin typeface="Noto Sans SC"/>
+                <a:ea typeface="Noto Sans SC"/>
+                <a:cs typeface="Noto Sans SC"/>
+                <a:sym typeface="Noto Sans SC"/>
+              </a:rPr>
+              <a:t>AI </a:t>
+            </a:r>
+            <a:r>
+              <a:rPr lang="zh-CN" altLang="en-US" sz="1400" b="0" i="0" u="none" strike="noStrike" dirty="0">
+                <a:solidFill>
+                  <a:srgbClr val="374151"/>
+                </a:solidFill>
+                <a:latin typeface="Noto Sans SC"/>
+                <a:ea typeface="Noto Sans SC"/>
+                <a:cs typeface="Noto Sans SC"/>
+                <a:sym typeface="Noto Sans SC"/>
+              </a:rPr>
+              <a:t>错题讲解</a:t>
+            </a:r>
+            <a:endParaRPr lang="en-US" sz="1100" dirty="0"/>
+          </a:p>
+        </p:txBody>
+      </p:sp>
+      <p:sp>
+        <p:nvSpPr>
+          <p:cNvPr id="9" name="AutoShape 9">
+            <a:extLst>
+              <a:ext uri="{FF2B5EF4-FFF2-40B4-BE49-F238E27FC236}">
+                <a16:creationId xmlns:a16="http://schemas.microsoft.com/office/drawing/2014/main" id="{007E4343-471F-6745-7C02-B414AADF385A}"/>
+              </a:ext>
+            </a:extLst>
+          </p:cNvPr>
+          <p:cNvSpPr/>
+          <p:nvPr/>
+        </p:nvSpPr>
+        <p:spPr>
+          <a:xfrm>
+            <a:off x="4445000" y="1905000"/>
+            <a:ext cx="3302000" cy="2794000"/>
+          </a:xfrm>
+          <a:prstGeom prst="roundRect">
+            <a:avLst>
+              <a:gd name="adj" fmla="val 4545"/>
+            </a:avLst>
+          </a:prstGeom>
+          <a:solidFill>
+            <a:srgbClr val="FFFFFF">
+              <a:alpha val="92000"/>
+            </a:srgbClr>
+          </a:solidFill>
+          <a:ln w="25400" cap="flat" cmpd="sng">
+            <a:noFill/>
+            <a:prstDash val="solid"/>
+            <a:round/>
+          </a:ln>
+          <a:effectLst>
+            <a:outerShdw blurRad="190500" dist="101600" dir="5400000" algn="tl" rotWithShape="0">
+              <a:srgbClr val="1E3A8A">
+                <a:alpha val="15000"/>
+              </a:srgbClr>
+            </a:outerShdw>
+          </a:effectLst>
+        </p:spPr>
+        <p:txBody>
+          <a:bodyPr vert="horz" wrap="square" lIns="63500" tIns="63500" rIns="63500" bIns="63500" rtlCol="0" anchor="ctr"/>
+          <a:lstStyle/>
+          <a:p>
+            <a:pPr algn="ctr">
+              <a:defRPr/>
+            </a:pPr>
+            <a:endParaRPr/>
+          </a:p>
+        </p:txBody>
+      </p:sp>
+      <p:pic>
+        <p:nvPicPr>
+          <p:cNvPr id="10" name="Picture 10">
+            <a:extLst>
+              <a:ext uri="{FF2B5EF4-FFF2-40B4-BE49-F238E27FC236}">
+                <a16:creationId xmlns:a16="http://schemas.microsoft.com/office/drawing/2014/main" id="{D5C6AE22-8E65-F268-61CB-58F626492970}"/>
+              </a:ext>
+            </a:extLst>
+          </p:cNvPr>
+          <p:cNvPicPr>
+            <a:picLocks noChangeAspect="1"/>
+          </p:cNvPicPr>
+          <p:nvPr/>
+        </p:nvPicPr>
+        <p:blipFill>
+          <a:blip r:embed="rId6">
+            <a:extLst>
+              <a:ext uri="{28A0092B-C50C-407E-A947-70E740481C1C}">
+                <a14:useLocalDpi xmlns:a14="http://schemas.microsoft.com/office/drawing/2010/main" val="0"/>
+              </a:ext>
+              <a:ext uri="{96DAC541-7B7A-43D3-8B79-37D633B846F1}">
+                <asvg:svgBlip xmlns:asvg="http://schemas.microsoft.com/office/drawing/2016/SVG/main" r:embed="rId7"/>
+              </a:ext>
+            </a:extLst>
+          </a:blip>
+          <a:stretch>
+            <a:fillRect/>
+          </a:stretch>
+        </p:blipFill>
+        <p:spPr>
+          <a:xfrm>
+            <a:off x="5778500" y="2159000"/>
+            <a:ext cx="635000" cy="635000"/>
+          </a:xfrm>
+          <a:prstGeom prst="rect">
+            <a:avLst/>
+          </a:prstGeom>
+        </p:spPr>
+      </p:pic>
+      <p:sp>
+        <p:nvSpPr>
+          <p:cNvPr id="11" name="AutoShape 11">
+            <a:extLst>
+              <a:ext uri="{FF2B5EF4-FFF2-40B4-BE49-F238E27FC236}">
+                <a16:creationId xmlns:a16="http://schemas.microsoft.com/office/drawing/2014/main" id="{022094FE-9A8F-CABF-B78F-FC11F5B11020}"/>
+              </a:ext>
+            </a:extLst>
+          </p:cNvPr>
+          <p:cNvSpPr/>
+          <p:nvPr/>
+        </p:nvSpPr>
+        <p:spPr>
+          <a:xfrm>
+            <a:off x="4572000" y="2921000"/>
+            <a:ext cx="3048000" cy="381000"/>
+          </a:xfrm>
+          <a:prstGeom prst="rect">
+            <a:avLst/>
+          </a:prstGeom>
+          <a:noFill/>
+          <a:ln w="12700" cap="flat" cmpd="sng">
+            <a:noFill/>
+            <a:prstDash val="solid"/>
+            <a:round/>
+          </a:ln>
+        </p:spPr>
+        <p:txBody>
+          <a:bodyPr vert="horz" wrap="square" lIns="0" tIns="0" rIns="0" bIns="0" rtlCol="0" anchor="ctr" anchorCtr="0"/>
+          <a:lstStyle/>
+          <a:p>
+            <a:pPr indent="0" algn="ctr">
+              <a:lnSpc>
+                <a:spcPct val="125000"/>
+              </a:lnSpc>
+              <a:defRPr/>
+            </a:pPr>
+            <a:r>
+              <a:rPr lang="zh-CN" altLang="en-US" sz="1800" b="1" i="0" u="none" strike="noStrike" dirty="0">
+                <a:solidFill>
+                  <a:srgbClr val="1E3A8A"/>
+                </a:solidFill>
+                <a:latin typeface="Noto Sans SC"/>
+                <a:ea typeface="Noto Sans SC"/>
+                <a:cs typeface="Noto Sans SC"/>
+                <a:sym typeface="Noto Sans SC"/>
+              </a:rPr>
+              <a:t>代理自主模式</a:t>
+            </a:r>
+            <a:endParaRPr lang="en-US" sz="1100" dirty="0"/>
+          </a:p>
+        </p:txBody>
+      </p:sp>
+      <p:sp>
+        <p:nvSpPr>
+          <p:cNvPr id="12" name="AutoShape 12">
+            <a:extLst>
+              <a:ext uri="{FF2B5EF4-FFF2-40B4-BE49-F238E27FC236}">
+                <a16:creationId xmlns:a16="http://schemas.microsoft.com/office/drawing/2014/main" id="{58CD7872-194F-4D31-CD0F-B0A9B219BDCB}"/>
+              </a:ext>
+            </a:extLst>
+          </p:cNvPr>
+          <p:cNvSpPr/>
+          <p:nvPr/>
+        </p:nvSpPr>
+        <p:spPr>
+          <a:xfrm>
+            <a:off x="4635500" y="3365500"/>
+            <a:ext cx="2921000" cy="1016000"/>
+          </a:xfrm>
+          <a:prstGeom prst="rect">
+            <a:avLst/>
+          </a:prstGeom>
+          <a:noFill/>
+          <a:ln w="12700" cap="flat" cmpd="sng">
+            <a:noFill/>
+            <a:prstDash val="solid"/>
+            <a:round/>
+          </a:ln>
+        </p:spPr>
+        <p:txBody>
+          <a:bodyPr vert="horz" wrap="square" lIns="0" tIns="0" rIns="0" bIns="0" rtlCol="0" anchor="ctr" anchorCtr="0"/>
+          <a:lstStyle/>
+          <a:p>
+            <a:pPr indent="0" algn="just">
+              <a:lnSpc>
+                <a:spcPct val="108333"/>
+              </a:lnSpc>
+              <a:defRPr/>
+            </a:pPr>
+            <a:r>
+              <a:rPr lang="zh-CN" altLang="en-US" sz="1400" b="0" i="0" u="none" strike="noStrike" dirty="0">
+                <a:solidFill>
+                  <a:srgbClr val="374151"/>
+                </a:solidFill>
+                <a:latin typeface="Noto Sans SC"/>
+                <a:ea typeface="Noto Sans SC"/>
+                <a:cs typeface="Noto Sans SC"/>
+                <a:sym typeface="Noto Sans SC"/>
+              </a:rPr>
+              <a:t>陪伴模式：孩子主导</a:t>
+            </a:r>
+            <a:endParaRPr lang="en-US" altLang="zh-CN" sz="1400" b="0" i="0" u="none" strike="noStrike" dirty="0">
+              <a:solidFill>
+                <a:srgbClr val="374151"/>
+              </a:solidFill>
+              <a:latin typeface="Noto Sans SC"/>
+              <a:ea typeface="Noto Sans SC"/>
+              <a:cs typeface="Noto Sans SC"/>
+              <a:sym typeface="Noto Sans SC"/>
+            </a:endParaRPr>
+          </a:p>
+          <a:p>
+            <a:pPr indent="0" algn="just">
+              <a:lnSpc>
+                <a:spcPct val="108333"/>
+              </a:lnSpc>
+              <a:defRPr/>
+            </a:pPr>
+            <a:r>
+              <a:rPr lang="zh-CN" altLang="en-US" sz="1400" b="0" i="0" u="none" strike="noStrike" dirty="0">
+                <a:solidFill>
+                  <a:srgbClr val="374151"/>
+                </a:solidFill>
+                <a:latin typeface="Noto Sans SC"/>
+                <a:ea typeface="Noto Sans SC"/>
+                <a:cs typeface="Noto Sans SC"/>
+                <a:sym typeface="Noto Sans SC"/>
+              </a:rPr>
+              <a:t>孩子自己与</a:t>
+            </a:r>
+            <a:r>
+              <a:rPr lang="en-US" altLang="zh-CN" sz="1400" b="0" i="0" u="none" strike="noStrike" dirty="0">
+                <a:solidFill>
+                  <a:srgbClr val="374151"/>
+                </a:solidFill>
+                <a:latin typeface="Noto Sans SC"/>
+                <a:ea typeface="Noto Sans SC"/>
+                <a:cs typeface="Noto Sans SC"/>
+                <a:sym typeface="Noto Sans SC"/>
+              </a:rPr>
+              <a:t>AI</a:t>
+            </a:r>
+            <a:r>
+              <a:rPr lang="zh-CN" altLang="en-US" sz="1400" b="0" i="0" u="none" strike="noStrike" dirty="0">
+                <a:solidFill>
+                  <a:srgbClr val="374151"/>
+                </a:solidFill>
+                <a:latin typeface="Noto Sans SC"/>
+                <a:ea typeface="Noto Sans SC"/>
+                <a:cs typeface="Noto Sans SC"/>
+                <a:sym typeface="Noto Sans SC"/>
+              </a:rPr>
+              <a:t>工具互动，家长退至引导位置需要提前把规则和边界设计好</a:t>
+            </a:r>
+            <a:endParaRPr lang="en-US" altLang="zh-CN" sz="1400" b="0" i="0" u="none" strike="noStrike" dirty="0">
+              <a:solidFill>
+                <a:srgbClr val="374151"/>
+              </a:solidFill>
+              <a:latin typeface="Noto Sans SC"/>
+              <a:ea typeface="Noto Sans SC"/>
+              <a:cs typeface="Noto Sans SC"/>
+              <a:sym typeface="Noto Sans SC"/>
+            </a:endParaRPr>
+          </a:p>
+          <a:p>
+            <a:pPr indent="0" algn="just">
+              <a:lnSpc>
+                <a:spcPct val="108333"/>
+              </a:lnSpc>
+              <a:defRPr/>
+            </a:pPr>
+            <a:r>
+              <a:rPr lang="zh-CN" altLang="en-US" dirty="0">
+                <a:solidFill>
+                  <a:srgbClr val="374151"/>
+                </a:solidFill>
+                <a:latin typeface="Noto Sans SC"/>
+                <a:ea typeface="Noto Sans SC"/>
+                <a:sym typeface="Noto Sans SC"/>
+              </a:rPr>
+              <a:t>详见案例</a:t>
+            </a:r>
+            <a:r>
+              <a:rPr lang="en-US" altLang="zh-CN" dirty="0">
+                <a:solidFill>
+                  <a:srgbClr val="374151"/>
+                </a:solidFill>
+                <a:latin typeface="Noto Sans SC"/>
+                <a:ea typeface="Noto Sans SC"/>
+                <a:sym typeface="Noto Sans SC"/>
+              </a:rPr>
+              <a:t>2</a:t>
+            </a:r>
+            <a:r>
+              <a:rPr lang="zh-CN" altLang="en-US" dirty="0">
+                <a:solidFill>
+                  <a:srgbClr val="374151"/>
+                </a:solidFill>
+                <a:latin typeface="Noto Sans SC"/>
+                <a:ea typeface="Noto Sans SC"/>
+                <a:sym typeface="Noto Sans SC"/>
+              </a:rPr>
+              <a:t>：时间小火车</a:t>
+            </a:r>
+            <a:endParaRPr lang="en-US" sz="1100" dirty="0"/>
+          </a:p>
+        </p:txBody>
+      </p:sp>
+      <p:sp>
+        <p:nvSpPr>
+          <p:cNvPr id="13" name="AutoShape 13">
+            <a:extLst>
+              <a:ext uri="{FF2B5EF4-FFF2-40B4-BE49-F238E27FC236}">
+                <a16:creationId xmlns:a16="http://schemas.microsoft.com/office/drawing/2014/main" id="{E33320E0-4DBE-F61E-4873-AD69C2A417AB}"/>
+              </a:ext>
+            </a:extLst>
+          </p:cNvPr>
+          <p:cNvSpPr/>
+          <p:nvPr/>
+        </p:nvSpPr>
+        <p:spPr>
+          <a:xfrm>
+            <a:off x="8128000" y="1905000"/>
+            <a:ext cx="3302000" cy="2794000"/>
+          </a:xfrm>
+          <a:prstGeom prst="roundRect">
+            <a:avLst>
+              <a:gd name="adj" fmla="val 4545"/>
+            </a:avLst>
+          </a:prstGeom>
+          <a:solidFill>
+            <a:srgbClr val="FFFFFF">
+              <a:alpha val="92000"/>
+            </a:srgbClr>
+          </a:solidFill>
+          <a:ln w="25400" cap="flat" cmpd="sng">
+            <a:noFill/>
+            <a:prstDash val="solid"/>
+            <a:round/>
+          </a:ln>
+          <a:effectLst>
+            <a:outerShdw blurRad="190500" dist="101600" dir="5400000" algn="tl" rotWithShape="0">
+              <a:srgbClr val="1E3A8A">
+                <a:alpha val="15000"/>
+              </a:srgbClr>
+            </a:outerShdw>
+          </a:effectLst>
+        </p:spPr>
+        <p:txBody>
+          <a:bodyPr vert="horz" wrap="square" lIns="63500" tIns="63500" rIns="63500" bIns="63500" rtlCol="0" anchor="ctr"/>
+          <a:lstStyle/>
+          <a:p>
+            <a:pPr algn="ctr">
+              <a:defRPr/>
+            </a:pPr>
+            <a:endParaRPr/>
+          </a:p>
+        </p:txBody>
+      </p:sp>
+      <p:pic>
+        <p:nvPicPr>
+          <p:cNvPr id="14" name="Picture 14">
+            <a:extLst>
+              <a:ext uri="{FF2B5EF4-FFF2-40B4-BE49-F238E27FC236}">
+                <a16:creationId xmlns:a16="http://schemas.microsoft.com/office/drawing/2014/main" id="{EE357911-F28E-4789-E932-33937F993712}"/>
+              </a:ext>
+            </a:extLst>
+          </p:cNvPr>
+          <p:cNvPicPr>
+            <a:picLocks noChangeAspect="1"/>
+          </p:cNvPicPr>
+          <p:nvPr/>
+        </p:nvPicPr>
+        <p:blipFill>
+          <a:blip r:embed="rId8">
+            <a:extLst>
+              <a:ext uri="{28A0092B-C50C-407E-A947-70E740481C1C}">
+                <a14:useLocalDpi xmlns:a14="http://schemas.microsoft.com/office/drawing/2010/main" val="0"/>
+              </a:ext>
+              <a:ext uri="{96DAC541-7B7A-43D3-8B79-37D633B846F1}">
+                <asvg:svgBlip xmlns:asvg="http://schemas.microsoft.com/office/drawing/2016/SVG/main" r:embed="rId9"/>
+              </a:ext>
+            </a:extLst>
+          </a:blip>
+          <a:stretch>
+            <a:fillRect/>
+          </a:stretch>
+        </p:blipFill>
+        <p:spPr>
+          <a:xfrm>
+            <a:off x="9461500" y="2159000"/>
+            <a:ext cx="635000" cy="635000"/>
+          </a:xfrm>
+          <a:prstGeom prst="rect">
+            <a:avLst/>
+          </a:prstGeom>
+        </p:spPr>
+      </p:pic>
+      <p:sp>
+        <p:nvSpPr>
+          <p:cNvPr id="15" name="AutoShape 15">
+            <a:extLst>
+              <a:ext uri="{FF2B5EF4-FFF2-40B4-BE49-F238E27FC236}">
+                <a16:creationId xmlns:a16="http://schemas.microsoft.com/office/drawing/2014/main" id="{C80EB6D5-5034-BDB0-5A38-2CBA2797EB54}"/>
+              </a:ext>
+            </a:extLst>
+          </p:cNvPr>
+          <p:cNvSpPr/>
+          <p:nvPr/>
+        </p:nvSpPr>
+        <p:spPr>
+          <a:xfrm>
+            <a:off x="8255000" y="2921000"/>
+            <a:ext cx="3048000" cy="381000"/>
+          </a:xfrm>
+          <a:prstGeom prst="rect">
+            <a:avLst/>
+          </a:prstGeom>
+          <a:noFill/>
+          <a:ln w="12700" cap="flat" cmpd="sng">
+            <a:noFill/>
+            <a:prstDash val="solid"/>
+            <a:round/>
+          </a:ln>
+        </p:spPr>
+        <p:txBody>
+          <a:bodyPr vert="horz" wrap="square" lIns="0" tIns="0" rIns="0" bIns="0" rtlCol="0" anchor="ctr" anchorCtr="0"/>
+          <a:lstStyle/>
+          <a:p>
+            <a:pPr indent="0" algn="ctr">
+              <a:lnSpc>
+                <a:spcPct val="125000"/>
+              </a:lnSpc>
+              <a:defRPr/>
+            </a:pPr>
+            <a:r>
+              <a:rPr lang="zh-CN" altLang="en-US" sz="1800" b="1" i="0" u="none" strike="noStrike" dirty="0">
+                <a:solidFill>
+                  <a:srgbClr val="1E3A8A"/>
+                </a:solidFill>
+                <a:latin typeface="Noto Sans SC"/>
+                <a:ea typeface="Noto Sans SC"/>
+                <a:cs typeface="Noto Sans SC"/>
+                <a:sym typeface="Noto Sans SC"/>
+              </a:rPr>
+              <a:t>增强协作模式</a:t>
+            </a:r>
+            <a:endParaRPr lang="en-US" sz="1100" dirty="0"/>
+          </a:p>
+        </p:txBody>
+      </p:sp>
+      <p:sp>
+        <p:nvSpPr>
+          <p:cNvPr id="16" name="AutoShape 16">
+            <a:extLst>
+              <a:ext uri="{FF2B5EF4-FFF2-40B4-BE49-F238E27FC236}">
+                <a16:creationId xmlns:a16="http://schemas.microsoft.com/office/drawing/2014/main" id="{E3226499-0072-6D36-DF35-2912D0CE127D}"/>
+              </a:ext>
+            </a:extLst>
+          </p:cNvPr>
+          <p:cNvSpPr/>
+          <p:nvPr/>
+        </p:nvSpPr>
+        <p:spPr>
+          <a:xfrm>
+            <a:off x="8318500" y="3365500"/>
+            <a:ext cx="2921000" cy="1016000"/>
+          </a:xfrm>
+          <a:prstGeom prst="rect">
+            <a:avLst/>
+          </a:prstGeom>
+          <a:noFill/>
+          <a:ln w="12700" cap="flat" cmpd="sng">
+            <a:noFill/>
+            <a:prstDash val="solid"/>
+            <a:round/>
+          </a:ln>
+        </p:spPr>
+        <p:txBody>
+          <a:bodyPr vert="horz" wrap="square" lIns="0" tIns="0" rIns="0" bIns="0" rtlCol="0" anchor="ctr" anchorCtr="0"/>
+          <a:lstStyle/>
+          <a:p>
+            <a:pPr indent="0" algn="just">
+              <a:lnSpc>
+                <a:spcPct val="108333"/>
+              </a:lnSpc>
+              <a:defRPr/>
+            </a:pPr>
+            <a:r>
+              <a:rPr lang="zh-CN" altLang="en-US" sz="1400" b="0" i="0" u="none" strike="noStrike" dirty="0">
+                <a:solidFill>
+                  <a:srgbClr val="374151"/>
+                </a:solidFill>
+                <a:latin typeface="Noto Sans SC"/>
+                <a:ea typeface="Noto Sans SC"/>
+                <a:cs typeface="Noto Sans SC"/>
+                <a:sym typeface="Noto Sans SC"/>
+              </a:rPr>
+              <a:t>协作模式</a:t>
+            </a:r>
+            <a:r>
+              <a:rPr lang="zh-CN" altLang="en-US" dirty="0">
+                <a:solidFill>
+                  <a:srgbClr val="374151"/>
+                </a:solidFill>
+                <a:latin typeface="Noto Sans SC"/>
+                <a:ea typeface="Noto Sans SC"/>
+                <a:cs typeface="Noto Sans SC"/>
+                <a:sym typeface="Noto Sans SC"/>
+              </a:rPr>
+              <a:t>：</a:t>
+            </a:r>
+            <a:r>
+              <a:rPr lang="zh-CN" altLang="en-US" sz="1400" b="0" i="0" u="none" strike="noStrike" dirty="0">
+                <a:solidFill>
+                  <a:srgbClr val="374151"/>
+                </a:solidFill>
+                <a:latin typeface="Noto Sans SC"/>
+                <a:ea typeface="Noto Sans SC"/>
+                <a:cs typeface="Noto Sans SC"/>
+                <a:sym typeface="Noto Sans SC"/>
+              </a:rPr>
+              <a:t>我们一起探索</a:t>
+            </a:r>
+            <a:endParaRPr lang="en-US" altLang="zh-CN" sz="1400" b="0" i="0" u="none" strike="noStrike" dirty="0">
+              <a:solidFill>
+                <a:srgbClr val="374151"/>
+              </a:solidFill>
+              <a:latin typeface="Noto Sans SC"/>
+              <a:ea typeface="Noto Sans SC"/>
+              <a:cs typeface="Noto Sans SC"/>
+              <a:sym typeface="Noto Sans SC"/>
+            </a:endParaRPr>
+          </a:p>
+          <a:p>
+            <a:pPr indent="0" algn="just">
+              <a:lnSpc>
+                <a:spcPct val="108333"/>
+              </a:lnSpc>
+              <a:defRPr/>
+            </a:pPr>
+            <a:r>
+              <a:rPr lang="zh-CN" altLang="en-US" sz="1400" b="0" i="0" u="none" strike="noStrike" dirty="0">
+                <a:solidFill>
+                  <a:srgbClr val="374151"/>
+                </a:solidFill>
+                <a:latin typeface="Noto Sans SC"/>
+                <a:ea typeface="Noto Sans SC"/>
+                <a:cs typeface="Noto Sans SC"/>
+                <a:sym typeface="Noto Sans SC"/>
+              </a:rPr>
+              <a:t>家长＋孩子＋</a:t>
+            </a:r>
+            <a:r>
+              <a:rPr lang="en-US" altLang="zh-CN" sz="1400" b="0" i="0" u="none" strike="noStrike" dirty="0">
+                <a:solidFill>
+                  <a:srgbClr val="374151"/>
+                </a:solidFill>
+                <a:latin typeface="Noto Sans SC"/>
+                <a:ea typeface="Noto Sans SC"/>
+                <a:cs typeface="Noto Sans SC"/>
+                <a:sym typeface="Noto Sans SC"/>
+              </a:rPr>
+              <a:t>AI </a:t>
+            </a:r>
+            <a:r>
+              <a:rPr lang="zh-CN" altLang="en-US" sz="1400" b="0" i="0" u="none" strike="noStrike" dirty="0">
+                <a:solidFill>
+                  <a:srgbClr val="374151"/>
+                </a:solidFill>
+                <a:latin typeface="Noto Sans SC"/>
+                <a:ea typeface="Noto Sans SC"/>
+                <a:cs typeface="Noto Sans SC"/>
+                <a:sym typeface="Noto Sans SC"/>
+              </a:rPr>
+              <a:t>作为搭档共同探索一件事方向由一起定，结论由一起得出详见：案例</a:t>
+            </a:r>
+            <a:r>
+              <a:rPr lang="en-US" altLang="zh-CN" sz="1400" b="0" i="0" u="none" strike="noStrike" dirty="0">
+                <a:solidFill>
+                  <a:srgbClr val="374151"/>
+                </a:solidFill>
+                <a:latin typeface="Noto Sans SC"/>
+                <a:ea typeface="Noto Sans SC"/>
+                <a:cs typeface="Noto Sans SC"/>
+                <a:sym typeface="Noto Sans SC"/>
+              </a:rPr>
+              <a:t>3</a:t>
+            </a:r>
+            <a:r>
+              <a:rPr lang="zh-CN" altLang="en-US" sz="1400" b="0" i="0" u="none" strike="noStrike" dirty="0">
+                <a:solidFill>
+                  <a:srgbClr val="374151"/>
+                </a:solidFill>
+                <a:latin typeface="Noto Sans SC"/>
+                <a:ea typeface="Noto Sans SC"/>
+                <a:cs typeface="Noto Sans SC"/>
+                <a:sym typeface="Noto Sans SC"/>
+              </a:rPr>
+              <a:t>：意大利语启蒙</a:t>
+            </a:r>
+            <a:endParaRPr lang="en-US" altLang="zh-CN" sz="1400" b="0" i="0" u="none" strike="noStrike" dirty="0">
+              <a:solidFill>
+                <a:srgbClr val="374151"/>
+              </a:solidFill>
+              <a:latin typeface="Noto Sans SC"/>
+              <a:ea typeface="Noto Sans SC"/>
+              <a:cs typeface="Noto Sans SC"/>
+              <a:sym typeface="Noto Sans SC"/>
+            </a:endParaRPr>
+          </a:p>
+          <a:p>
+            <a:pPr indent="0" algn="just">
+              <a:lnSpc>
+                <a:spcPct val="108333"/>
+              </a:lnSpc>
+              <a:defRPr/>
+            </a:pPr>
+            <a:endParaRPr lang="en-US" sz="1100" dirty="0"/>
+          </a:p>
+        </p:txBody>
+      </p:sp>
+    </p:spTree>
+    <p:extLst>
+      <p:ext uri="{BB962C8B-B14F-4D97-AF65-F5344CB8AC3E}">
+        <p14:creationId xmlns:p14="http://schemas.microsoft.com/office/powerpoint/2010/main" val="3705019064"/>
+      </p:ext>
+    </p:extLst>
   </p:cSld>
   <p:clrMapOvr>
     <a:masterClrMapping/>
